--- a/docs/WatchAgent_Agentic_AI_Brownbag.pptx
+++ b/docs/WatchAgent_Agentic_AI_Brownbag.pptx
@@ -8,7 +8,12 @@
     <p:sldId id="256" r:id="rId2"/>
     <p:sldId id="257" r:id="rId3"/>
     <p:sldId id="258" r:id="rId4"/>
+    <p:sldId id="267" r:id="rId18"/>
+    <p:sldId id="268" r:id="rId19"/>
+    <p:sldId id="269" r:id="rId20"/>
     <p:sldId id="259" r:id="rId5"/>
+    <p:sldId id="266" r:id="rId17"/>
+    <p:sldId id="270" r:id="rId21"/>
     <p:sldId id="260" r:id="rId6"/>
     <p:sldId id="261" r:id="rId7"/>
     <p:sldId id="262" r:id="rId8"/>
@@ -1053,6 +1058,446 @@
 </p:notes>
 </file>
 
+<file path=ppt/notesSlides/notesSlide11.xml><?xml version="1.0" encoding="utf-8"?>
+<p:notes xmlns:a="http://schemas.openxmlformats.org/drawingml/2006/main" xmlns:r="http://schemas.openxmlformats.org/officeDocument/2006/relationships" xmlns:p="http://schemas.openxmlformats.org/presentationml/2006/main">
+  <p:cSld>
+    <p:spTree>
+      <p:nvGrpSpPr>
+        <p:cNvPr id="1" name=""/>
+        <p:cNvGrpSpPr/>
+        <p:nvPr/>
+      </p:nvGrpSpPr>
+      <p:grpSpPr>
+        <a:xfrm>
+          <a:off x="0" y="0"/>
+          <a:ext cx="0" cy="0"/>
+          <a:chOff x="0" y="0"/>
+          <a:chExt cx="0" cy="0"/>
+        </a:xfrm>
+      </p:grpSpPr>
+      <p:sp>
+        <p:nvSpPr>
+          <p:cNvPr id="2" name="Slide Image Placeholder 1"/>
+          <p:cNvSpPr>
+            <a:spLocks noGrp="1" noRot="1" noChangeAspect="1"/>
+          </p:cNvSpPr>
+          <p:nvPr>
+            <p:ph type="sldImg"/>
+          </p:nvPr>
+        </p:nvSpPr>
+        <p:spPr/>
+      </p:sp>
+      <p:sp>
+        <p:nvSpPr>
+          <p:cNvPr id="3" name="Notes Placeholder 2"/>
+          <p:cNvSpPr>
+            <a:spLocks noGrp="1"/>
+          </p:cNvSpPr>
+          <p:nvPr>
+            <p:ph type="body" idx="1"/>
+          </p:nvPr>
+        </p:nvSpPr>
+        <p:spPr/>
+        <p:txBody>
+          <a:bodyPr/>
+          <a:lstStyle/>
+          <a:p>
+            <a:r>
+              <a:rPr lang="en-US" dirty="0"/>
+              <a:t>This is the architecture after the agentic redesign. Follow the green main path: GitHub Actions starts watchagent check, which hands each watch to the research agent. The agent decides how to research: it searches with Tavily, opens pages, and submits listings. Plain code then checks every listing: the price must be written in real search text, for the exact reference, and not an outlier. Code tells the agent what it accepted and what it still needs, and the agent keeps going until three listings agree; their median is stored in watches.db and the verdict is computed, not generated. Every model call goes through middleware for retries, a fallback model and a daily request budget. On Telegram, an assistant can answer questions and run research, but it can only propose changes to the watchlist; nothing changes until you tap Confirm.</a:t>
+            </a:r>
+            <a:endParaRPr lang="en-US" dirty="0"/>
+          </a:p>
+        </p:txBody>
+      </p:sp>
+      <p:sp>
+        <p:nvSpPr>
+          <p:cNvPr id="4" name="Slide Number Placeholder 3"/>
+          <p:cNvSpPr>
+            <a:spLocks noGrp="1"/>
+          </p:cNvSpPr>
+          <p:nvPr>
+            <p:ph type="sldNum" sz="quarter" idx="10"/>
+          </p:nvPr>
+        </p:nvSpPr>
+        <p:spPr/>
+        <p:txBody>
+          <a:bodyPr/>
+          <a:lstStyle/>
+          <a:p>
+            <a:fld id="{F7021451-1387-4CA6-816F-3879F97B5CBC}" type="slidenum">
+              <a:rPr lang="en-US"/>
+              <a:t>4</a:t>
+            </a:fld>
+            <a:endParaRPr lang="en-US"/>
+          </a:p>
+        </p:txBody>
+      </p:sp>
+    </p:spTree>
+    <p:extLst>
+      <p:ext uri="{BB962C8B-B14F-4D97-AF65-F5344CB8AC3E}">
+        <p14:creationId xmlns:p14="http://schemas.microsoft.com/office/powerpoint/2010/main" val="1024086991"/>
+      </p:ext>
+    </p:extLst>
+  </p:cSld>
+  <p:clrMapOvr>
+    <a:masterClrMapping/>
+  </p:clrMapOvr>
+</p:notes>
+</file>
+
+<file path=ppt/notesSlides/notesSlide12.xml><?xml version="1.0" encoding="utf-8"?>
+<p:notes xmlns:a="http://schemas.openxmlformats.org/drawingml/2006/main" xmlns:r="http://schemas.openxmlformats.org/officeDocument/2006/relationships" xmlns:p="http://schemas.openxmlformats.org/presentationml/2006/main">
+  <p:cSld>
+    <p:spTree>
+      <p:nvGrpSpPr>
+        <p:cNvPr id="1" name=""/>
+        <p:cNvGrpSpPr/>
+        <p:nvPr/>
+      </p:nvGrpSpPr>
+      <p:grpSpPr>
+        <a:xfrm>
+          <a:off x="0" y="0"/>
+          <a:ext cx="0" cy="0"/>
+          <a:chOff x="0" y="0"/>
+          <a:chExt cx="0" cy="0"/>
+        </a:xfrm>
+      </p:grpSpPr>
+      <p:sp>
+        <p:nvSpPr>
+          <p:cNvPr id="2" name="Slide Image Placeholder 1"/>
+          <p:cNvSpPr>
+            <a:spLocks noGrp="1" noRot="1" noChangeAspect="1"/>
+          </p:cNvSpPr>
+          <p:nvPr>
+            <p:ph type="sldImg"/>
+          </p:nvPr>
+        </p:nvSpPr>
+        <p:spPr/>
+      </p:sp>
+      <p:sp>
+        <p:nvSpPr>
+          <p:cNvPr id="3" name="Notes Placeholder 2"/>
+          <p:cNvSpPr>
+            <a:spLocks noGrp="1"/>
+          </p:cNvSpPr>
+          <p:nvPr>
+            <p:ph type="body" idx="1"/>
+          </p:nvPr>
+        </p:nvSpPr>
+        <p:spPr/>
+        <p:txBody>
+          <a:bodyPr/>
+          <a:lstStyle/>
+          <a:p>
+            <a:r>
+              <a:rPr lang="en-US" dirty="0"/>
+              <a:t>LangChain, the framework WatchAgent is built on, defines an agent in one sentence: a model calling tools in a loop until a given task is complete. Think of the model as the brain that decides the next step, the tools as its hands, and the loop as the persistence to keep going until the job is done. On the right is how WatchAgent maps onto that: the goal is one watch's real price today; the tools are web search, opening a listing, handing in what it found and saving a tip; it keeps going until three matching listings are accepted; and plain code checks every price, while any change to your watchlist needs your OK.</a:t>
+            </a:r>
+            <a:endParaRPr lang="en-US" dirty="0"/>
+          </a:p>
+        </p:txBody>
+      </p:sp>
+      <p:sp>
+        <p:nvSpPr>
+          <p:cNvPr id="4" name="Slide Number Placeholder 3"/>
+          <p:cNvSpPr>
+            <a:spLocks noGrp="1"/>
+          </p:cNvSpPr>
+          <p:nvPr>
+            <p:ph type="sldNum" sz="quarter" idx="10"/>
+          </p:nvPr>
+        </p:nvSpPr>
+        <p:spPr/>
+        <p:txBody>
+          <a:bodyPr/>
+          <a:lstStyle/>
+          <a:p>
+            <a:fld id="{F7021451-1387-4CA6-816F-3879F97B5CBC}" type="slidenum">
+              <a:rPr lang="en-US"/>
+              <a:t>4</a:t>
+            </a:fld>
+            <a:endParaRPr lang="en-US"/>
+          </a:p>
+        </p:txBody>
+      </p:sp>
+    </p:spTree>
+    <p:extLst>
+      <p:ext uri="{BB962C8B-B14F-4D97-AF65-F5344CB8AC3E}">
+        <p14:creationId xmlns:p14="http://schemas.microsoft.com/office/powerpoint/2010/main" val="1024086991"/>
+      </p:ext>
+    </p:extLst>
+  </p:cSld>
+  <p:clrMapOvr>
+    <a:masterClrMapping/>
+  </p:clrMapOvr>
+</p:notes>
+</file>
+
+<file path=ppt/notesSlides/notesSlide13.xml><?xml version="1.0" encoding="utf-8"?>
+<p:notes xmlns:a="http://schemas.openxmlformats.org/drawingml/2006/main" xmlns:r="http://schemas.openxmlformats.org/officeDocument/2006/relationships" xmlns:p="http://schemas.openxmlformats.org/presentationml/2006/main">
+  <p:cSld>
+    <p:spTree>
+      <p:nvGrpSpPr>
+        <p:cNvPr id="1" name=""/>
+        <p:cNvGrpSpPr/>
+        <p:nvPr/>
+      </p:nvGrpSpPr>
+      <p:grpSpPr>
+        <a:xfrm>
+          <a:off x="0" y="0"/>
+          <a:ext cx="0" cy="0"/>
+          <a:chOff x="0" y="0"/>
+          <a:chExt cx="0" cy="0"/>
+        </a:xfrm>
+      </p:grpSpPr>
+      <p:sp>
+        <p:nvSpPr>
+          <p:cNvPr id="2" name="Slide Image Placeholder 1"/>
+          <p:cNvSpPr>
+            <a:spLocks noGrp="1" noRot="1" noChangeAspect="1"/>
+          </p:cNvSpPr>
+          <p:nvPr>
+            <p:ph type="sldImg"/>
+          </p:nvPr>
+        </p:nvSpPr>
+        <p:spPr/>
+      </p:sp>
+      <p:sp>
+        <p:nvSpPr>
+          <p:cNvPr id="3" name="Notes Placeholder 2"/>
+          <p:cNvSpPr>
+            <a:spLocks noGrp="1"/>
+          </p:cNvSpPr>
+          <p:nvPr>
+            <p:ph type="body" idx="1"/>
+          </p:nvPr>
+        </p:nvSpPr>
+        <p:spPr/>
+        <p:txBody>
+          <a:bodyPr/>
+          <a:lstStyle/>
+          <a:p>
+            <a:r>
+              <a:rPr lang="en-US" dirty="0"/>
+              <a:t>Generative AI is reactive: it waits for your question, gives one answer from what it already knows, and stops; you decide what to do with it. Agentic AI is proactive: it is given a goal, can start on a schedule, takes several steps, looks things up, and checks its own results before acting. LangChain describes agents as working in continuous feedback loops for problems whose solution path is unpredictable, and Anthropic describes them as systems that direct their own process and tool use. The trade-off: more independence needs more guardrails, which is why WatchAgent's prices are checked by plain code rather than trusted.</a:t>
+            </a:r>
+            <a:endParaRPr lang="en-US" dirty="0"/>
+          </a:p>
+        </p:txBody>
+      </p:sp>
+      <p:sp>
+        <p:nvSpPr>
+          <p:cNvPr id="4" name="Slide Number Placeholder 3"/>
+          <p:cNvSpPr>
+            <a:spLocks noGrp="1"/>
+          </p:cNvSpPr>
+          <p:nvPr>
+            <p:ph type="sldNum" sz="quarter" idx="10"/>
+          </p:nvPr>
+        </p:nvSpPr>
+        <p:spPr/>
+        <p:txBody>
+          <a:bodyPr/>
+          <a:lstStyle/>
+          <a:p>
+            <a:fld id="{F7021451-1387-4CA6-816F-3879F97B5CBC}" type="slidenum">
+              <a:rPr lang="en-US"/>
+              <a:t>4</a:t>
+            </a:fld>
+            <a:endParaRPr lang="en-US"/>
+          </a:p>
+        </p:txBody>
+      </p:sp>
+    </p:spTree>
+    <p:extLst>
+      <p:ext uri="{BB962C8B-B14F-4D97-AF65-F5344CB8AC3E}">
+        <p14:creationId xmlns:p14="http://schemas.microsoft.com/office/powerpoint/2010/main" val="1024086991"/>
+      </p:ext>
+    </p:extLst>
+  </p:cSld>
+  <p:clrMapOvr>
+    <a:masterClrMapping/>
+  </p:clrMapOvr>
+</p:notes>
+</file>
+
+<file path=ppt/notesSlides/notesSlide14.xml><?xml version="1.0" encoding="utf-8"?>
+<p:notes xmlns:a="http://schemas.openxmlformats.org/drawingml/2006/main" xmlns:r="http://schemas.openxmlformats.org/officeDocument/2006/relationships" xmlns:p="http://schemas.openxmlformats.org/presentationml/2006/main">
+  <p:cSld>
+    <p:spTree>
+      <p:nvGrpSpPr>
+        <p:cNvPr id="1" name=""/>
+        <p:cNvGrpSpPr/>
+        <p:nvPr/>
+      </p:nvGrpSpPr>
+      <p:grpSpPr>
+        <a:xfrm>
+          <a:off x="0" y="0"/>
+          <a:ext cx="0" cy="0"/>
+          <a:chOff x="0" y="0"/>
+          <a:chExt cx="0" cy="0"/>
+        </a:xfrm>
+      </p:grpSpPr>
+      <p:sp>
+        <p:nvSpPr>
+          <p:cNvPr id="2" name="Slide Image Placeholder 1"/>
+          <p:cNvSpPr>
+            <a:spLocks noGrp="1" noRot="1" noChangeAspect="1"/>
+          </p:cNvSpPr>
+          <p:nvPr>
+            <p:ph type="sldImg"/>
+          </p:nvPr>
+        </p:nvSpPr>
+        <p:spPr/>
+      </p:sp>
+      <p:sp>
+        <p:nvSpPr>
+          <p:cNvPr id="3" name="Notes Placeholder 2"/>
+          <p:cNvSpPr>
+            <a:spLocks noGrp="1"/>
+          </p:cNvSpPr>
+          <p:nvPr>
+            <p:ph type="body" idx="1"/>
+          </p:nvPr>
+        </p:nvSpPr>
+        <p:spPr/>
+        <p:txBody>
+          <a:bodyPr/>
+          <a:lstStyle/>
+          <a:p>
+            <a:r>
+              <a:rPr lang="en-US" dirty="0"/>
+              <a:t>Chain-of-thought means the model works through a problem in intermediate steps instead of jumping to an answer; Wei and colleagues showed in 2022 that this significantly improves multi-step reasoning. Agents go one step further, as in the ReAct approach from Yao and colleagues: they interleave reasoning with actions, so each step's result is real information that shapes the next step. The right side is a real WatchAgent run from today: its first hand-in was partly rejected because two quoted texts were not on the page, so it searched again more precisely, got three listings accepted, recorded the middle price of 6,740 dollars, and saved a tip for next time. The model decides what to try next; plain code decides what counts as a price.</a:t>
+            </a:r>
+            <a:endParaRPr lang="en-US" dirty="0"/>
+          </a:p>
+        </p:txBody>
+      </p:sp>
+      <p:sp>
+        <p:nvSpPr>
+          <p:cNvPr id="4" name="Slide Number Placeholder 3"/>
+          <p:cNvSpPr>
+            <a:spLocks noGrp="1"/>
+          </p:cNvSpPr>
+          <p:nvPr>
+            <p:ph type="sldNum" sz="quarter" idx="10"/>
+          </p:nvPr>
+        </p:nvSpPr>
+        <p:spPr/>
+        <p:txBody>
+          <a:bodyPr/>
+          <a:lstStyle/>
+          <a:p>
+            <a:fld id="{F7021451-1387-4CA6-816F-3879F97B5CBC}" type="slidenum">
+              <a:rPr lang="en-US"/>
+              <a:t>4</a:t>
+            </a:fld>
+            <a:endParaRPr lang="en-US"/>
+          </a:p>
+        </p:txBody>
+      </p:sp>
+    </p:spTree>
+    <p:extLst>
+      <p:ext uri="{BB962C8B-B14F-4D97-AF65-F5344CB8AC3E}">
+        <p14:creationId xmlns:p14="http://schemas.microsoft.com/office/powerpoint/2010/main" val="1024086991"/>
+      </p:ext>
+    </p:extLst>
+  </p:cSld>
+  <p:clrMapOvr>
+    <a:masterClrMapping/>
+  </p:clrMapOvr>
+</p:notes>
+</file>
+
+<file path=ppt/notesSlides/notesSlide15.xml><?xml version="1.0" encoding="utf-8"?>
+<p:notes xmlns:a="http://schemas.openxmlformats.org/drawingml/2006/main" xmlns:r="http://schemas.openxmlformats.org/officeDocument/2006/relationships" xmlns:p="http://schemas.openxmlformats.org/presentationml/2006/main">
+  <p:cSld>
+    <p:spTree>
+      <p:nvGrpSpPr>
+        <p:cNvPr id="1" name=""/>
+        <p:cNvGrpSpPr/>
+        <p:nvPr/>
+      </p:nvGrpSpPr>
+      <p:grpSpPr>
+        <a:xfrm>
+          <a:off x="0" y="0"/>
+          <a:ext cx="0" cy="0"/>
+          <a:chOff x="0" y="0"/>
+          <a:chExt cx="0" cy="0"/>
+        </a:xfrm>
+      </p:grpSpPr>
+      <p:sp>
+        <p:nvSpPr>
+          <p:cNvPr id="2" name="Slide Image Placeholder 1"/>
+          <p:cNvSpPr>
+            <a:spLocks noGrp="1" noRot="1" noChangeAspect="1"/>
+          </p:cNvSpPr>
+          <p:nvPr>
+            <p:ph type="sldImg"/>
+          </p:nvPr>
+        </p:nvSpPr>
+        <p:spPr/>
+      </p:sp>
+      <p:sp>
+        <p:nvSpPr>
+          <p:cNvPr id="3" name="Notes Placeholder 2"/>
+          <p:cNvSpPr>
+            <a:spLocks noGrp="1"/>
+          </p:cNvSpPr>
+          <p:nvPr>
+            <p:ph type="body" idx="1"/>
+          </p:nvPr>
+        </p:nvSpPr>
+        <p:spPr/>
+        <p:txBody>
+          <a:bodyPr/>
+          <a:lstStyle/>
+          <a:p>
+            <a:r>
+              <a:rPr lang="en-US" dirty="0"/>
+              <a:t>These are the five boxes from the diagram, in plain terms. Three do the work. watchagent check is the scheduler: every six hours it picks the watches that have gone longest without a check, researches three at a time, and sends a Telegram alert when one is a good buy. The research agent is the AI researcher: it searches, opens listings, and keeps handing in what it finds until three listings of the exact watch are accepted. The Telegram assistant is your chat window: it answers questions and can run a fresh check, but it can only suggest changes, and nothing happens until you tap Confirm. Two keep that work honest. The listing checks are plain code, no AI: a price counts only if it is really on the page, for the exact reference, and not far off the others; the middle price is recorded and the verdict is simple arithmetic. The model middleware wraps every AI call: it makes the AI research before answering, retries when the service is busy, switches to a backup model, caps the steps, and keeps a daily limit so the assistant always has requests left.</a:t>
+            </a:r>
+            <a:endParaRPr lang="en-US" dirty="0"/>
+          </a:p>
+        </p:txBody>
+      </p:sp>
+      <p:sp>
+        <p:nvSpPr>
+          <p:cNvPr id="4" name="Slide Number Placeholder 3"/>
+          <p:cNvSpPr>
+            <a:spLocks noGrp="1"/>
+          </p:cNvSpPr>
+          <p:nvPr>
+            <p:ph type="sldNum" sz="quarter" idx="10"/>
+          </p:nvPr>
+        </p:nvSpPr>
+        <p:spPr/>
+        <p:txBody>
+          <a:bodyPr/>
+          <a:lstStyle/>
+          <a:p>
+            <a:fld id="{F7021451-1387-4CA6-816F-3879F97B5CBC}" type="slidenum">
+              <a:rPr lang="en-US"/>
+              <a:t>4</a:t>
+            </a:fld>
+            <a:endParaRPr lang="en-US"/>
+          </a:p>
+        </p:txBody>
+      </p:sp>
+    </p:spTree>
+    <p:extLst>
+      <p:ext uri="{BB962C8B-B14F-4D97-AF65-F5344CB8AC3E}">
+        <p14:creationId xmlns:p14="http://schemas.microsoft.com/office/powerpoint/2010/main" val="1024086991"/>
+      </p:ext>
+    </p:extLst>
+  </p:cSld>
+  <p:clrMapOvr>
+    <a:masterClrMapping/>
+  </p:clrMapOvr>
+</p:notes>
+</file>
+
 <file path=ppt/notesSlides/notesSlide2.xml><?xml version="1.0" encoding="utf-8"?>
 <p:notes xmlns:a="http://schemas.openxmlformats.org/drawingml/2006/main" xmlns:r="http://schemas.openxmlformats.org/officeDocument/2006/relationships" xmlns:p="http://schemas.openxmlformats.org/presentationml/2006/main">
   <p:cSld>
@@ -1275,7 +1720,7 @@
           <a:p>
             <a:r>
               <a:rPr lang="en-US" dirty="0"/>
-              <a:t>The problem: luxury watch prices are scattered across marketplaces and noisy, and deciding whether it is a good deal takes judgement. The flow runs left to right. Every six hours GitHub Actions launches the agent. The agent decides which searches to run, records prices through tools that enforce guardrails, reads history, and returns a structured verdict. A BUY triggers a Telegram alert. The bottom panels split what the LLM decides from what plain code enforces.</a:t>
+              <a:t>The problem: luxury watch prices are scattered across marketplaces and noisy, and deciding whether it is a good deal takes judgement. The flow runs left to right. Every six hours GitHub Actions launches the agent. The agent decides which searches to run and which listings to hand in; plain code checks every listing, records the middle price of three or more, and computes the verdict. A BUY triggers a Telegram alert, and you can also ask for a check from Telegram. The bottom panels split what the LLM decides from what plain code enforces.</a:t>
             </a:r>
             <a:endParaRPr lang="en-US" dirty="0"/>
           </a:p>
@@ -1363,7 +1808,7 @@
           <a:p>
             <a:r>
               <a:rPr lang="en-US" dirty="0"/>
-              <a:t>This is the most transferable lesson. An LLM will happily invent a price. So the tools themselves refuse bad input: a price must literally appear in the quoted snippet; a confirmed price needs two independent sources within five percent; the final answer is a typed object, not free text; rate limits are retried with backoff; and alerts have a cooldown so nobody gets spammed. None of this is AI. It is ordinary code wrapped around the AI.</a:t>
+              <a:t>This is the most transferable lesson. An LLM will happily invent a price. So the tools themselves refuse bad input: a price must be written on the page it came from, for the exact watch; at least three matching listings must agree, with outliers dropped; the verdict is computed by code, not written by the model; the model must research before answering, with retries, a backup model and a daily budget; and alerts need three or more listings and have a 48-hour cooldown so nobody gets spammed. None of this is AI. It is ordinary code wrapped around the AI.</a:t>
             </a:r>
             <a:endParaRPr lang="en-US" dirty="0"/>
           </a:p>
@@ -2426,7 +2871,7 @@
                 <a:ea typeface="Arial" pitchFamily="34" charset="-122"/>
                 <a:cs typeface="Arial" pitchFamily="34" charset="-120"/>
               </a:rPr>
-              <a:t>10</a:t>
+              <a:t>15</a:t>
             </a:r>
             <a:endParaRPr lang="en-US" sz="900" dirty="0"/>
           </a:p>
@@ -3164,6 +3609,4542 @@
               <a:t>Which decisions would you never let it make alone?</a:t>
             </a:r>
             <a:endParaRPr lang="en-US" sz="1300" dirty="0"/>
+          </a:p>
+        </p:txBody>
+      </p:sp>
+    </p:spTree>
+  </p:cSld>
+  <p:clrMapOvr>
+    <a:masterClrMapping/>
+  </p:clrMapOvr>
+</p:sld>
+</file>
+
+<file path=ppt/slides/slide11.xml><?xml version="1.0" encoding="utf-8"?>
+<p:sld xmlns:a="http://schemas.openxmlformats.org/drawingml/2006/main" xmlns:r="http://schemas.openxmlformats.org/officeDocument/2006/relationships" xmlns:p="http://schemas.openxmlformats.org/presentationml/2006/main">
+  <p:cSld name="Slide 4">
+    <p:bg>
+      <p:bgPr>
+        <a:solidFill>
+          <a:srgbClr val="FFFFFF"/>
+        </a:solidFill>
+      </p:bgPr>
+    </p:bg>
+    <p:spTree>
+      <p:nvGrpSpPr>
+        <p:cNvPr id="1" name=""/>
+        <p:cNvGrpSpPr/>
+        <p:nvPr/>
+      </p:nvGrpSpPr>
+      <p:grpSpPr>
+        <a:xfrm>
+          <a:off x="0" y="0"/>
+          <a:ext cx="0" cy="0"/>
+          <a:chOff x="0" y="0"/>
+          <a:chExt cx="0" cy="0"/>
+        </a:xfrm>
+      </p:grpSpPr>
+      <p:sp>
+        <p:nvSpPr>
+          <p:cNvPr id="2" name="Text 0"/>
+          <p:cNvSpPr txBox="1"/>
+          <p:nvPr/>
+        </p:nvSpPr>
+        <p:spPr>
+          <a:xfrm>
+            <a:off x="548640" y="274320"/>
+            <a:ext cx="7315200" cy="228600"/>
+          </a:xfrm>
+          <a:prstGeom prst="rect">
+            <a:avLst/>
+          </a:prstGeom>
+          <a:noFill/>
+          <a:ln/>
+        </p:spPr>
+        <p:txBody>
+          <a:bodyPr wrap="square" lIns="0" tIns="0" rIns="0" bIns="0" rtlCol="0" anchor="t"/>
+          <a:lstStyle/>
+          <a:p>
+            <a:pPr indent="0" marL="0">
+              <a:buNone/>
+            </a:pPr>
+            <a:r>
+              <a:rPr lang="en-US" sz="1000" b="1" spc="200" kern="0" dirty="0">
+                <a:solidFill>
+                  <a:srgbClr val="2251FF"/>
+                </a:solidFill>
+                <a:latin typeface="Arial" pitchFamily="34" charset="0"/>
+                <a:ea typeface="Arial" pitchFamily="34" charset="-122"/>
+                <a:cs typeface="Arial" pitchFamily="34" charset="-120"/>
+              </a:rPr>
+              <a:t>ARCHITECTURE: THE AGENTIC REDESIGN</a:t>
+            </a:r>
+            <a:endParaRPr lang="en-US" sz="1000" dirty="0"/>
+          </a:p>
+        </p:txBody>
+      </p:sp>
+      <p:sp>
+        <p:nvSpPr>
+          <p:cNvPr id="3" name="Text 1"/>
+          <p:cNvSpPr txBox="1"/>
+          <p:nvPr/>
+        </p:nvSpPr>
+        <p:spPr>
+          <a:xfrm>
+            <a:off x="548640" y="594360"/>
+            <a:ext cx="11064240" cy="914400"/>
+          </a:xfrm>
+          <a:prstGeom prst="rect">
+            <a:avLst/>
+          </a:prstGeom>
+          <a:noFill/>
+          <a:ln/>
+        </p:spPr>
+        <p:txBody>
+          <a:bodyPr wrap="square" lIns="0" tIns="0" rIns="0" bIns="0" rtlCol="0" anchor="t"/>
+          <a:lstStyle/>
+          <a:p>
+            <a:pPr indent="0" marL="0">
+              <a:buNone/>
+            </a:pPr>
+            <a:r>
+              <a:rPr lang="en-US" sz="2600" b="1" dirty="0">
+                <a:solidFill>
+                  <a:srgbClr val="051C2C"/>
+                </a:solidFill>
+                <a:latin typeface="Georgia" pitchFamily="34" charset="0"/>
+                <a:ea typeface="Georgia" pitchFamily="34" charset="-122"/>
+                <a:cs typeface="Georgia" pitchFamily="34" charset="-120"/>
+              </a:rPr>
+              <a:t>The redesigned agent researches in a loop until code accepts three matching listings, and code, not the model, sets the verdict</a:t>
+            </a:r>
+            <a:endParaRPr lang="en-US" sz="2600" dirty="0"/>
+          </a:p>
+        </p:txBody>
+      </p:sp>
+      <p:sp>
+        <p:nvSpPr>
+          <p:cNvPr id="4" name="Text 2"/>
+          <p:cNvSpPr txBox="1"/>
+          <p:nvPr/>
+        </p:nvSpPr>
+        <p:spPr>
+          <a:xfrm>
+            <a:off x="548640" y="6400800"/>
+            <a:ext cx="10058400" cy="228600"/>
+          </a:xfrm>
+          <a:prstGeom prst="rect">
+            <a:avLst/>
+          </a:prstGeom>
+          <a:noFill/>
+          <a:ln/>
+        </p:spPr>
+        <p:txBody>
+          <a:bodyPr wrap="square" lIns="0" tIns="0" rIns="0" bIns="0" rtlCol="0" anchor="t"/>
+          <a:lstStyle/>
+          <a:p>
+            <a:pPr indent="0" marL="0">
+              <a:buNone/>
+            </a:pPr>
+            <a:r>
+              <a:rPr lang="en-US" sz="900" dirty="0">
+                <a:solidFill>
+                  <a:srgbClr val="6B7280"/>
+                </a:solidFill>
+                <a:latin typeface="Arial" pitchFamily="34" charset="0"/>
+                <a:ea typeface="Arial" pitchFamily="34" charset="-122"/>
+                <a:cs typeface="Arial" pitchFamily="34" charset="-120"/>
+              </a:rPr>
+              <a:t>Source: watchagent/agent.py, tools.py, bot.py, cli.py; diagram: docs/diagrams/watchagent-agent.html (Archify)</a:t>
+            </a:r>
+            <a:endParaRPr lang="en-US" sz="900" dirty="0"/>
+          </a:p>
+        </p:txBody>
+      </p:sp>
+      <p:sp>
+        <p:nvSpPr>
+          <p:cNvPr id="5" name="Text 3"/>
+          <p:cNvSpPr txBox="1"/>
+          <p:nvPr/>
+        </p:nvSpPr>
+        <p:spPr>
+          <a:xfrm>
+            <a:off x="11155680" y="6400800"/>
+            <a:ext cx="484632" cy="228600"/>
+          </a:xfrm>
+          <a:prstGeom prst="rect">
+            <a:avLst/>
+          </a:prstGeom>
+          <a:noFill/>
+          <a:ln/>
+        </p:spPr>
+        <p:txBody>
+          <a:bodyPr wrap="square" lIns="0" tIns="0" rIns="0" bIns="0" rtlCol="0" anchor="t"/>
+          <a:lstStyle/>
+          <a:p>
+            <a:pPr algn="r" indent="0" marL="0">
+              <a:buNone/>
+            </a:pPr>
+            <a:r>
+              <a:rPr lang="en-US" sz="900" dirty="0">
+                <a:solidFill>
+                  <a:srgbClr val="6B7280"/>
+                </a:solidFill>
+                <a:latin typeface="Arial" pitchFamily="34" charset="0"/>
+                <a:ea typeface="Arial" pitchFamily="34" charset="-122"/>
+                <a:cs typeface="Arial" pitchFamily="34" charset="-120"/>
+              </a:rPr>
+              <a:t>8</a:t>
+            </a:r>
+            <a:endParaRPr lang="en-US" sz="900" dirty="0"/>
+          </a:p>
+        </p:txBody>
+      </p:sp>
+      <p:pic>
+        <p:nvPicPr>
+          <p:cNvPr id="100" name="Architecture diagram" descr="Architecture of WatchAgent: GitHub Actions runs watchagent check, which hands each watch to a research agent. The agent searches via Tavily and calls Gemini through retry, fallback and budget middleware, then submits listings to deterministic listing checks that record the median price in watches.db. BUY alerts go to Telegram, where a Telegram assistant can trigger research."/>
+          <p:cNvPicPr>
+            <a:picLocks noChangeAspect="1"/>
+          </p:cNvPicPr>
+          <p:nvPr/>
+        </p:nvPicPr>
+        <p:blipFill>
+          <a:blip r:embed="rIdArch"/>
+          <a:stretch>
+            <a:fillRect/>
+          </a:stretch>
+        </p:blipFill>
+        <p:spPr>
+          <a:xfrm>
+            <a:off x="1097164" y="1600200"/>
+            <a:ext cx="9994624" cy="4663440"/>
+          </a:xfrm>
+          <a:prstGeom prst="rect">
+            <a:avLst/>
+          </a:prstGeom>
+        </p:spPr>
+      </p:pic>
+    </p:spTree>
+  </p:cSld>
+  <p:clrMapOvr>
+    <a:masterClrMapping/>
+  </p:clrMapOvr>
+</p:sld>
+</file>
+
+<file path=ppt/slides/slide12.xml><?xml version="1.0" encoding="utf-8"?>
+<p:sld xmlns:a="http://schemas.openxmlformats.org/drawingml/2006/main" xmlns:r="http://schemas.openxmlformats.org/officeDocument/2006/relationships" xmlns:p="http://schemas.openxmlformats.org/presentationml/2006/main">
+  <p:cSld name="Slide 4">
+    <p:bg>
+      <p:bgPr>
+        <a:solidFill>
+          <a:srgbClr val="FFFFFF"/>
+        </a:solidFill>
+      </p:bgPr>
+    </p:bg>
+    <p:spTree>
+      <p:nvGrpSpPr>
+        <p:cNvPr id="1" name=""/>
+        <p:cNvGrpSpPr/>
+        <p:nvPr/>
+      </p:nvGrpSpPr>
+      <p:grpSpPr>
+        <a:xfrm>
+          <a:off x="0" y="0"/>
+          <a:ext cx="0" cy="0"/>
+          <a:chOff x="0" y="0"/>
+          <a:chExt cx="0" cy="0"/>
+        </a:xfrm>
+      </p:grpSpPr>
+      <p:sp>
+        <p:nvSpPr>
+          <p:cNvPr id="2" name="Text 0"/>
+          <p:cNvSpPr txBox="1"/>
+          <p:nvPr/>
+        </p:nvSpPr>
+        <p:spPr>
+          <a:xfrm>
+            <a:off x="548640" y="274320"/>
+            <a:ext cx="7315200" cy="228600"/>
+          </a:xfrm>
+          <a:prstGeom prst="rect">
+            <a:avLst/>
+          </a:prstGeom>
+          <a:noFill/>
+          <a:ln/>
+        </p:spPr>
+        <p:txBody>
+          <a:bodyPr wrap="square" lIns="0" tIns="0" rIns="0" bIns="0" rtlCol="0" anchor="t"/>
+          <a:lstStyle/>
+          <a:p>
+            <a:pPr indent="0" marL="0">
+              <a:buNone/>
+            </a:pPr>
+            <a:r>
+              <a:rPr lang="en-US" sz="1000" b="1" spc="200" kern="0" dirty="0">
+                <a:solidFill>
+                  <a:srgbClr val="2251FF"/>
+                </a:solidFill>
+                <a:latin typeface="Arial" pitchFamily="34" charset="0"/>
+                <a:ea typeface="Arial" pitchFamily="34" charset="-122"/>
+                <a:cs typeface="Arial" pitchFamily="34" charset="-120"/>
+              </a:rPr>
+              <a:t>WHAT IS AN AGENT?</a:t>
+            </a:r>
+            <a:endParaRPr lang="en-US" sz="1000" dirty="0"/>
+          </a:p>
+        </p:txBody>
+      </p:sp>
+      <p:sp>
+        <p:nvSpPr>
+          <p:cNvPr id="3" name="Text 1"/>
+          <p:cNvSpPr txBox="1"/>
+          <p:nvPr/>
+        </p:nvSpPr>
+        <p:spPr>
+          <a:xfrm>
+            <a:off x="548640" y="594360"/>
+            <a:ext cx="11064240" cy="914400"/>
+          </a:xfrm>
+          <a:prstGeom prst="rect">
+            <a:avLst/>
+          </a:prstGeom>
+          <a:noFill/>
+          <a:ln/>
+        </p:spPr>
+        <p:txBody>
+          <a:bodyPr wrap="square" lIns="0" tIns="0" rIns="0" bIns="0" rtlCol="0" anchor="t"/>
+          <a:lstStyle/>
+          <a:p>
+            <a:pPr indent="0" marL="0">
+              <a:buNone/>
+            </a:pPr>
+            <a:r>
+              <a:rPr lang="en-US" sz="2600" b="1" dirty="0">
+                <a:solidFill>
+                  <a:srgbClr val="051C2C"/>
+                </a:solidFill>
+                <a:latin typeface="Georgia" pitchFamily="34" charset="0"/>
+                <a:ea typeface="Georgia" pitchFamily="34" charset="-122"/>
+                <a:cs typeface="Georgia" pitchFamily="34" charset="-120"/>
+              </a:rPr>
+              <a:t>An agent is an AI model that uses tools, step by step, until the job is done</a:t>
+            </a:r>
+            <a:endParaRPr lang="en-US" sz="2600" dirty="0"/>
+          </a:p>
+        </p:txBody>
+      </p:sp>
+      <p:sp>
+        <p:nvSpPr>
+          <p:cNvPr id="4" name="Text 2"/>
+          <p:cNvSpPr txBox="1"/>
+          <p:nvPr/>
+        </p:nvSpPr>
+        <p:spPr>
+          <a:xfrm>
+            <a:off x="548640" y="6400800"/>
+            <a:ext cx="10058400" cy="228600"/>
+          </a:xfrm>
+          <a:prstGeom prst="rect">
+            <a:avLst/>
+          </a:prstGeom>
+          <a:noFill/>
+          <a:ln/>
+        </p:spPr>
+        <p:txBody>
+          <a:bodyPr wrap="square" lIns="0" tIns="0" rIns="0" bIns="0" rtlCol="0" anchor="t"/>
+          <a:lstStyle/>
+          <a:p>
+            <a:pPr indent="0" marL="0">
+              <a:buNone/>
+            </a:pPr>
+            <a:r>
+              <a:rPr lang="en-US" sz="900" dirty="0">
+                <a:solidFill>
+                  <a:srgbClr val="6B7280"/>
+                </a:solidFill>
+                <a:latin typeface="Arial" pitchFamily="34" charset="0"/>
+                <a:ea typeface="Arial" pitchFamily="34" charset="-122"/>
+                <a:cs typeface="Arial" pitchFamily="34" charset="-120"/>
+              </a:rPr>
+              <a:t>Source: LangChain docs, “Agents”, docs.langchain.com/oss/python/langchain/agents (accessed 24 Sep 2026)</a:t>
+            </a:r>
+            <a:endParaRPr lang="en-US" sz="900" dirty="0"/>
+          </a:p>
+        </p:txBody>
+      </p:sp>
+      <p:sp>
+        <p:nvSpPr>
+          <p:cNvPr id="5" name="Text 3"/>
+          <p:cNvSpPr txBox="1"/>
+          <p:nvPr/>
+        </p:nvSpPr>
+        <p:spPr>
+          <a:xfrm>
+            <a:off x="11155680" y="6400800"/>
+            <a:ext cx="484632" cy="228600"/>
+          </a:xfrm>
+          <a:prstGeom prst="rect">
+            <a:avLst/>
+          </a:prstGeom>
+          <a:noFill/>
+          <a:ln/>
+        </p:spPr>
+        <p:txBody>
+          <a:bodyPr wrap="square" lIns="0" tIns="0" rIns="0" bIns="0" rtlCol="0" anchor="t"/>
+          <a:lstStyle/>
+          <a:p>
+            <a:pPr algn="r" indent="0" marL="0">
+              <a:buNone/>
+            </a:pPr>
+            <a:r>
+              <a:rPr lang="en-US" sz="900" dirty="0">
+                <a:solidFill>
+                  <a:srgbClr val="6B7280"/>
+                </a:solidFill>
+                <a:latin typeface="Arial" pitchFamily="34" charset="0"/>
+                <a:ea typeface="Arial" pitchFamily="34" charset="-122"/>
+                <a:cs typeface="Arial" pitchFamily="34" charset="-120"/>
+              </a:rPr>
+              <a:t>4</a:t>
+            </a:r>
+            <a:endParaRPr lang="en-US" sz="900" dirty="0"/>
+          </a:p>
+        </p:txBody>
+      </p:sp>
+      <p:sp>
+        <p:nvSpPr>
+          <p:cNvPr id="102" name="Shape 0"/>
+          <p:cNvSpPr/>
+          <p:nvPr/>
+        </p:nvSpPr>
+        <p:spPr>
+          <a:xfrm>
+            <a:off x="548640" y="1691640"/>
+            <a:ext cx="5349240" cy="4434840"/>
+          </a:xfrm>
+          <a:prstGeom prst="rect">
+            <a:avLst/>
+          </a:prstGeom>
+          <a:solidFill>
+            <a:srgbClr val="051C2C"/>
+          </a:solidFill>
+          <a:ln w="12700">
+            <a:solidFill>
+              <a:srgbClr val="051C2C"/>
+            </a:solidFill>
+            <a:prstDash val="solid"/>
+          </a:ln>
+        </p:spPr>
+      </p:sp>
+      <p:sp>
+        <p:nvSpPr>
+          <p:cNvPr id="103" name="Text 1"/>
+          <p:cNvSpPr txBox="1"/>
+          <p:nvPr/>
+        </p:nvSpPr>
+        <p:spPr>
+          <a:xfrm>
+            <a:off x="868680" y="1965960"/>
+            <a:ext cx="4754880" cy="274320"/>
+          </a:xfrm>
+          <a:prstGeom prst="rect">
+            <a:avLst/>
+          </a:prstGeom>
+          <a:noFill/>
+          <a:ln/>
+        </p:spPr>
+        <p:txBody>
+          <a:bodyPr wrap="square" lIns="0" tIns="0" rIns="0" bIns="0" rtlCol="0" anchor="t"/>
+          <a:lstStyle/>
+          <a:p>
+            <a:pPr indent="0" marL="0">
+              <a:buNone/>
+            </a:pPr>
+            <a:r>
+              <a:rPr lang="en-US" sz="1000" b="1" spc="200" kern="0" dirty="0">
+                <a:solidFill>
+                  <a:srgbClr val="8FB0FF"/>
+                </a:solidFill>
+                <a:latin typeface="Arial" pitchFamily="34" charset="0"/>
+                <a:ea typeface="Arial" pitchFamily="34" charset="-122"/>
+                <a:cs typeface="Arial" pitchFamily="34" charset="-120"/>
+              </a:rPr>
+              <a:t>LANGCHAIN'S DEFINITION</a:t>
+            </a:r>
+            <a:endParaRPr lang="en-US" sz="1000" dirty="0"/>
+          </a:p>
+        </p:txBody>
+      </p:sp>
+      <p:sp>
+        <p:nvSpPr>
+          <p:cNvPr id="104" name="Text 2"/>
+          <p:cNvSpPr txBox="1"/>
+          <p:nvPr/>
+        </p:nvSpPr>
+        <p:spPr>
+          <a:xfrm>
+            <a:off x="868680" y="2331720"/>
+            <a:ext cx="4754880" cy="1417320"/>
+          </a:xfrm>
+          <a:prstGeom prst="rect">
+            <a:avLst/>
+          </a:prstGeom>
+          <a:noFill/>
+          <a:ln/>
+        </p:spPr>
+        <p:txBody>
+          <a:bodyPr wrap="square" lIns="0" tIns="0" rIns="0" bIns="0" rtlCol="0" anchor="t"/>
+          <a:lstStyle/>
+          <a:p>
+            <a:pPr indent="0" marL="0">
+              <a:buNone/>
+            </a:pPr>
+            <a:r>
+              <a:rPr lang="en-US" sz="2200" dirty="0">
+                <a:solidFill>
+                  <a:srgbClr val="FFFFFF"/>
+                </a:solidFill>
+                <a:latin typeface="Georgia" pitchFamily="34" charset="0"/>
+                <a:ea typeface="Georgia" pitchFamily="34" charset="-122"/>
+                <a:cs typeface="Georgia" pitchFamily="34" charset="-120"/>
+              </a:rPr>
+              <a:t>“An agent is a model calling tools in a loop until a given task is complete.”</a:t>
+            </a:r>
+            <a:endParaRPr lang="en-US" sz="2200" dirty="0"/>
+          </a:p>
+        </p:txBody>
+      </p:sp>
+      <p:sp>
+        <p:nvSpPr>
+          <p:cNvPr id="105" name="Text 3"/>
+          <p:cNvSpPr txBox="1"/>
+          <p:nvPr/>
+        </p:nvSpPr>
+        <p:spPr>
+          <a:xfrm>
+            <a:off x="868680" y="4023360"/>
+            <a:ext cx="1051560" cy="365760"/>
+          </a:xfrm>
+          <a:prstGeom prst="rect">
+            <a:avLst/>
+          </a:prstGeom>
+          <a:noFill/>
+          <a:ln/>
+        </p:spPr>
+        <p:txBody>
+          <a:bodyPr wrap="square" lIns="0" tIns="0" rIns="0" bIns="0" rtlCol="0" anchor="t"/>
+          <a:lstStyle/>
+          <a:p>
+            <a:pPr indent="0" marL="0">
+              <a:buNone/>
+            </a:pPr>
+            <a:r>
+              <a:rPr lang="en-US" sz="1300" b="1" dirty="0">
+                <a:solidFill>
+                  <a:srgbClr val="FFFFFF"/>
+                </a:solidFill>
+                <a:latin typeface="Arial" pitchFamily="34" charset="0"/>
+                <a:ea typeface="Arial" pitchFamily="34" charset="-122"/>
+                <a:cs typeface="Arial" pitchFamily="34" charset="-120"/>
+              </a:rPr>
+              <a:t>Model</a:t>
+            </a:r>
+            <a:endParaRPr lang="en-US" sz="1300" dirty="0"/>
+          </a:p>
+        </p:txBody>
+      </p:sp>
+      <p:sp>
+        <p:nvSpPr>
+          <p:cNvPr id="106" name="Text 4"/>
+          <p:cNvSpPr txBox="1"/>
+          <p:nvPr/>
+        </p:nvSpPr>
+        <p:spPr>
+          <a:xfrm>
+            <a:off x="1965960" y="4023360"/>
+            <a:ext cx="3703320" cy="365760"/>
+          </a:xfrm>
+          <a:prstGeom prst="rect">
+            <a:avLst/>
+          </a:prstGeom>
+          <a:noFill/>
+          <a:ln/>
+        </p:spPr>
+        <p:txBody>
+          <a:bodyPr wrap="square" lIns="0" tIns="0" rIns="0" bIns="0" rtlCol="0" anchor="t"/>
+          <a:lstStyle/>
+          <a:p>
+            <a:pPr indent="0" marL="0">
+              <a:buNone/>
+            </a:pPr>
+            <a:r>
+              <a:rPr lang="en-US" sz="1300" dirty="0">
+                <a:solidFill>
+                  <a:srgbClr val="DDE6FA"/>
+                </a:solidFill>
+                <a:latin typeface="Arial" pitchFamily="34" charset="0"/>
+                <a:ea typeface="Arial" pitchFamily="34" charset="-122"/>
+                <a:cs typeface="Arial" pitchFamily="34" charset="-120"/>
+              </a:rPr>
+              <a:t>The brain: decides the next step</a:t>
+            </a:r>
+            <a:endParaRPr lang="en-US" sz="1300" dirty="0"/>
+          </a:p>
+        </p:txBody>
+      </p:sp>
+      <p:sp>
+        <p:nvSpPr>
+          <p:cNvPr id="107" name="Text 5"/>
+          <p:cNvSpPr txBox="1"/>
+          <p:nvPr/>
+        </p:nvSpPr>
+        <p:spPr>
+          <a:xfrm>
+            <a:off x="868680" y="4663440"/>
+            <a:ext cx="1051560" cy="365760"/>
+          </a:xfrm>
+          <a:prstGeom prst="rect">
+            <a:avLst/>
+          </a:prstGeom>
+          <a:noFill/>
+          <a:ln/>
+        </p:spPr>
+        <p:txBody>
+          <a:bodyPr wrap="square" lIns="0" tIns="0" rIns="0" bIns="0" rtlCol="0" anchor="t"/>
+          <a:lstStyle/>
+          <a:p>
+            <a:pPr indent="0" marL="0">
+              <a:buNone/>
+            </a:pPr>
+            <a:r>
+              <a:rPr lang="en-US" sz="1300" b="1" dirty="0">
+                <a:solidFill>
+                  <a:srgbClr val="FFFFFF"/>
+                </a:solidFill>
+                <a:latin typeface="Arial" pitchFamily="34" charset="0"/>
+                <a:ea typeface="Arial" pitchFamily="34" charset="-122"/>
+                <a:cs typeface="Arial" pitchFamily="34" charset="-120"/>
+              </a:rPr>
+              <a:t>Tools</a:t>
+            </a:r>
+            <a:endParaRPr lang="en-US" sz="1300" dirty="0"/>
+          </a:p>
+        </p:txBody>
+      </p:sp>
+      <p:sp>
+        <p:nvSpPr>
+          <p:cNvPr id="108" name="Text 6"/>
+          <p:cNvSpPr txBox="1"/>
+          <p:nvPr/>
+        </p:nvSpPr>
+        <p:spPr>
+          <a:xfrm>
+            <a:off x="1965960" y="4663440"/>
+            <a:ext cx="3703320" cy="365760"/>
+          </a:xfrm>
+          <a:prstGeom prst="rect">
+            <a:avLst/>
+          </a:prstGeom>
+          <a:noFill/>
+          <a:ln/>
+        </p:spPr>
+        <p:txBody>
+          <a:bodyPr wrap="square" lIns="0" tIns="0" rIns="0" bIns="0" rtlCol="0" anchor="t"/>
+          <a:lstStyle/>
+          <a:p>
+            <a:pPr indent="0" marL="0">
+              <a:buNone/>
+            </a:pPr>
+            <a:r>
+              <a:rPr lang="en-US" sz="1300" dirty="0">
+                <a:solidFill>
+                  <a:srgbClr val="DDE6FA"/>
+                </a:solidFill>
+                <a:latin typeface="Arial" pitchFamily="34" charset="0"/>
+                <a:ea typeface="Arial" pitchFamily="34" charset="-122"/>
+                <a:cs typeface="Arial" pitchFamily="34" charset="-120"/>
+              </a:rPr>
+              <a:t>The hands: search, read, write things down</a:t>
+            </a:r>
+            <a:endParaRPr lang="en-US" sz="1300" dirty="0"/>
+          </a:p>
+        </p:txBody>
+      </p:sp>
+      <p:sp>
+        <p:nvSpPr>
+          <p:cNvPr id="109" name="Text 7"/>
+          <p:cNvSpPr txBox="1"/>
+          <p:nvPr/>
+        </p:nvSpPr>
+        <p:spPr>
+          <a:xfrm>
+            <a:off x="868680" y="5303520"/>
+            <a:ext cx="1051560" cy="365760"/>
+          </a:xfrm>
+          <a:prstGeom prst="rect">
+            <a:avLst/>
+          </a:prstGeom>
+          <a:noFill/>
+          <a:ln/>
+        </p:spPr>
+        <p:txBody>
+          <a:bodyPr wrap="square" lIns="0" tIns="0" rIns="0" bIns="0" rtlCol="0" anchor="t"/>
+          <a:lstStyle/>
+          <a:p>
+            <a:pPr indent="0" marL="0">
+              <a:buNone/>
+            </a:pPr>
+            <a:r>
+              <a:rPr lang="en-US" sz="1300" b="1" dirty="0">
+                <a:solidFill>
+                  <a:srgbClr val="FFFFFF"/>
+                </a:solidFill>
+                <a:latin typeface="Arial" pitchFamily="34" charset="0"/>
+                <a:ea typeface="Arial" pitchFamily="34" charset="-122"/>
+                <a:cs typeface="Arial" pitchFamily="34" charset="-120"/>
+              </a:rPr>
+              <a:t>Loop</a:t>
+            </a:r>
+            <a:endParaRPr lang="en-US" sz="1300" dirty="0"/>
+          </a:p>
+        </p:txBody>
+      </p:sp>
+      <p:sp>
+        <p:nvSpPr>
+          <p:cNvPr id="110" name="Text 8"/>
+          <p:cNvSpPr txBox="1"/>
+          <p:nvPr/>
+        </p:nvSpPr>
+        <p:spPr>
+          <a:xfrm>
+            <a:off x="1965960" y="5303520"/>
+            <a:ext cx="3703320" cy="365760"/>
+          </a:xfrm>
+          <a:prstGeom prst="rect">
+            <a:avLst/>
+          </a:prstGeom>
+          <a:noFill/>
+          <a:ln/>
+        </p:spPr>
+        <p:txBody>
+          <a:bodyPr wrap="square" lIns="0" tIns="0" rIns="0" bIns="0" rtlCol="0" anchor="t"/>
+          <a:lstStyle/>
+          <a:p>
+            <a:pPr indent="0" marL="0">
+              <a:buNone/>
+            </a:pPr>
+            <a:r>
+              <a:rPr lang="en-US" sz="1300" dirty="0">
+                <a:solidFill>
+                  <a:srgbClr val="DDE6FA"/>
+                </a:solidFill>
+                <a:latin typeface="Arial" pitchFamily="34" charset="0"/>
+                <a:ea typeface="Arial" pitchFamily="34" charset="-122"/>
+                <a:cs typeface="Arial" pitchFamily="34" charset="-120"/>
+              </a:rPr>
+              <a:t>Repeats until the job is done</a:t>
+            </a:r>
+            <a:endParaRPr lang="en-US" sz="1300" dirty="0"/>
+          </a:p>
+        </p:txBody>
+      </p:sp>
+      <p:sp>
+        <p:nvSpPr>
+          <p:cNvPr id="111" name="Text 9"/>
+          <p:cNvSpPr txBox="1"/>
+          <p:nvPr/>
+        </p:nvSpPr>
+        <p:spPr>
+          <a:xfrm>
+            <a:off x="6172200" y="1691640"/>
+            <a:ext cx="5468112" cy="365760"/>
+          </a:xfrm>
+          <a:prstGeom prst="rect">
+            <a:avLst/>
+          </a:prstGeom>
+          <a:noFill/>
+          <a:ln/>
+        </p:spPr>
+        <p:txBody>
+          <a:bodyPr wrap="square" lIns="0" tIns="0" rIns="0" bIns="0" rtlCol="0" anchor="t"/>
+          <a:lstStyle/>
+          <a:p>
+            <a:pPr indent="0" marL="0">
+              <a:buNone/>
+            </a:pPr>
+            <a:r>
+              <a:rPr lang="en-US" sz="1800" b="1" dirty="0">
+                <a:solidFill>
+                  <a:srgbClr val="051C2C"/>
+                </a:solidFill>
+                <a:latin typeface="Georgia" pitchFamily="34" charset="0"/>
+                <a:ea typeface="Georgia" pitchFamily="34" charset="-122"/>
+                <a:cs typeface="Georgia" pitchFamily="34" charset="-120"/>
+              </a:rPr>
+              <a:t>How WatchAgent fits</a:t>
+            </a:r>
+            <a:endParaRPr lang="en-US" sz="1800" dirty="0"/>
+          </a:p>
+        </p:txBody>
+      </p:sp>
+      <p:sp>
+        <p:nvSpPr>
+          <p:cNvPr id="112" name="Shape 10"/>
+          <p:cNvSpPr/>
+          <p:nvPr/>
+        </p:nvSpPr>
+        <p:spPr>
+          <a:xfrm>
+            <a:off x="6172200" y="2194560"/>
+            <a:ext cx="5468112" cy="868680"/>
+          </a:xfrm>
+          <a:prstGeom prst="rect">
+            <a:avLst/>
+          </a:prstGeom>
+          <a:solidFill>
+            <a:srgbClr val="F2F4F7"/>
+          </a:solidFill>
+          <a:ln w="12700">
+            <a:solidFill>
+              <a:srgbClr val="F2F4F7"/>
+            </a:solidFill>
+            <a:prstDash val="solid"/>
+          </a:ln>
+        </p:spPr>
+      </p:sp>
+      <p:sp>
+        <p:nvSpPr>
+          <p:cNvPr id="113" name="Text 11"/>
+          <p:cNvSpPr txBox="1"/>
+          <p:nvPr/>
+        </p:nvSpPr>
+        <p:spPr>
+          <a:xfrm>
+            <a:off x="6355080" y="2313432"/>
+            <a:ext cx="5120640" cy="274320"/>
+          </a:xfrm>
+          <a:prstGeom prst="rect">
+            <a:avLst/>
+          </a:prstGeom>
+          <a:noFill/>
+          <a:ln/>
+        </p:spPr>
+        <p:txBody>
+          <a:bodyPr wrap="square" lIns="0" tIns="0" rIns="0" bIns="0" rtlCol="0" anchor="t"/>
+          <a:lstStyle/>
+          <a:p>
+            <a:pPr indent="0" marL="0">
+              <a:buNone/>
+            </a:pPr>
+            <a:r>
+              <a:rPr lang="en-US" sz="1300" b="1" dirty="0">
+                <a:solidFill>
+                  <a:srgbClr val="051C2C"/>
+                </a:solidFill>
+                <a:latin typeface="Arial" pitchFamily="34" charset="0"/>
+                <a:ea typeface="Arial" pitchFamily="34" charset="-122"/>
+                <a:cs typeface="Arial" pitchFamily="34" charset="-120"/>
+              </a:rPr>
+              <a:t>Goal</a:t>
+            </a:r>
+            <a:endParaRPr lang="en-US" sz="1300" dirty="0"/>
+          </a:p>
+        </p:txBody>
+      </p:sp>
+      <p:sp>
+        <p:nvSpPr>
+          <p:cNvPr id="114" name="Text 12"/>
+          <p:cNvSpPr txBox="1"/>
+          <p:nvPr/>
+        </p:nvSpPr>
+        <p:spPr>
+          <a:xfrm>
+            <a:off x="6355080" y="2624328"/>
+            <a:ext cx="5120640" cy="320040"/>
+          </a:xfrm>
+          <a:prstGeom prst="rect">
+            <a:avLst/>
+          </a:prstGeom>
+          <a:noFill/>
+          <a:ln/>
+        </p:spPr>
+        <p:txBody>
+          <a:bodyPr wrap="square" lIns="0" tIns="0" rIns="0" bIns="0" rtlCol="0" anchor="t"/>
+          <a:lstStyle/>
+          <a:p>
+            <a:pPr indent="0" marL="0">
+              <a:buNone/>
+            </a:pPr>
+            <a:r>
+              <a:rPr lang="en-US" sz="1300" dirty="0">
+                <a:solidFill>
+                  <a:srgbClr val="1F2933"/>
+                </a:solidFill>
+                <a:latin typeface="Arial" pitchFamily="34" charset="0"/>
+                <a:ea typeface="Arial" pitchFamily="34" charset="-122"/>
+                <a:cs typeface="Arial" pitchFamily="34" charset="-120"/>
+              </a:rPr>
+              <a:t>Find today’s real price of one watch</a:t>
+            </a:r>
+            <a:endParaRPr lang="en-US" sz="1300" dirty="0"/>
+          </a:p>
+        </p:txBody>
+      </p:sp>
+      <p:sp>
+        <p:nvSpPr>
+          <p:cNvPr id="115" name="Shape 13"/>
+          <p:cNvSpPr/>
+          <p:nvPr/>
+        </p:nvSpPr>
+        <p:spPr>
+          <a:xfrm>
+            <a:off x="6172200" y="3200400"/>
+            <a:ext cx="5468112" cy="868680"/>
+          </a:xfrm>
+          <a:prstGeom prst="rect">
+            <a:avLst/>
+          </a:prstGeom>
+          <a:solidFill>
+            <a:srgbClr val="F2F4F7"/>
+          </a:solidFill>
+          <a:ln w="12700">
+            <a:solidFill>
+              <a:srgbClr val="F2F4F7"/>
+            </a:solidFill>
+            <a:prstDash val="solid"/>
+          </a:ln>
+        </p:spPr>
+      </p:sp>
+      <p:sp>
+        <p:nvSpPr>
+          <p:cNvPr id="116" name="Text 14"/>
+          <p:cNvSpPr txBox="1"/>
+          <p:nvPr/>
+        </p:nvSpPr>
+        <p:spPr>
+          <a:xfrm>
+            <a:off x="6355080" y="3319272"/>
+            <a:ext cx="5120640" cy="274320"/>
+          </a:xfrm>
+          <a:prstGeom prst="rect">
+            <a:avLst/>
+          </a:prstGeom>
+          <a:noFill/>
+          <a:ln/>
+        </p:spPr>
+        <p:txBody>
+          <a:bodyPr wrap="square" lIns="0" tIns="0" rIns="0" bIns="0" rtlCol="0" anchor="t"/>
+          <a:lstStyle/>
+          <a:p>
+            <a:pPr indent="0" marL="0">
+              <a:buNone/>
+            </a:pPr>
+            <a:r>
+              <a:rPr lang="en-US" sz="1300" b="1" dirty="0">
+                <a:solidFill>
+                  <a:srgbClr val="051C2C"/>
+                </a:solidFill>
+                <a:latin typeface="Arial" pitchFamily="34" charset="0"/>
+                <a:ea typeface="Arial" pitchFamily="34" charset="-122"/>
+                <a:cs typeface="Arial" pitchFamily="34" charset="-120"/>
+              </a:rPr>
+              <a:t>Tools</a:t>
+            </a:r>
+            <a:endParaRPr lang="en-US" sz="1300" dirty="0"/>
+          </a:p>
+        </p:txBody>
+      </p:sp>
+      <p:sp>
+        <p:nvSpPr>
+          <p:cNvPr id="117" name="Text 15"/>
+          <p:cNvSpPr txBox="1"/>
+          <p:nvPr/>
+        </p:nvSpPr>
+        <p:spPr>
+          <a:xfrm>
+            <a:off x="6355080" y="3630168"/>
+            <a:ext cx="5120640" cy="320040"/>
+          </a:xfrm>
+          <a:prstGeom prst="rect">
+            <a:avLst/>
+          </a:prstGeom>
+          <a:noFill/>
+          <a:ln/>
+        </p:spPr>
+        <p:txBody>
+          <a:bodyPr wrap="square" lIns="0" tIns="0" rIns="0" bIns="0" rtlCol="0" anchor="t"/>
+          <a:lstStyle/>
+          <a:p>
+            <a:pPr indent="0" marL="0">
+              <a:buNone/>
+            </a:pPr>
+            <a:r>
+              <a:rPr lang="en-US" sz="1300" dirty="0">
+                <a:solidFill>
+                  <a:srgbClr val="1F2933"/>
+                </a:solidFill>
+                <a:latin typeface="Arial" pitchFamily="34" charset="0"/>
+                <a:ea typeface="Arial" pitchFamily="34" charset="-122"/>
+                <a:cs typeface="Arial" pitchFamily="34" charset="-120"/>
+              </a:rPr>
+              <a:t>Search the web, open a listing, hand in what it found, save a tip</a:t>
+            </a:r>
+            <a:endParaRPr lang="en-US" sz="1300" dirty="0"/>
+          </a:p>
+        </p:txBody>
+      </p:sp>
+      <p:sp>
+        <p:nvSpPr>
+          <p:cNvPr id="118" name="Shape 16"/>
+          <p:cNvSpPr/>
+          <p:nvPr/>
+        </p:nvSpPr>
+        <p:spPr>
+          <a:xfrm>
+            <a:off x="6172200" y="4206240"/>
+            <a:ext cx="5468112" cy="868680"/>
+          </a:xfrm>
+          <a:prstGeom prst="rect">
+            <a:avLst/>
+          </a:prstGeom>
+          <a:solidFill>
+            <a:srgbClr val="F2F4F7"/>
+          </a:solidFill>
+          <a:ln w="12700">
+            <a:solidFill>
+              <a:srgbClr val="F2F4F7"/>
+            </a:solidFill>
+            <a:prstDash val="solid"/>
+          </a:ln>
+        </p:spPr>
+      </p:sp>
+      <p:sp>
+        <p:nvSpPr>
+          <p:cNvPr id="119" name="Text 17"/>
+          <p:cNvSpPr txBox="1"/>
+          <p:nvPr/>
+        </p:nvSpPr>
+        <p:spPr>
+          <a:xfrm>
+            <a:off x="6355080" y="4325112"/>
+            <a:ext cx="5120640" cy="274320"/>
+          </a:xfrm>
+          <a:prstGeom prst="rect">
+            <a:avLst/>
+          </a:prstGeom>
+          <a:noFill/>
+          <a:ln/>
+        </p:spPr>
+        <p:txBody>
+          <a:bodyPr wrap="square" lIns="0" tIns="0" rIns="0" bIns="0" rtlCol="0" anchor="t"/>
+          <a:lstStyle/>
+          <a:p>
+            <a:pPr indent="0" marL="0">
+              <a:buNone/>
+            </a:pPr>
+            <a:r>
+              <a:rPr lang="en-US" sz="1300" b="1" dirty="0">
+                <a:solidFill>
+                  <a:srgbClr val="051C2C"/>
+                </a:solidFill>
+                <a:latin typeface="Arial" pitchFamily="34" charset="0"/>
+                <a:ea typeface="Arial" pitchFamily="34" charset="-122"/>
+                <a:cs typeface="Arial" pitchFamily="34" charset="-120"/>
+              </a:rPr>
+              <a:t>Loop</a:t>
+            </a:r>
+            <a:endParaRPr lang="en-US" sz="1300" dirty="0"/>
+          </a:p>
+        </p:txBody>
+      </p:sp>
+      <p:sp>
+        <p:nvSpPr>
+          <p:cNvPr id="120" name="Text 18"/>
+          <p:cNvSpPr txBox="1"/>
+          <p:nvPr/>
+        </p:nvSpPr>
+        <p:spPr>
+          <a:xfrm>
+            <a:off x="6355080" y="4636008"/>
+            <a:ext cx="5120640" cy="320040"/>
+          </a:xfrm>
+          <a:prstGeom prst="rect">
+            <a:avLst/>
+          </a:prstGeom>
+          <a:noFill/>
+          <a:ln/>
+        </p:spPr>
+        <p:txBody>
+          <a:bodyPr wrap="square" lIns="0" tIns="0" rIns="0" bIns="0" rtlCol="0" anchor="t"/>
+          <a:lstStyle/>
+          <a:p>
+            <a:pPr indent="0" marL="0">
+              <a:buNone/>
+            </a:pPr>
+            <a:r>
+              <a:rPr lang="en-US" sz="1300" dirty="0">
+                <a:solidFill>
+                  <a:srgbClr val="1F2933"/>
+                </a:solidFill>
+                <a:latin typeface="Arial" pitchFamily="34" charset="0"/>
+                <a:ea typeface="Arial" pitchFamily="34" charset="-122"/>
+                <a:cs typeface="Arial" pitchFamily="34" charset="-120"/>
+              </a:rPr>
+              <a:t>Keeps searching until 3 matching listings are accepted</a:t>
+            </a:r>
+            <a:endParaRPr lang="en-US" sz="1300" dirty="0"/>
+          </a:p>
+        </p:txBody>
+      </p:sp>
+      <p:sp>
+        <p:nvSpPr>
+          <p:cNvPr id="121" name="Shape 19"/>
+          <p:cNvSpPr/>
+          <p:nvPr/>
+        </p:nvSpPr>
+        <p:spPr>
+          <a:xfrm>
+            <a:off x="6172200" y="5212080"/>
+            <a:ext cx="5468112" cy="868680"/>
+          </a:xfrm>
+          <a:prstGeom prst="rect">
+            <a:avLst/>
+          </a:prstGeom>
+          <a:solidFill>
+            <a:srgbClr val="F2F4F7"/>
+          </a:solidFill>
+          <a:ln w="12700">
+            <a:solidFill>
+              <a:srgbClr val="F2F4F7"/>
+            </a:solidFill>
+            <a:prstDash val="solid"/>
+          </a:ln>
+        </p:spPr>
+      </p:sp>
+      <p:sp>
+        <p:nvSpPr>
+          <p:cNvPr id="122" name="Text 20"/>
+          <p:cNvSpPr txBox="1"/>
+          <p:nvPr/>
+        </p:nvSpPr>
+        <p:spPr>
+          <a:xfrm>
+            <a:off x="6355080" y="5330952"/>
+            <a:ext cx="5120640" cy="274320"/>
+          </a:xfrm>
+          <a:prstGeom prst="rect">
+            <a:avLst/>
+          </a:prstGeom>
+          <a:noFill/>
+          <a:ln/>
+        </p:spPr>
+        <p:txBody>
+          <a:bodyPr wrap="square" lIns="0" tIns="0" rIns="0" bIns="0" rtlCol="0" anchor="t"/>
+          <a:lstStyle/>
+          <a:p>
+            <a:pPr indent="0" marL="0">
+              <a:buNone/>
+            </a:pPr>
+            <a:r>
+              <a:rPr lang="en-US" sz="1300" b="1" dirty="0">
+                <a:solidFill>
+                  <a:srgbClr val="051C2C"/>
+                </a:solidFill>
+                <a:latin typeface="Arial" pitchFamily="34" charset="0"/>
+                <a:ea typeface="Arial" pitchFamily="34" charset="-122"/>
+                <a:cs typeface="Arial" pitchFamily="34" charset="-120"/>
+              </a:rPr>
+              <a:t>Guardrails</a:t>
+            </a:r>
+            <a:endParaRPr lang="en-US" sz="1300" dirty="0"/>
+          </a:p>
+        </p:txBody>
+      </p:sp>
+      <p:sp>
+        <p:nvSpPr>
+          <p:cNvPr id="123" name="Text 21"/>
+          <p:cNvSpPr txBox="1"/>
+          <p:nvPr/>
+        </p:nvSpPr>
+        <p:spPr>
+          <a:xfrm>
+            <a:off x="6355080" y="5641848"/>
+            <a:ext cx="5120640" cy="320040"/>
+          </a:xfrm>
+          <a:prstGeom prst="rect">
+            <a:avLst/>
+          </a:prstGeom>
+          <a:noFill/>
+          <a:ln/>
+        </p:spPr>
+        <p:txBody>
+          <a:bodyPr wrap="square" lIns="0" tIns="0" rIns="0" bIns="0" rtlCol="0" anchor="t"/>
+          <a:lstStyle/>
+          <a:p>
+            <a:pPr indent="0" marL="0">
+              <a:buNone/>
+            </a:pPr>
+            <a:r>
+              <a:rPr lang="en-US" sz="1300" dirty="0">
+                <a:solidFill>
+                  <a:srgbClr val="1F2933"/>
+                </a:solidFill>
+                <a:latin typeface="Arial" pitchFamily="34" charset="0"/>
+                <a:ea typeface="Arial" pitchFamily="34" charset="-122"/>
+                <a:cs typeface="Arial" pitchFamily="34" charset="-120"/>
+              </a:rPr>
+              <a:t>Plain code checks every price; changes need your OK</a:t>
+            </a:r>
+            <a:endParaRPr lang="en-US" sz="1300" dirty="0"/>
+          </a:p>
+        </p:txBody>
+      </p:sp>
+    </p:spTree>
+  </p:cSld>
+  <p:clrMapOvr>
+    <a:masterClrMapping/>
+  </p:clrMapOvr>
+</p:sld>
+</file>
+
+<file path=ppt/slides/slide13.xml><?xml version="1.0" encoding="utf-8"?>
+<p:sld xmlns:a="http://schemas.openxmlformats.org/drawingml/2006/main" xmlns:r="http://schemas.openxmlformats.org/officeDocument/2006/relationships" xmlns:p="http://schemas.openxmlformats.org/presentationml/2006/main">
+  <p:cSld name="Slide 4">
+    <p:bg>
+      <p:bgPr>
+        <a:solidFill>
+          <a:srgbClr val="FFFFFF"/>
+        </a:solidFill>
+      </p:bgPr>
+    </p:bg>
+    <p:spTree>
+      <p:nvGrpSpPr>
+        <p:cNvPr id="1" name=""/>
+        <p:cNvGrpSpPr/>
+        <p:nvPr/>
+      </p:nvGrpSpPr>
+      <p:grpSpPr>
+        <a:xfrm>
+          <a:off x="0" y="0"/>
+          <a:ext cx="0" cy="0"/>
+          <a:chOff x="0" y="0"/>
+          <a:chExt cx="0" cy="0"/>
+        </a:xfrm>
+      </p:grpSpPr>
+      <p:sp>
+        <p:nvSpPr>
+          <p:cNvPr id="2" name="Text 0"/>
+          <p:cNvSpPr txBox="1"/>
+          <p:nvPr/>
+        </p:nvSpPr>
+        <p:spPr>
+          <a:xfrm>
+            <a:off x="548640" y="274320"/>
+            <a:ext cx="7315200" cy="228600"/>
+          </a:xfrm>
+          <a:prstGeom prst="rect">
+            <a:avLst/>
+          </a:prstGeom>
+          <a:noFill/>
+          <a:ln/>
+        </p:spPr>
+        <p:txBody>
+          <a:bodyPr wrap="square" lIns="0" tIns="0" rIns="0" bIns="0" rtlCol="0" anchor="t"/>
+          <a:lstStyle/>
+          <a:p>
+            <a:pPr indent="0" marL="0">
+              <a:buNone/>
+            </a:pPr>
+            <a:r>
+              <a:rPr lang="en-US" sz="1000" b="1" spc="200" kern="0" dirty="0">
+                <a:solidFill>
+                  <a:srgbClr val="2251FF"/>
+                </a:solidFill>
+                <a:latin typeface="Arial" pitchFamily="34" charset="0"/>
+                <a:ea typeface="Arial" pitchFamily="34" charset="-122"/>
+                <a:cs typeface="Arial" pitchFamily="34" charset="-120"/>
+              </a:rPr>
+              <a:t>GENERATIVE VS AGENTIC AI</a:t>
+            </a:r>
+            <a:endParaRPr lang="en-US" sz="1000" dirty="0"/>
+          </a:p>
+        </p:txBody>
+      </p:sp>
+      <p:sp>
+        <p:nvSpPr>
+          <p:cNvPr id="3" name="Text 1"/>
+          <p:cNvSpPr txBox="1"/>
+          <p:nvPr/>
+        </p:nvSpPr>
+        <p:spPr>
+          <a:xfrm>
+            <a:off x="548640" y="594360"/>
+            <a:ext cx="11064240" cy="914400"/>
+          </a:xfrm>
+          <a:prstGeom prst="rect">
+            <a:avLst/>
+          </a:prstGeom>
+          <a:noFill/>
+          <a:ln/>
+        </p:spPr>
+        <p:txBody>
+          <a:bodyPr wrap="square" lIns="0" tIns="0" rIns="0" bIns="0" rtlCol="0" anchor="t"/>
+          <a:lstStyle/>
+          <a:p>
+            <a:pPr indent="0" marL="0">
+              <a:buNone/>
+            </a:pPr>
+            <a:r>
+              <a:rPr lang="en-US" sz="2600" b="1" dirty="0">
+                <a:solidFill>
+                  <a:srgbClr val="051C2C"/>
+                </a:solidFill>
+                <a:latin typeface="Georgia" pitchFamily="34" charset="0"/>
+                <a:ea typeface="Georgia" pitchFamily="34" charset="-122"/>
+                <a:cs typeface="Georgia" pitchFamily="34" charset="-120"/>
+              </a:rPr>
+              <a:t>Generative AI answers when asked; agentic AI takes a goal and works toward it on its own</a:t>
+            </a:r>
+            <a:endParaRPr lang="en-US" sz="2600" dirty="0"/>
+          </a:p>
+        </p:txBody>
+      </p:sp>
+      <p:sp>
+        <p:nvSpPr>
+          <p:cNvPr id="4" name="Text 2"/>
+          <p:cNvSpPr txBox="1"/>
+          <p:nvPr/>
+        </p:nvSpPr>
+        <p:spPr>
+          <a:xfrm>
+            <a:off x="548640" y="6400800"/>
+            <a:ext cx="10058400" cy="228600"/>
+          </a:xfrm>
+          <a:prstGeom prst="rect">
+            <a:avLst/>
+          </a:prstGeom>
+          <a:noFill/>
+          <a:ln/>
+        </p:spPr>
+        <p:txBody>
+          <a:bodyPr wrap="square" lIns="0" tIns="0" rIns="0" bIns="0" rtlCol="0" anchor="t"/>
+          <a:lstStyle/>
+          <a:p>
+            <a:pPr indent="0" marL="0">
+              <a:buNone/>
+            </a:pPr>
+            <a:r>
+              <a:rPr lang="en-US" sz="900" dirty="0">
+                <a:solidFill>
+                  <a:srgbClr val="6B7280"/>
+                </a:solidFill>
+                <a:latin typeface="Arial" pitchFamily="34" charset="0"/>
+                <a:ea typeface="Arial" pitchFamily="34" charset="-122"/>
+                <a:cs typeface="Arial" pitchFamily="34" charset="-120"/>
+              </a:rPr>
+              <a:t>Sources: LangChain docs, “Workflows and agents” (docs.langchain.com); Anthropic, “Building effective agents”, 19 Dec 2024 (anthropic.com/engineering)</a:t>
+            </a:r>
+            <a:endParaRPr lang="en-US" sz="900" dirty="0"/>
+          </a:p>
+        </p:txBody>
+      </p:sp>
+      <p:sp>
+        <p:nvSpPr>
+          <p:cNvPr id="5" name="Text 3"/>
+          <p:cNvSpPr txBox="1"/>
+          <p:nvPr/>
+        </p:nvSpPr>
+        <p:spPr>
+          <a:xfrm>
+            <a:off x="11155680" y="6400800"/>
+            <a:ext cx="484632" cy="228600"/>
+          </a:xfrm>
+          <a:prstGeom prst="rect">
+            <a:avLst/>
+          </a:prstGeom>
+          <a:noFill/>
+          <a:ln/>
+        </p:spPr>
+        <p:txBody>
+          <a:bodyPr wrap="square" lIns="0" tIns="0" rIns="0" bIns="0" rtlCol="0" anchor="t"/>
+          <a:lstStyle/>
+          <a:p>
+            <a:pPr algn="r" indent="0" marL="0">
+              <a:buNone/>
+            </a:pPr>
+            <a:r>
+              <a:rPr lang="en-US" sz="900" dirty="0">
+                <a:solidFill>
+                  <a:srgbClr val="6B7280"/>
+                </a:solidFill>
+                <a:latin typeface="Arial" pitchFamily="34" charset="0"/>
+                <a:ea typeface="Arial" pitchFamily="34" charset="-122"/>
+                <a:cs typeface="Arial" pitchFamily="34" charset="-120"/>
+              </a:rPr>
+              <a:t>5</a:t>
+            </a:r>
+            <a:endParaRPr lang="en-US" sz="900" dirty="0"/>
+          </a:p>
+        </p:txBody>
+      </p:sp>
+      <p:sp>
+        <p:nvSpPr>
+          <p:cNvPr id="102" name="Shape 0"/>
+          <p:cNvSpPr/>
+          <p:nvPr/>
+        </p:nvSpPr>
+        <p:spPr>
+          <a:xfrm>
+            <a:off x="548640" y="1691640"/>
+            <a:ext cx="5440680" cy="3931920"/>
+          </a:xfrm>
+          <a:prstGeom prst="rect">
+            <a:avLst/>
+          </a:prstGeom>
+          <a:solidFill>
+            <a:srgbClr val="F2F4F7"/>
+          </a:solidFill>
+          <a:ln w="12700">
+            <a:solidFill>
+              <a:srgbClr val="F2F4F7"/>
+            </a:solidFill>
+            <a:prstDash val="solid"/>
+          </a:ln>
+        </p:spPr>
+      </p:sp>
+      <p:sp>
+        <p:nvSpPr>
+          <p:cNvPr id="103" name="Text 1"/>
+          <p:cNvSpPr txBox="1"/>
+          <p:nvPr/>
+        </p:nvSpPr>
+        <p:spPr>
+          <a:xfrm>
+            <a:off x="822960" y="1920240"/>
+            <a:ext cx="4892040" cy="228600"/>
+          </a:xfrm>
+          <a:prstGeom prst="rect">
+            <a:avLst/>
+          </a:prstGeom>
+          <a:noFill/>
+          <a:ln/>
+        </p:spPr>
+        <p:txBody>
+          <a:bodyPr wrap="square" lIns="0" tIns="0" rIns="0" bIns="0" rtlCol="0" anchor="t"/>
+          <a:lstStyle/>
+          <a:p>
+            <a:pPr indent="0" marL="0">
+              <a:buNone/>
+            </a:pPr>
+            <a:r>
+              <a:rPr lang="en-US" sz="1000" b="1" spc="200" kern="0" dirty="0">
+                <a:solidFill>
+                  <a:srgbClr val="6B7280"/>
+                </a:solidFill>
+                <a:latin typeface="Arial" pitchFamily="34" charset="0"/>
+                <a:ea typeface="Arial" pitchFamily="34" charset="-122"/>
+                <a:cs typeface="Arial" pitchFamily="34" charset="-120"/>
+              </a:rPr>
+              <a:t>REACTIVE</a:t>
+            </a:r>
+            <a:endParaRPr lang="en-US" sz="1000" dirty="0"/>
+          </a:p>
+        </p:txBody>
+      </p:sp>
+      <p:sp>
+        <p:nvSpPr>
+          <p:cNvPr id="104" name="Text 2"/>
+          <p:cNvSpPr txBox="1"/>
+          <p:nvPr/>
+        </p:nvSpPr>
+        <p:spPr>
+          <a:xfrm>
+            <a:off x="822960" y="2194560"/>
+            <a:ext cx="4892040" cy="457200"/>
+          </a:xfrm>
+          <a:prstGeom prst="rect">
+            <a:avLst/>
+          </a:prstGeom>
+          <a:noFill/>
+          <a:ln/>
+        </p:spPr>
+        <p:txBody>
+          <a:bodyPr wrap="square" lIns="0" tIns="0" rIns="0" bIns="0" rtlCol="0" anchor="t"/>
+          <a:lstStyle/>
+          <a:p>
+            <a:pPr indent="0" marL="0">
+              <a:buNone/>
+            </a:pPr>
+            <a:r>
+              <a:rPr lang="en-US" sz="2200" b="1" dirty="0">
+                <a:solidFill>
+                  <a:srgbClr val="051C2C"/>
+                </a:solidFill>
+                <a:latin typeface="Georgia" pitchFamily="34" charset="0"/>
+                <a:ea typeface="Georgia" pitchFamily="34" charset="-122"/>
+                <a:cs typeface="Georgia" pitchFamily="34" charset="-120"/>
+              </a:rPr>
+              <a:t>Generative AI</a:t>
+            </a:r>
+            <a:endParaRPr lang="en-US" sz="2200" dirty="0"/>
+          </a:p>
+        </p:txBody>
+      </p:sp>
+      <p:sp>
+        <p:nvSpPr>
+          <p:cNvPr id="105" name="Text 3"/>
+          <p:cNvSpPr txBox="1"/>
+          <p:nvPr/>
+        </p:nvSpPr>
+        <p:spPr>
+          <a:xfrm>
+            <a:off x="822960" y="2651760"/>
+            <a:ext cx="4892040" cy="320040"/>
+          </a:xfrm>
+          <a:prstGeom prst="rect">
+            <a:avLst/>
+          </a:prstGeom>
+          <a:noFill/>
+          <a:ln/>
+        </p:spPr>
+        <p:txBody>
+          <a:bodyPr wrap="square" lIns="0" tIns="0" rIns="0" bIns="0" rtlCol="0" anchor="t"/>
+          <a:lstStyle/>
+          <a:p>
+            <a:pPr indent="0" marL="0">
+              <a:buNone/>
+            </a:pPr>
+            <a:r>
+              <a:rPr lang="en-US" sz="1300" i="1" dirty="0">
+                <a:solidFill>
+                  <a:srgbClr val="1F2933"/>
+                </a:solidFill>
+                <a:latin typeface="Arial" pitchFamily="34" charset="0"/>
+                <a:ea typeface="Arial" pitchFamily="34" charset="-122"/>
+                <a:cs typeface="Arial" pitchFamily="34" charset="-120"/>
+              </a:rPr>
+              <a:t>Waits for your question</a:t>
+            </a:r>
+            <a:endParaRPr lang="en-US" sz="1300" dirty="0"/>
+          </a:p>
+        </p:txBody>
+      </p:sp>
+      <p:sp>
+        <p:nvSpPr>
+          <p:cNvPr id="106" name="Shape 4"/>
+          <p:cNvSpPr/>
+          <p:nvPr/>
+        </p:nvSpPr>
+        <p:spPr>
+          <a:xfrm>
+            <a:off x="841248" y="3182112"/>
+            <a:ext cx="82296" cy="82296"/>
+          </a:xfrm>
+          <a:prstGeom prst="ellipse">
+            <a:avLst/>
+          </a:prstGeom>
+          <a:solidFill>
+            <a:srgbClr val="2251FF"/>
+          </a:solidFill>
+          <a:ln w="12700">
+            <a:solidFill>
+              <a:srgbClr val="2251FF"/>
+            </a:solidFill>
+            <a:prstDash val="solid"/>
+          </a:ln>
+        </p:spPr>
+      </p:sp>
+      <p:sp>
+        <p:nvSpPr>
+          <p:cNvPr id="107" name="Text 5"/>
+          <p:cNvSpPr txBox="1"/>
+          <p:nvPr/>
+        </p:nvSpPr>
+        <p:spPr>
+          <a:xfrm>
+            <a:off x="1051560" y="3108960"/>
+            <a:ext cx="4663440" cy="320040"/>
+          </a:xfrm>
+          <a:prstGeom prst="rect">
+            <a:avLst/>
+          </a:prstGeom>
+          <a:noFill/>
+          <a:ln/>
+        </p:spPr>
+        <p:txBody>
+          <a:bodyPr wrap="square" lIns="0" tIns="0" rIns="0" bIns="0" rtlCol="0" anchor="t"/>
+          <a:lstStyle/>
+          <a:p>
+            <a:pPr indent="0" marL="0">
+              <a:buNone/>
+            </a:pPr>
+            <a:r>
+              <a:rPr lang="en-US" sz="1300" dirty="0">
+                <a:solidFill>
+                  <a:srgbClr val="1F2933"/>
+                </a:solidFill>
+                <a:latin typeface="Arial" pitchFamily="34" charset="0"/>
+                <a:ea typeface="Arial" pitchFamily="34" charset="-122"/>
+                <a:cs typeface="Arial" pitchFamily="34" charset="-120"/>
+              </a:rPr>
+              <a:t>Starts when you ask</a:t>
+            </a:r>
+            <a:endParaRPr lang="en-US" sz="1300" dirty="0"/>
+          </a:p>
+        </p:txBody>
+      </p:sp>
+      <p:sp>
+        <p:nvSpPr>
+          <p:cNvPr id="108" name="Shape 6"/>
+          <p:cNvSpPr/>
+          <p:nvPr/>
+        </p:nvSpPr>
+        <p:spPr>
+          <a:xfrm>
+            <a:off x="841248" y="3566160"/>
+            <a:ext cx="82296" cy="82296"/>
+          </a:xfrm>
+          <a:prstGeom prst="ellipse">
+            <a:avLst/>
+          </a:prstGeom>
+          <a:solidFill>
+            <a:srgbClr val="2251FF"/>
+          </a:solidFill>
+          <a:ln w="12700">
+            <a:solidFill>
+              <a:srgbClr val="2251FF"/>
+            </a:solidFill>
+            <a:prstDash val="solid"/>
+          </a:ln>
+        </p:spPr>
+      </p:sp>
+      <p:sp>
+        <p:nvSpPr>
+          <p:cNvPr id="109" name="Text 7"/>
+          <p:cNvSpPr txBox="1"/>
+          <p:nvPr/>
+        </p:nvSpPr>
+        <p:spPr>
+          <a:xfrm>
+            <a:off x="1051560" y="3493008"/>
+            <a:ext cx="4663440" cy="320040"/>
+          </a:xfrm>
+          <a:prstGeom prst="rect">
+            <a:avLst/>
+          </a:prstGeom>
+          <a:noFill/>
+          <a:ln/>
+        </p:spPr>
+        <p:txBody>
+          <a:bodyPr wrap="square" lIns="0" tIns="0" rIns="0" bIns="0" rtlCol="0" anchor="t"/>
+          <a:lstStyle/>
+          <a:p>
+            <a:pPr indent="0" marL="0">
+              <a:buNone/>
+            </a:pPr>
+            <a:r>
+              <a:rPr lang="en-US" sz="1300" dirty="0">
+                <a:solidFill>
+                  <a:srgbClr val="1F2933"/>
+                </a:solidFill>
+                <a:latin typeface="Arial" pitchFamily="34" charset="0"/>
+                <a:ea typeface="Arial" pitchFamily="34" charset="-122"/>
+                <a:cs typeface="Arial" pitchFamily="34" charset="-120"/>
+              </a:rPr>
+              <a:t>Gives one answer, then stops</a:t>
+            </a:r>
+            <a:endParaRPr lang="en-US" sz="1300" dirty="0"/>
+          </a:p>
+        </p:txBody>
+      </p:sp>
+      <p:sp>
+        <p:nvSpPr>
+          <p:cNvPr id="110" name="Shape 8"/>
+          <p:cNvSpPr/>
+          <p:nvPr/>
+        </p:nvSpPr>
+        <p:spPr>
+          <a:xfrm>
+            <a:off x="841248" y="3950208"/>
+            <a:ext cx="82296" cy="82296"/>
+          </a:xfrm>
+          <a:prstGeom prst="ellipse">
+            <a:avLst/>
+          </a:prstGeom>
+          <a:solidFill>
+            <a:srgbClr val="2251FF"/>
+          </a:solidFill>
+          <a:ln w="12700">
+            <a:solidFill>
+              <a:srgbClr val="2251FF"/>
+            </a:solidFill>
+            <a:prstDash val="solid"/>
+          </a:ln>
+        </p:spPr>
+      </p:sp>
+      <p:sp>
+        <p:nvSpPr>
+          <p:cNvPr id="111" name="Text 9"/>
+          <p:cNvSpPr txBox="1"/>
+          <p:nvPr/>
+        </p:nvSpPr>
+        <p:spPr>
+          <a:xfrm>
+            <a:off x="1051560" y="3877056"/>
+            <a:ext cx="4663440" cy="320040"/>
+          </a:xfrm>
+          <a:prstGeom prst="rect">
+            <a:avLst/>
+          </a:prstGeom>
+          <a:noFill/>
+          <a:ln/>
+        </p:spPr>
+        <p:txBody>
+          <a:bodyPr wrap="square" lIns="0" tIns="0" rIns="0" bIns="0" rtlCol="0" anchor="t"/>
+          <a:lstStyle/>
+          <a:p>
+            <a:pPr indent="0" marL="0">
+              <a:buNone/>
+            </a:pPr>
+            <a:r>
+              <a:rPr lang="en-US" sz="1300" dirty="0">
+                <a:solidFill>
+                  <a:srgbClr val="1F2933"/>
+                </a:solidFill>
+                <a:latin typeface="Arial" pitchFamily="34" charset="0"/>
+                <a:ea typeface="Arial" pitchFamily="34" charset="-122"/>
+                <a:cs typeface="Arial" pitchFamily="34" charset="-120"/>
+              </a:rPr>
+              <a:t>Relies on what it already knows</a:t>
+            </a:r>
+            <a:endParaRPr lang="en-US" sz="1300" dirty="0"/>
+          </a:p>
+        </p:txBody>
+      </p:sp>
+      <p:sp>
+        <p:nvSpPr>
+          <p:cNvPr id="112" name="Shape 10"/>
+          <p:cNvSpPr/>
+          <p:nvPr/>
+        </p:nvSpPr>
+        <p:spPr>
+          <a:xfrm>
+            <a:off x="841248" y="4334256"/>
+            <a:ext cx="82296" cy="82296"/>
+          </a:xfrm>
+          <a:prstGeom prst="ellipse">
+            <a:avLst/>
+          </a:prstGeom>
+          <a:solidFill>
+            <a:srgbClr val="2251FF"/>
+          </a:solidFill>
+          <a:ln w="12700">
+            <a:solidFill>
+              <a:srgbClr val="2251FF"/>
+            </a:solidFill>
+            <a:prstDash val="solid"/>
+          </a:ln>
+        </p:spPr>
+      </p:sp>
+      <p:sp>
+        <p:nvSpPr>
+          <p:cNvPr id="113" name="Text 11"/>
+          <p:cNvSpPr txBox="1"/>
+          <p:nvPr/>
+        </p:nvSpPr>
+        <p:spPr>
+          <a:xfrm>
+            <a:off x="1051560" y="4261104"/>
+            <a:ext cx="4663440" cy="320040"/>
+          </a:xfrm>
+          <a:prstGeom prst="rect">
+            <a:avLst/>
+          </a:prstGeom>
+          <a:noFill/>
+          <a:ln/>
+        </p:spPr>
+        <p:txBody>
+          <a:bodyPr wrap="square" lIns="0" tIns="0" rIns="0" bIns="0" rtlCol="0" anchor="t"/>
+          <a:lstStyle/>
+          <a:p>
+            <a:pPr indent="0" marL="0">
+              <a:buNone/>
+            </a:pPr>
+            <a:r>
+              <a:rPr lang="en-US" sz="1300" dirty="0">
+                <a:solidFill>
+                  <a:srgbClr val="1F2933"/>
+                </a:solidFill>
+                <a:latin typeface="Arial" pitchFamily="34" charset="0"/>
+                <a:ea typeface="Arial" pitchFamily="34" charset="-122"/>
+                <a:cs typeface="Arial" pitchFamily="34" charset="-120"/>
+              </a:rPr>
+              <a:t>You check the answer and act on it</a:t>
+            </a:r>
+            <a:endParaRPr lang="en-US" sz="1300" dirty="0"/>
+          </a:p>
+        </p:txBody>
+      </p:sp>
+      <p:sp>
+        <p:nvSpPr>
+          <p:cNvPr id="114" name="Shape 12"/>
+          <p:cNvSpPr/>
+          <p:nvPr/>
+        </p:nvSpPr>
+        <p:spPr>
+          <a:xfrm>
+            <a:off x="822960" y="4754880"/>
+            <a:ext cx="4892040" cy="685800"/>
+          </a:xfrm>
+          <a:prstGeom prst="rect">
+            <a:avLst/>
+          </a:prstGeom>
+          <a:solidFill>
+            <a:srgbClr val="FFFFFF"/>
+          </a:solidFill>
+          <a:ln w="12700">
+            <a:solidFill>
+              <a:srgbClr val="FFFFFF"/>
+            </a:solidFill>
+            <a:prstDash val="solid"/>
+          </a:ln>
+        </p:spPr>
+      </p:sp>
+      <p:sp>
+        <p:nvSpPr>
+          <p:cNvPr id="115" name="Text 13"/>
+          <p:cNvSpPr txBox="1"/>
+          <p:nvPr/>
+        </p:nvSpPr>
+        <p:spPr>
+          <a:xfrm>
+            <a:off x="960120" y="4846320"/>
+            <a:ext cx="4617720" cy="548640"/>
+          </a:xfrm>
+          <a:prstGeom prst="rect">
+            <a:avLst/>
+          </a:prstGeom>
+          <a:noFill/>
+          <a:ln/>
+        </p:spPr>
+        <p:txBody>
+          <a:bodyPr wrap="square" lIns="0" tIns="0" rIns="0" bIns="0" rtlCol="0" anchor="ctr"/>
+          <a:lstStyle/>
+          <a:p>
+            <a:pPr indent="0" marL="0">
+              <a:buNone/>
+            </a:pPr>
+            <a:r>
+              <a:rPr lang="en-US" sz="1200" i="1" dirty="0">
+                <a:solidFill>
+                  <a:srgbClr val="1F2933"/>
+                </a:solidFill>
+                <a:latin typeface="Arial" pitchFamily="34" charset="0"/>
+                <a:ea typeface="Arial" pitchFamily="34" charset="-122"/>
+                <a:cs typeface="Arial" pitchFamily="34" charset="-120"/>
+              </a:rPr>
+              <a:t>Ask “What does an Omega Speedmaster cost?” and get one general answer that may be out of date.</a:t>
+            </a:r>
+            <a:endParaRPr lang="en-US" sz="1200" dirty="0"/>
+          </a:p>
+        </p:txBody>
+      </p:sp>
+      <p:sp>
+        <p:nvSpPr>
+          <p:cNvPr id="116" name="Shape 14"/>
+          <p:cNvSpPr/>
+          <p:nvPr/>
+        </p:nvSpPr>
+        <p:spPr>
+          <a:xfrm>
+            <a:off x="6199632" y="1691640"/>
+            <a:ext cx="5440680" cy="3931920"/>
+          </a:xfrm>
+          <a:prstGeom prst="rect">
+            <a:avLst/>
+          </a:prstGeom>
+          <a:solidFill>
+            <a:srgbClr val="051C2C"/>
+          </a:solidFill>
+          <a:ln w="12700">
+            <a:solidFill>
+              <a:srgbClr val="051C2C"/>
+            </a:solidFill>
+            <a:prstDash val="solid"/>
+          </a:ln>
+        </p:spPr>
+      </p:sp>
+      <p:sp>
+        <p:nvSpPr>
+          <p:cNvPr id="117" name="Text 15"/>
+          <p:cNvSpPr txBox="1"/>
+          <p:nvPr/>
+        </p:nvSpPr>
+        <p:spPr>
+          <a:xfrm>
+            <a:off x="6473952" y="1920240"/>
+            <a:ext cx="4892040" cy="228600"/>
+          </a:xfrm>
+          <a:prstGeom prst="rect">
+            <a:avLst/>
+          </a:prstGeom>
+          <a:noFill/>
+          <a:ln/>
+        </p:spPr>
+        <p:txBody>
+          <a:bodyPr wrap="square" lIns="0" tIns="0" rIns="0" bIns="0" rtlCol="0" anchor="t"/>
+          <a:lstStyle/>
+          <a:p>
+            <a:pPr indent="0" marL="0">
+              <a:buNone/>
+            </a:pPr>
+            <a:r>
+              <a:rPr lang="en-US" sz="1000" b="1" spc="200" kern="0" dirty="0">
+                <a:solidFill>
+                  <a:srgbClr val="8FB0FF"/>
+                </a:solidFill>
+                <a:latin typeface="Arial" pitchFamily="34" charset="0"/>
+                <a:ea typeface="Arial" pitchFamily="34" charset="-122"/>
+                <a:cs typeface="Arial" pitchFamily="34" charset="-120"/>
+              </a:rPr>
+              <a:t>PROACTIVE</a:t>
+            </a:r>
+            <a:endParaRPr lang="en-US" sz="1000" dirty="0"/>
+          </a:p>
+        </p:txBody>
+      </p:sp>
+      <p:sp>
+        <p:nvSpPr>
+          <p:cNvPr id="118" name="Text 16"/>
+          <p:cNvSpPr txBox="1"/>
+          <p:nvPr/>
+        </p:nvSpPr>
+        <p:spPr>
+          <a:xfrm>
+            <a:off x="6473952" y="2194560"/>
+            <a:ext cx="4892040" cy="457200"/>
+          </a:xfrm>
+          <a:prstGeom prst="rect">
+            <a:avLst/>
+          </a:prstGeom>
+          <a:noFill/>
+          <a:ln/>
+        </p:spPr>
+        <p:txBody>
+          <a:bodyPr wrap="square" lIns="0" tIns="0" rIns="0" bIns="0" rtlCol="0" anchor="t"/>
+          <a:lstStyle/>
+          <a:p>
+            <a:pPr indent="0" marL="0">
+              <a:buNone/>
+            </a:pPr>
+            <a:r>
+              <a:rPr lang="en-US" sz="2200" b="1" dirty="0">
+                <a:solidFill>
+                  <a:srgbClr val="FFFFFF"/>
+                </a:solidFill>
+                <a:latin typeface="Georgia" pitchFamily="34" charset="0"/>
+                <a:ea typeface="Georgia" pitchFamily="34" charset="-122"/>
+                <a:cs typeface="Georgia" pitchFamily="34" charset="-120"/>
+              </a:rPr>
+              <a:t>Agentic AI</a:t>
+            </a:r>
+            <a:endParaRPr lang="en-US" sz="2200" dirty="0"/>
+          </a:p>
+        </p:txBody>
+      </p:sp>
+      <p:sp>
+        <p:nvSpPr>
+          <p:cNvPr id="119" name="Text 17"/>
+          <p:cNvSpPr txBox="1"/>
+          <p:nvPr/>
+        </p:nvSpPr>
+        <p:spPr>
+          <a:xfrm>
+            <a:off x="6473952" y="2651760"/>
+            <a:ext cx="4892040" cy="320040"/>
+          </a:xfrm>
+          <a:prstGeom prst="rect">
+            <a:avLst/>
+          </a:prstGeom>
+          <a:noFill/>
+          <a:ln/>
+        </p:spPr>
+        <p:txBody>
+          <a:bodyPr wrap="square" lIns="0" tIns="0" rIns="0" bIns="0" rtlCol="0" anchor="t"/>
+          <a:lstStyle/>
+          <a:p>
+            <a:pPr indent="0" marL="0">
+              <a:buNone/>
+            </a:pPr>
+            <a:r>
+              <a:rPr lang="en-US" sz="1300" i="1" dirty="0">
+                <a:solidFill>
+                  <a:srgbClr val="DDE6FA"/>
+                </a:solidFill>
+                <a:latin typeface="Arial" pitchFamily="34" charset="0"/>
+                <a:ea typeface="Arial" pitchFamily="34" charset="-122"/>
+                <a:cs typeface="Arial" pitchFamily="34" charset="-120"/>
+              </a:rPr>
+              <a:t>Works toward a goal</a:t>
+            </a:r>
+            <a:endParaRPr lang="en-US" sz="1300" dirty="0"/>
+          </a:p>
+        </p:txBody>
+      </p:sp>
+      <p:sp>
+        <p:nvSpPr>
+          <p:cNvPr id="120" name="Shape 18"/>
+          <p:cNvSpPr/>
+          <p:nvPr/>
+        </p:nvSpPr>
+        <p:spPr>
+          <a:xfrm>
+            <a:off x="6492240" y="3182112"/>
+            <a:ext cx="82296" cy="82296"/>
+          </a:xfrm>
+          <a:prstGeom prst="ellipse">
+            <a:avLst/>
+          </a:prstGeom>
+          <a:solidFill>
+            <a:srgbClr val="8FB0FF"/>
+          </a:solidFill>
+          <a:ln w="12700">
+            <a:solidFill>
+              <a:srgbClr val="8FB0FF"/>
+            </a:solidFill>
+            <a:prstDash val="solid"/>
+          </a:ln>
+        </p:spPr>
+      </p:sp>
+      <p:sp>
+        <p:nvSpPr>
+          <p:cNvPr id="121" name="Text 19"/>
+          <p:cNvSpPr txBox="1"/>
+          <p:nvPr/>
+        </p:nvSpPr>
+        <p:spPr>
+          <a:xfrm>
+            <a:off x="6702552" y="3108960"/>
+            <a:ext cx="4663440" cy="320040"/>
+          </a:xfrm>
+          <a:prstGeom prst="rect">
+            <a:avLst/>
+          </a:prstGeom>
+          <a:noFill/>
+          <a:ln/>
+        </p:spPr>
+        <p:txBody>
+          <a:bodyPr wrap="square" lIns="0" tIns="0" rIns="0" bIns="0" rtlCol="0" anchor="t"/>
+          <a:lstStyle/>
+          <a:p>
+            <a:pPr indent="0" marL="0">
+              <a:buNone/>
+            </a:pPr>
+            <a:r>
+              <a:rPr lang="en-US" sz="1300" dirty="0">
+                <a:solidFill>
+                  <a:srgbClr val="DDE6FA"/>
+                </a:solidFill>
+                <a:latin typeface="Arial" pitchFamily="34" charset="0"/>
+                <a:ea typeface="Arial" pitchFamily="34" charset="-122"/>
+                <a:cs typeface="Arial" pitchFamily="34" charset="-120"/>
+              </a:rPr>
+              <a:t>Starts from a goal, even on a schedule</a:t>
+            </a:r>
+            <a:endParaRPr lang="en-US" sz="1300" dirty="0"/>
+          </a:p>
+        </p:txBody>
+      </p:sp>
+      <p:sp>
+        <p:nvSpPr>
+          <p:cNvPr id="122" name="Shape 20"/>
+          <p:cNvSpPr/>
+          <p:nvPr/>
+        </p:nvSpPr>
+        <p:spPr>
+          <a:xfrm>
+            <a:off x="6492240" y="3566160"/>
+            <a:ext cx="82296" cy="82296"/>
+          </a:xfrm>
+          <a:prstGeom prst="ellipse">
+            <a:avLst/>
+          </a:prstGeom>
+          <a:solidFill>
+            <a:srgbClr val="8FB0FF"/>
+          </a:solidFill>
+          <a:ln w="12700">
+            <a:solidFill>
+              <a:srgbClr val="8FB0FF"/>
+            </a:solidFill>
+            <a:prstDash val="solid"/>
+          </a:ln>
+        </p:spPr>
+      </p:sp>
+      <p:sp>
+        <p:nvSpPr>
+          <p:cNvPr id="123" name="Text 21"/>
+          <p:cNvSpPr txBox="1"/>
+          <p:nvPr/>
+        </p:nvSpPr>
+        <p:spPr>
+          <a:xfrm>
+            <a:off x="6702552" y="3493008"/>
+            <a:ext cx="4663440" cy="320040"/>
+          </a:xfrm>
+          <a:prstGeom prst="rect">
+            <a:avLst/>
+          </a:prstGeom>
+          <a:noFill/>
+          <a:ln/>
+        </p:spPr>
+        <p:txBody>
+          <a:bodyPr wrap="square" lIns="0" tIns="0" rIns="0" bIns="0" rtlCol="0" anchor="t"/>
+          <a:lstStyle/>
+          <a:p>
+            <a:pPr indent="0" marL="0">
+              <a:buNone/>
+            </a:pPr>
+            <a:r>
+              <a:rPr lang="en-US" sz="1300" dirty="0">
+                <a:solidFill>
+                  <a:srgbClr val="DDE6FA"/>
+                </a:solidFill>
+                <a:latin typeface="Arial" pitchFamily="34" charset="0"/>
+                <a:ea typeface="Arial" pitchFamily="34" charset="-122"/>
+                <a:cs typeface="Arial" pitchFamily="34" charset="-120"/>
+              </a:rPr>
+              <a:t>Takes several steps, adjusting as it goes</a:t>
+            </a:r>
+            <a:endParaRPr lang="en-US" sz="1300" dirty="0"/>
+          </a:p>
+        </p:txBody>
+      </p:sp>
+      <p:sp>
+        <p:nvSpPr>
+          <p:cNvPr id="124" name="Shape 22"/>
+          <p:cNvSpPr/>
+          <p:nvPr/>
+        </p:nvSpPr>
+        <p:spPr>
+          <a:xfrm>
+            <a:off x="6492240" y="3950208"/>
+            <a:ext cx="82296" cy="82296"/>
+          </a:xfrm>
+          <a:prstGeom prst="ellipse">
+            <a:avLst/>
+          </a:prstGeom>
+          <a:solidFill>
+            <a:srgbClr val="8FB0FF"/>
+          </a:solidFill>
+          <a:ln w="12700">
+            <a:solidFill>
+              <a:srgbClr val="8FB0FF"/>
+            </a:solidFill>
+            <a:prstDash val="solid"/>
+          </a:ln>
+        </p:spPr>
+      </p:sp>
+      <p:sp>
+        <p:nvSpPr>
+          <p:cNvPr id="125" name="Text 23"/>
+          <p:cNvSpPr txBox="1"/>
+          <p:nvPr/>
+        </p:nvSpPr>
+        <p:spPr>
+          <a:xfrm>
+            <a:off x="6702552" y="3877056"/>
+            <a:ext cx="4663440" cy="320040"/>
+          </a:xfrm>
+          <a:prstGeom prst="rect">
+            <a:avLst/>
+          </a:prstGeom>
+          <a:noFill/>
+          <a:ln/>
+        </p:spPr>
+        <p:txBody>
+          <a:bodyPr wrap="square" lIns="0" tIns="0" rIns="0" bIns="0" rtlCol="0" anchor="t"/>
+          <a:lstStyle/>
+          <a:p>
+            <a:pPr indent="0" marL="0">
+              <a:buNone/>
+            </a:pPr>
+            <a:r>
+              <a:rPr lang="en-US" sz="1300" dirty="0">
+                <a:solidFill>
+                  <a:srgbClr val="DDE6FA"/>
+                </a:solidFill>
+                <a:latin typeface="Arial" pitchFamily="34" charset="0"/>
+                <a:ea typeface="Arial" pitchFamily="34" charset="-122"/>
+                <a:cs typeface="Arial" pitchFamily="34" charset="-120"/>
+              </a:rPr>
+              <a:t>Looks things up with tools</a:t>
+            </a:r>
+            <a:endParaRPr lang="en-US" sz="1300" dirty="0"/>
+          </a:p>
+        </p:txBody>
+      </p:sp>
+      <p:sp>
+        <p:nvSpPr>
+          <p:cNvPr id="126" name="Shape 24"/>
+          <p:cNvSpPr/>
+          <p:nvPr/>
+        </p:nvSpPr>
+        <p:spPr>
+          <a:xfrm>
+            <a:off x="6492240" y="4334256"/>
+            <a:ext cx="82296" cy="82296"/>
+          </a:xfrm>
+          <a:prstGeom prst="ellipse">
+            <a:avLst/>
+          </a:prstGeom>
+          <a:solidFill>
+            <a:srgbClr val="8FB0FF"/>
+          </a:solidFill>
+          <a:ln w="12700">
+            <a:solidFill>
+              <a:srgbClr val="8FB0FF"/>
+            </a:solidFill>
+            <a:prstDash val="solid"/>
+          </a:ln>
+        </p:spPr>
+      </p:sp>
+      <p:sp>
+        <p:nvSpPr>
+          <p:cNvPr id="127" name="Text 25"/>
+          <p:cNvSpPr txBox="1"/>
+          <p:nvPr/>
+        </p:nvSpPr>
+        <p:spPr>
+          <a:xfrm>
+            <a:off x="6702552" y="4261104"/>
+            <a:ext cx="4663440" cy="320040"/>
+          </a:xfrm>
+          <a:prstGeom prst="rect">
+            <a:avLst/>
+          </a:prstGeom>
+          <a:noFill/>
+          <a:ln/>
+        </p:spPr>
+        <p:txBody>
+          <a:bodyPr wrap="square" lIns="0" tIns="0" rIns="0" bIns="0" rtlCol="0" anchor="t"/>
+          <a:lstStyle/>
+          <a:p>
+            <a:pPr indent="0" marL="0">
+              <a:buNone/>
+            </a:pPr>
+            <a:r>
+              <a:rPr lang="en-US" sz="1300" dirty="0">
+                <a:solidFill>
+                  <a:srgbClr val="DDE6FA"/>
+                </a:solidFill>
+                <a:latin typeface="Arial" pitchFamily="34" charset="0"/>
+                <a:ea typeface="Arial" pitchFamily="34" charset="-122"/>
+                <a:cs typeface="Arial" pitchFamily="34" charset="-120"/>
+              </a:rPr>
+              <a:t>Checks its own results before acting</a:t>
+            </a:r>
+            <a:endParaRPr lang="en-US" sz="1300" dirty="0"/>
+          </a:p>
+        </p:txBody>
+      </p:sp>
+      <p:sp>
+        <p:nvSpPr>
+          <p:cNvPr id="128" name="Shape 26"/>
+          <p:cNvSpPr/>
+          <p:nvPr/>
+        </p:nvSpPr>
+        <p:spPr>
+          <a:xfrm>
+            <a:off x="6473952" y="4754880"/>
+            <a:ext cx="4892040" cy="685800"/>
+          </a:xfrm>
+          <a:prstGeom prst="rect">
+            <a:avLst/>
+          </a:prstGeom>
+          <a:solidFill>
+            <a:srgbClr val="2251FF"/>
+          </a:solidFill>
+          <a:ln w="12700">
+            <a:solidFill>
+              <a:srgbClr val="2251FF"/>
+            </a:solidFill>
+            <a:prstDash val="solid"/>
+          </a:ln>
+        </p:spPr>
+      </p:sp>
+      <p:sp>
+        <p:nvSpPr>
+          <p:cNvPr id="129" name="Text 27"/>
+          <p:cNvSpPr txBox="1"/>
+          <p:nvPr/>
+        </p:nvSpPr>
+        <p:spPr>
+          <a:xfrm>
+            <a:off x="6611112" y="4846320"/>
+            <a:ext cx="4617720" cy="548640"/>
+          </a:xfrm>
+          <a:prstGeom prst="rect">
+            <a:avLst/>
+          </a:prstGeom>
+          <a:noFill/>
+          <a:ln/>
+        </p:spPr>
+        <p:txBody>
+          <a:bodyPr wrap="square" lIns="0" tIns="0" rIns="0" bIns="0" rtlCol="0" anchor="ctr"/>
+          <a:lstStyle/>
+          <a:p>
+            <a:pPr indent="0" marL="0">
+              <a:buNone/>
+            </a:pPr>
+            <a:r>
+              <a:rPr lang="en-US" sz="1200" i="1" dirty="0">
+                <a:solidFill>
+                  <a:srgbClr val="FFFFFF"/>
+                </a:solidFill>
+                <a:latin typeface="Arial" pitchFamily="34" charset="0"/>
+                <a:ea typeface="Arial" pitchFamily="34" charset="-122"/>
+                <a:cs typeface="Arial" pitchFamily="34" charset="-120"/>
+              </a:rPr>
+              <a:t>WatchAgent checks every 6 hours, finds live listings, and messages you only when it’s a good deal.</a:t>
+            </a:r>
+            <a:endParaRPr lang="en-US" sz="1200" dirty="0"/>
+          </a:p>
+        </p:txBody>
+      </p:sp>
+      <p:sp>
+        <p:nvSpPr>
+          <p:cNvPr id="130" name="Text 28"/>
+          <p:cNvSpPr txBox="1"/>
+          <p:nvPr/>
+        </p:nvSpPr>
+        <p:spPr>
+          <a:xfrm>
+            <a:off x="548640" y="5806440"/>
+            <a:ext cx="11091672" cy="411480"/>
+          </a:xfrm>
+          <a:prstGeom prst="rect">
+            <a:avLst/>
+          </a:prstGeom>
+          <a:noFill/>
+          <a:ln/>
+        </p:spPr>
+        <p:txBody>
+          <a:bodyPr wrap="square" lIns="0" tIns="0" rIns="0" bIns="0" rtlCol="0" anchor="t"/>
+          <a:lstStyle/>
+          <a:p>
+            <a:pPr indent="0" marL="0">
+              <a:buNone/>
+            </a:pPr>
+            <a:r>
+              <a:rPr lang="en-US" sz="1500" i="1" dirty="0">
+                <a:solidFill>
+                  <a:srgbClr val="051C2C"/>
+                </a:solidFill>
+                <a:latin typeface="Georgia" pitchFamily="34" charset="0"/>
+                <a:ea typeface="Georgia" pitchFamily="34" charset="-122"/>
+                <a:cs typeface="Georgia" pitchFamily="34" charset="-120"/>
+              </a:rPr>
+              <a:t>More independence needs more guardrails: that is why plain code checks WatchAgent’s numbers.</a:t>
+            </a:r>
+            <a:endParaRPr lang="en-US" sz="1500" dirty="0"/>
+          </a:p>
+        </p:txBody>
+      </p:sp>
+    </p:spTree>
+  </p:cSld>
+  <p:clrMapOvr>
+    <a:masterClrMapping/>
+  </p:clrMapOvr>
+</p:sld>
+</file>
+
+<file path=ppt/slides/slide14.xml><?xml version="1.0" encoding="utf-8"?>
+<p:sld xmlns:a="http://schemas.openxmlformats.org/drawingml/2006/main" xmlns:r="http://schemas.openxmlformats.org/officeDocument/2006/relationships" xmlns:p="http://schemas.openxmlformats.org/presentationml/2006/main">
+  <p:cSld name="Slide 4">
+    <p:bg>
+      <p:bgPr>
+        <a:solidFill>
+          <a:srgbClr val="FFFFFF"/>
+        </a:solidFill>
+      </p:bgPr>
+    </p:bg>
+    <p:spTree>
+      <p:nvGrpSpPr>
+        <p:cNvPr id="1" name=""/>
+        <p:cNvGrpSpPr/>
+        <p:nvPr/>
+      </p:nvGrpSpPr>
+      <p:grpSpPr>
+        <a:xfrm>
+          <a:off x="0" y="0"/>
+          <a:ext cx="0" cy="0"/>
+          <a:chOff x="0" y="0"/>
+          <a:chExt cx="0" cy="0"/>
+        </a:xfrm>
+      </p:grpSpPr>
+      <p:sp>
+        <p:nvSpPr>
+          <p:cNvPr id="2" name="Text 0"/>
+          <p:cNvSpPr txBox="1"/>
+          <p:nvPr/>
+        </p:nvSpPr>
+        <p:spPr>
+          <a:xfrm>
+            <a:off x="548640" y="274320"/>
+            <a:ext cx="7315200" cy="228600"/>
+          </a:xfrm>
+          <a:prstGeom prst="rect">
+            <a:avLst/>
+          </a:prstGeom>
+          <a:noFill/>
+          <a:ln/>
+        </p:spPr>
+        <p:txBody>
+          <a:bodyPr wrap="square" lIns="0" tIns="0" rIns="0" bIns="0" rtlCol="0" anchor="t"/>
+          <a:lstStyle/>
+          <a:p>
+            <a:pPr indent="0" marL="0">
+              <a:buNone/>
+            </a:pPr>
+            <a:r>
+              <a:rPr lang="en-US" sz="1000" b="1" spc="200" kern="0" dirty="0">
+                <a:solidFill>
+                  <a:srgbClr val="2251FF"/>
+                </a:solidFill>
+                <a:latin typeface="Arial" pitchFamily="34" charset="0"/>
+                <a:ea typeface="Arial" pitchFamily="34" charset="-122"/>
+                <a:cs typeface="Arial" pitchFamily="34" charset="-120"/>
+              </a:rPr>
+              <a:t>CHAIN-OF-THOUGHT REASONING</a:t>
+            </a:r>
+            <a:endParaRPr lang="en-US" sz="1000" dirty="0"/>
+          </a:p>
+        </p:txBody>
+      </p:sp>
+      <p:sp>
+        <p:nvSpPr>
+          <p:cNvPr id="3" name="Text 1"/>
+          <p:cNvSpPr txBox="1"/>
+          <p:nvPr/>
+        </p:nvSpPr>
+        <p:spPr>
+          <a:xfrm>
+            <a:off x="548640" y="594360"/>
+            <a:ext cx="11064240" cy="914400"/>
+          </a:xfrm>
+          <a:prstGeom prst="rect">
+            <a:avLst/>
+          </a:prstGeom>
+          <a:noFill/>
+          <a:ln/>
+        </p:spPr>
+        <p:txBody>
+          <a:bodyPr wrap="square" lIns="0" tIns="0" rIns="0" bIns="0" rtlCol="0" anchor="t"/>
+          <a:lstStyle/>
+          <a:p>
+            <a:pPr indent="0" marL="0">
+              <a:buNone/>
+            </a:pPr>
+            <a:r>
+              <a:rPr lang="en-US" sz="2600" b="1" dirty="0">
+                <a:solidFill>
+                  <a:srgbClr val="051C2C"/>
+                </a:solidFill>
+                <a:latin typeface="Georgia" pitchFamily="34" charset="0"/>
+                <a:ea typeface="Georgia" pitchFamily="34" charset="-122"/>
+                <a:cs typeface="Georgia" pitchFamily="34" charset="-120"/>
+              </a:rPr>
+              <a:t>Thinking in steps makes AI more reliable, and agents take real actions between the steps</a:t>
+            </a:r>
+            <a:endParaRPr lang="en-US" sz="2600" dirty="0"/>
+          </a:p>
+        </p:txBody>
+      </p:sp>
+      <p:sp>
+        <p:nvSpPr>
+          <p:cNvPr id="4" name="Text 2"/>
+          <p:cNvSpPr txBox="1"/>
+          <p:nvPr/>
+        </p:nvSpPr>
+        <p:spPr>
+          <a:xfrm>
+            <a:off x="548640" y="6400800"/>
+            <a:ext cx="10058400" cy="228600"/>
+          </a:xfrm>
+          <a:prstGeom prst="rect">
+            <a:avLst/>
+          </a:prstGeom>
+          <a:noFill/>
+          <a:ln/>
+        </p:spPr>
+        <p:txBody>
+          <a:bodyPr wrap="square" lIns="0" tIns="0" rIns="0" bIns="0" rtlCol="0" anchor="t"/>
+          <a:lstStyle/>
+          <a:p>
+            <a:pPr indent="0" marL="0">
+              <a:buNone/>
+            </a:pPr>
+            <a:r>
+              <a:rPr lang="en-US" sz="900" dirty="0">
+                <a:solidFill>
+                  <a:srgbClr val="6B7280"/>
+                </a:solidFill>
+                <a:latin typeface="Arial" pitchFamily="34" charset="0"/>
+                <a:ea typeface="Arial" pitchFamily="34" charset="-122"/>
+                <a:cs typeface="Arial" pitchFamily="34" charset="-120"/>
+              </a:rPr>
+              <a:t>Sources: Wei et al. (2022), “Chain-of-Thought Prompting Elicits Reasoning in LLMs”, arXiv:2201.11903; Yao et al. (2022), “ReAct”, arXiv:2210.03629; WatchAgent run, 24 Sep 2026</a:t>
+            </a:r>
+            <a:endParaRPr lang="en-US" sz="900" dirty="0"/>
+          </a:p>
+        </p:txBody>
+      </p:sp>
+      <p:sp>
+        <p:nvSpPr>
+          <p:cNvPr id="5" name="Text 3"/>
+          <p:cNvSpPr txBox="1"/>
+          <p:nvPr/>
+        </p:nvSpPr>
+        <p:spPr>
+          <a:xfrm>
+            <a:off x="11155680" y="6400800"/>
+            <a:ext cx="484632" cy="228600"/>
+          </a:xfrm>
+          <a:prstGeom prst="rect">
+            <a:avLst/>
+          </a:prstGeom>
+          <a:noFill/>
+          <a:ln/>
+        </p:spPr>
+        <p:txBody>
+          <a:bodyPr wrap="square" lIns="0" tIns="0" rIns="0" bIns="0" rtlCol="0" anchor="t"/>
+          <a:lstStyle/>
+          <a:p>
+            <a:pPr algn="r" indent="0" marL="0">
+              <a:buNone/>
+            </a:pPr>
+            <a:r>
+              <a:rPr lang="en-US" sz="900" dirty="0">
+                <a:solidFill>
+                  <a:srgbClr val="6B7280"/>
+                </a:solidFill>
+                <a:latin typeface="Arial" pitchFamily="34" charset="0"/>
+                <a:ea typeface="Arial" pitchFamily="34" charset="-122"/>
+                <a:cs typeface="Arial" pitchFamily="34" charset="-120"/>
+              </a:rPr>
+              <a:t>6</a:t>
+            </a:r>
+            <a:endParaRPr lang="en-US" sz="900" dirty="0"/>
+          </a:p>
+        </p:txBody>
+      </p:sp>
+      <p:sp>
+        <p:nvSpPr>
+          <p:cNvPr id="102" name="Text 0"/>
+          <p:cNvSpPr txBox="1"/>
+          <p:nvPr/>
+        </p:nvSpPr>
+        <p:spPr>
+          <a:xfrm>
+            <a:off x="548640" y="1691640"/>
+            <a:ext cx="4434840" cy="365760"/>
+          </a:xfrm>
+          <a:prstGeom prst="rect">
+            <a:avLst/>
+          </a:prstGeom>
+          <a:noFill/>
+          <a:ln/>
+        </p:spPr>
+        <p:txBody>
+          <a:bodyPr wrap="square" lIns="0" tIns="0" rIns="0" bIns="0" rtlCol="0" anchor="t"/>
+          <a:lstStyle/>
+          <a:p>
+            <a:pPr indent="0" marL="0">
+              <a:buNone/>
+            </a:pPr>
+            <a:r>
+              <a:rPr lang="en-US" sz="1800" b="1" dirty="0">
+                <a:solidFill>
+                  <a:srgbClr val="051C2C"/>
+                </a:solidFill>
+                <a:latin typeface="Georgia" pitchFamily="34" charset="0"/>
+                <a:ea typeface="Georgia" pitchFamily="34" charset="-122"/>
+                <a:cs typeface="Georgia" pitchFamily="34" charset="-120"/>
+              </a:rPr>
+              <a:t>What it is</a:t>
+            </a:r>
+            <a:endParaRPr lang="en-US" sz="1800" dirty="0"/>
+          </a:p>
+        </p:txBody>
+      </p:sp>
+      <p:sp>
+        <p:nvSpPr>
+          <p:cNvPr id="103" name="Text 1"/>
+          <p:cNvSpPr txBox="1"/>
+          <p:nvPr/>
+        </p:nvSpPr>
+        <p:spPr>
+          <a:xfrm>
+            <a:off x="548640" y="2103120"/>
+            <a:ext cx="4434840" cy="1417320"/>
+          </a:xfrm>
+          <a:prstGeom prst="rect">
+            <a:avLst/>
+          </a:prstGeom>
+          <a:noFill/>
+          <a:ln/>
+        </p:spPr>
+        <p:txBody>
+          <a:bodyPr wrap="square" lIns="0" tIns="0" rIns="0" bIns="0" rtlCol="0" anchor="t"/>
+          <a:lstStyle/>
+          <a:p>
+            <a:pPr indent="0" marL="0">
+              <a:buNone/>
+            </a:pPr>
+            <a:r>
+              <a:rPr lang="en-US" sz="1300" dirty="0">
+                <a:solidFill>
+                  <a:srgbClr val="1F2933"/>
+                </a:solidFill>
+                <a:latin typeface="Arial" pitchFamily="34" charset="0"/>
+                <a:ea typeface="Arial" pitchFamily="34" charset="-122"/>
+                <a:cs typeface="Arial" pitchFamily="34" charset="-120"/>
+              </a:rPr>
+              <a:t>Instead of jumping to an answer, the model works through a problem one step at a time, like showing your working in a maths exam. Research shows this makes models much better at multi-step problems.</a:t>
+            </a:r>
+            <a:endParaRPr lang="en-US" sz="1300" dirty="0"/>
+          </a:p>
+        </p:txBody>
+      </p:sp>
+      <p:sp>
+        <p:nvSpPr>
+          <p:cNvPr id="104" name="Text 2"/>
+          <p:cNvSpPr txBox="1"/>
+          <p:nvPr/>
+        </p:nvSpPr>
+        <p:spPr>
+          <a:xfrm>
+            <a:off x="548640" y="3657600"/>
+            <a:ext cx="4434840" cy="365760"/>
+          </a:xfrm>
+          <a:prstGeom prst="rect">
+            <a:avLst/>
+          </a:prstGeom>
+          <a:noFill/>
+          <a:ln/>
+        </p:spPr>
+        <p:txBody>
+          <a:bodyPr wrap="square" lIns="0" tIns="0" rIns="0" bIns="0" rtlCol="0" anchor="t"/>
+          <a:lstStyle/>
+          <a:p>
+            <a:pPr indent="0" marL="0">
+              <a:buNone/>
+            </a:pPr>
+            <a:r>
+              <a:rPr lang="en-US" sz="1800" b="1" dirty="0">
+                <a:solidFill>
+                  <a:srgbClr val="051C2C"/>
+                </a:solidFill>
+                <a:latin typeface="Georgia" pitchFamily="34" charset="0"/>
+                <a:ea typeface="Georgia" pitchFamily="34" charset="-122"/>
+                <a:cs typeface="Georgia" pitchFamily="34" charset="-120"/>
+              </a:rPr>
+              <a:t>Thinking plus doing</a:t>
+            </a:r>
+            <a:endParaRPr lang="en-US" sz="1800" dirty="0"/>
+          </a:p>
+        </p:txBody>
+      </p:sp>
+      <p:sp>
+        <p:nvSpPr>
+          <p:cNvPr id="105" name="Text 3"/>
+          <p:cNvSpPr txBox="1"/>
+          <p:nvPr/>
+        </p:nvSpPr>
+        <p:spPr>
+          <a:xfrm>
+            <a:off x="548640" y="4069080"/>
+            <a:ext cx="4434840" cy="1188720"/>
+          </a:xfrm>
+          <a:prstGeom prst="rect">
+            <a:avLst/>
+          </a:prstGeom>
+          <a:noFill/>
+          <a:ln/>
+        </p:spPr>
+        <p:txBody>
+          <a:bodyPr wrap="square" lIns="0" tIns="0" rIns="0" bIns="0" rtlCol="0" anchor="t"/>
+          <a:lstStyle/>
+          <a:p>
+            <a:pPr indent="0" marL="0">
+              <a:buNone/>
+            </a:pPr>
+            <a:r>
+              <a:rPr lang="en-US" sz="1300" dirty="0">
+                <a:solidFill>
+                  <a:srgbClr val="1F2933"/>
+                </a:solidFill>
+                <a:latin typeface="Arial" pitchFamily="34" charset="0"/>
+                <a:ea typeface="Arial" pitchFamily="34" charset="-122"/>
+                <a:cs typeface="Arial" pitchFamily="34" charset="-120"/>
+              </a:rPr>
+              <a:t>Agents mix those steps with actions: try something, look at the result, adjust the plan. Each result is real information, not a guess.</a:t>
+            </a:r>
+            <a:endParaRPr lang="en-US" sz="1300" dirty="0"/>
+          </a:p>
+        </p:txBody>
+      </p:sp>
+      <p:sp>
+        <p:nvSpPr>
+          <p:cNvPr id="106" name="Shape 4"/>
+          <p:cNvSpPr/>
+          <p:nvPr/>
+        </p:nvSpPr>
+        <p:spPr>
+          <a:xfrm>
+            <a:off x="548640" y="5440680"/>
+            <a:ext cx="4434840" cy="685800"/>
+          </a:xfrm>
+          <a:prstGeom prst="rect">
+            <a:avLst/>
+          </a:prstGeom>
+          <a:solidFill>
+            <a:srgbClr val="DDE6FA"/>
+          </a:solidFill>
+          <a:ln w="12700">
+            <a:solidFill>
+              <a:srgbClr val="DDE6FA"/>
+            </a:solidFill>
+            <a:prstDash val="solid"/>
+          </a:ln>
+        </p:spPr>
+      </p:sp>
+      <p:sp>
+        <p:nvSpPr>
+          <p:cNvPr id="107" name="Text 5"/>
+          <p:cNvSpPr txBox="1"/>
+          <p:nvPr/>
+        </p:nvSpPr>
+        <p:spPr>
+          <a:xfrm>
+            <a:off x="731520" y="5486400"/>
+            <a:ext cx="4069080" cy="594360"/>
+          </a:xfrm>
+          <a:prstGeom prst="rect">
+            <a:avLst/>
+          </a:prstGeom>
+          <a:noFill/>
+          <a:ln/>
+        </p:spPr>
+        <p:txBody>
+          <a:bodyPr wrap="square" lIns="0" tIns="0" rIns="0" bIns="0" rtlCol="0" anchor="ctr"/>
+          <a:lstStyle/>
+          <a:p>
+            <a:pPr indent="0" marL="0">
+              <a:buNone/>
+            </a:pPr>
+            <a:r>
+              <a:rPr lang="en-US" sz="1300" b="1" dirty="0">
+                <a:solidFill>
+                  <a:srgbClr val="051C2C"/>
+                </a:solidFill>
+                <a:latin typeface="Arial" pitchFamily="34" charset="0"/>
+                <a:ea typeface="Arial" pitchFamily="34" charset="-122"/>
+                <a:cs typeface="Arial" pitchFamily="34" charset="-120"/>
+              </a:rPr>
+              <a:t>The model decides what to try next; plain code decides what counts as a price.</a:t>
+            </a:r>
+            <a:endParaRPr lang="en-US" sz="1300" dirty="0"/>
+          </a:p>
+        </p:txBody>
+      </p:sp>
+      <p:sp>
+        <p:nvSpPr>
+          <p:cNvPr id="108" name="Shape 6"/>
+          <p:cNvSpPr/>
+          <p:nvPr/>
+        </p:nvSpPr>
+        <p:spPr>
+          <a:xfrm>
+            <a:off x="5257800" y="1691640"/>
+            <a:ext cx="6382512" cy="4434840"/>
+          </a:xfrm>
+          <a:prstGeom prst="rect">
+            <a:avLst/>
+          </a:prstGeom>
+          <a:solidFill>
+            <a:srgbClr val="F2F4F7"/>
+          </a:solidFill>
+          <a:ln w="12700">
+            <a:solidFill>
+              <a:srgbClr val="F2F4F7"/>
+            </a:solidFill>
+            <a:prstDash val="solid"/>
+          </a:ln>
+        </p:spPr>
+      </p:sp>
+      <p:sp>
+        <p:nvSpPr>
+          <p:cNvPr id="109" name="Text 7"/>
+          <p:cNvSpPr txBox="1"/>
+          <p:nvPr/>
+        </p:nvSpPr>
+        <p:spPr>
+          <a:xfrm>
+            <a:off x="5532120" y="1874520"/>
+            <a:ext cx="5852160" cy="320040"/>
+          </a:xfrm>
+          <a:prstGeom prst="rect">
+            <a:avLst/>
+          </a:prstGeom>
+          <a:noFill/>
+          <a:ln/>
+        </p:spPr>
+        <p:txBody>
+          <a:bodyPr wrap="square" lIns="0" tIns="0" rIns="0" bIns="0" rtlCol="0" anchor="t"/>
+          <a:lstStyle/>
+          <a:p>
+            <a:pPr indent="0" marL="0">
+              <a:buNone/>
+            </a:pPr>
+            <a:r>
+              <a:rPr lang="en-US" sz="1600" b="1" dirty="0">
+                <a:solidFill>
+                  <a:srgbClr val="051C2C"/>
+                </a:solidFill>
+                <a:latin typeface="Georgia" pitchFamily="34" charset="0"/>
+                <a:ea typeface="Georgia" pitchFamily="34" charset="-122"/>
+                <a:cs typeface="Georgia" pitchFamily="34" charset="-120"/>
+              </a:rPr>
+              <a:t>A real WatchAgent run, step by step</a:t>
+            </a:r>
+            <a:endParaRPr lang="en-US" sz="1600" dirty="0"/>
+          </a:p>
+        </p:txBody>
+      </p:sp>
+      <p:sp>
+        <p:nvSpPr>
+          <p:cNvPr id="110" name="Text 8"/>
+          <p:cNvSpPr txBox="1"/>
+          <p:nvPr/>
+        </p:nvSpPr>
+        <p:spPr>
+          <a:xfrm>
+            <a:off x="5532120" y="2212848"/>
+            <a:ext cx="5852160" cy="228600"/>
+          </a:xfrm>
+          <a:prstGeom prst="rect">
+            <a:avLst/>
+          </a:prstGeom>
+          <a:noFill/>
+          <a:ln/>
+        </p:spPr>
+        <p:txBody>
+          <a:bodyPr wrap="square" lIns="0" tIns="0" rIns="0" bIns="0" rtlCol="0" anchor="t"/>
+          <a:lstStyle/>
+          <a:p>
+            <a:pPr indent="0" marL="0">
+              <a:buNone/>
+            </a:pPr>
+            <a:r>
+              <a:rPr lang="en-US" sz="1100" dirty="0">
+                <a:solidFill>
+                  <a:srgbClr val="6B7280"/>
+                </a:solidFill>
+                <a:latin typeface="Arial" pitchFamily="34" charset="0"/>
+                <a:ea typeface="Arial" pitchFamily="34" charset="-122"/>
+                <a:cs typeface="Arial" pitchFamily="34" charset="-120"/>
+              </a:rPr>
+              <a:t>Omega Speedmaster, 24 September 2026</a:t>
+            </a:r>
+            <a:endParaRPr lang="en-US" sz="1100" dirty="0"/>
+          </a:p>
+        </p:txBody>
+      </p:sp>
+      <p:sp>
+        <p:nvSpPr>
+          <p:cNvPr id="111" name="Shape 9"/>
+          <p:cNvSpPr/>
+          <p:nvPr/>
+        </p:nvSpPr>
+        <p:spPr>
+          <a:xfrm>
+            <a:off x="5532120" y="2606040"/>
+            <a:ext cx="384048" cy="384048"/>
+          </a:xfrm>
+          <a:prstGeom prst="ellipse">
+            <a:avLst/>
+          </a:prstGeom>
+          <a:solidFill>
+            <a:srgbClr val="2251FF"/>
+          </a:solidFill>
+          <a:ln w="12700">
+            <a:solidFill>
+              <a:srgbClr val="2251FF"/>
+            </a:solidFill>
+            <a:prstDash val="solid"/>
+          </a:ln>
+        </p:spPr>
+      </p:sp>
+      <p:sp>
+        <p:nvSpPr>
+          <p:cNvPr id="112" name="Text 10"/>
+          <p:cNvSpPr txBox="1"/>
+          <p:nvPr/>
+        </p:nvSpPr>
+        <p:spPr>
+          <a:xfrm>
+            <a:off x="5532120" y="2606040"/>
+            <a:ext cx="384048" cy="384048"/>
+          </a:xfrm>
+          <a:prstGeom prst="rect">
+            <a:avLst/>
+          </a:prstGeom>
+          <a:noFill/>
+          <a:ln/>
+        </p:spPr>
+        <p:txBody>
+          <a:bodyPr wrap="square" lIns="0" tIns="0" rIns="0" bIns="0" rtlCol="0" anchor="ctr"/>
+          <a:lstStyle/>
+          <a:p>
+            <a:pPr algn="ctr" indent="0" marL="0">
+              <a:buNone/>
+            </a:pPr>
+            <a:r>
+              <a:rPr lang="en-US" sz="1300" b="1" dirty="0">
+                <a:solidFill>
+                  <a:srgbClr val="FFFFFF"/>
+                </a:solidFill>
+                <a:latin typeface="Arial" pitchFamily="34" charset="0"/>
+                <a:ea typeface="Arial" pitchFamily="34" charset="-122"/>
+                <a:cs typeface="Arial" pitchFamily="34" charset="-120"/>
+              </a:rPr>
+              <a:t>1</a:t>
+            </a:r>
+            <a:endParaRPr lang="en-US" sz="1300" dirty="0"/>
+          </a:p>
+        </p:txBody>
+      </p:sp>
+      <p:sp>
+        <p:nvSpPr>
+          <p:cNvPr id="113" name="Text 11"/>
+          <p:cNvSpPr txBox="1"/>
+          <p:nvPr/>
+        </p:nvSpPr>
+        <p:spPr>
+          <a:xfrm>
+            <a:off x="6080760" y="2587752"/>
+            <a:ext cx="5303520" cy="256032"/>
+          </a:xfrm>
+          <a:prstGeom prst="rect">
+            <a:avLst/>
+          </a:prstGeom>
+          <a:noFill/>
+          <a:ln/>
+        </p:spPr>
+        <p:txBody>
+          <a:bodyPr wrap="square" lIns="0" tIns="0" rIns="0" bIns="0" rtlCol="0" anchor="t"/>
+          <a:lstStyle/>
+          <a:p>
+            <a:pPr indent="0" marL="0">
+              <a:buNone/>
+            </a:pPr>
+            <a:r>
+              <a:rPr lang="en-US" sz="1300" b="1" dirty="0">
+                <a:solidFill>
+                  <a:srgbClr val="051C2C"/>
+                </a:solidFill>
+                <a:latin typeface="Arial" pitchFamily="34" charset="0"/>
+                <a:ea typeface="Arial" pitchFamily="34" charset="-122"/>
+                <a:cs typeface="Arial" pitchFamily="34" charset="-120"/>
+              </a:rPr>
+              <a:t>Search</a:t>
+            </a:r>
+            <a:endParaRPr lang="en-US" sz="1300" dirty="0"/>
+          </a:p>
+        </p:txBody>
+      </p:sp>
+      <p:sp>
+        <p:nvSpPr>
+          <p:cNvPr id="114" name="Text 12"/>
+          <p:cNvSpPr txBox="1"/>
+          <p:nvPr/>
+        </p:nvSpPr>
+        <p:spPr>
+          <a:xfrm>
+            <a:off x="6080760" y="2852928"/>
+            <a:ext cx="5303520" cy="384048"/>
+          </a:xfrm>
+          <a:prstGeom prst="rect">
+            <a:avLst/>
+          </a:prstGeom>
+          <a:noFill/>
+          <a:ln/>
+        </p:spPr>
+        <p:txBody>
+          <a:bodyPr wrap="square" lIns="0" tIns="0" rIns="0" bIns="0" rtlCol="0" anchor="t"/>
+          <a:lstStyle/>
+          <a:p>
+            <a:pPr indent="0" marL="0">
+              <a:buNone/>
+            </a:pPr>
+            <a:r>
+              <a:rPr lang="en-US" sz="1200" dirty="0">
+                <a:solidFill>
+                  <a:srgbClr val="1F2933"/>
+                </a:solidFill>
+                <a:latin typeface="Arial" pitchFamily="34" charset="0"/>
+                <a:ea typeface="Arial" pitchFamily="34" charset="-122"/>
+                <a:cs typeface="Arial" pitchFamily="34" charset="-120"/>
+              </a:rPr>
+              <a:t>Looks up the watch on Chrono24</a:t>
+            </a:r>
+            <a:endParaRPr lang="en-US" sz="1200" dirty="0"/>
+          </a:p>
+        </p:txBody>
+      </p:sp>
+      <p:sp>
+        <p:nvSpPr>
+          <p:cNvPr id="115" name="Shape 13"/>
+          <p:cNvSpPr/>
+          <p:nvPr/>
+        </p:nvSpPr>
+        <p:spPr>
+          <a:xfrm>
+            <a:off x="5532120" y="3282696"/>
+            <a:ext cx="384048" cy="384048"/>
+          </a:xfrm>
+          <a:prstGeom prst="ellipse">
+            <a:avLst/>
+          </a:prstGeom>
+          <a:solidFill>
+            <a:srgbClr val="2251FF"/>
+          </a:solidFill>
+          <a:ln w="12700">
+            <a:solidFill>
+              <a:srgbClr val="2251FF"/>
+            </a:solidFill>
+            <a:prstDash val="solid"/>
+          </a:ln>
+        </p:spPr>
+      </p:sp>
+      <p:sp>
+        <p:nvSpPr>
+          <p:cNvPr id="116" name="Text 14"/>
+          <p:cNvSpPr txBox="1"/>
+          <p:nvPr/>
+        </p:nvSpPr>
+        <p:spPr>
+          <a:xfrm>
+            <a:off x="5532120" y="3282696"/>
+            <a:ext cx="384048" cy="384048"/>
+          </a:xfrm>
+          <a:prstGeom prst="rect">
+            <a:avLst/>
+          </a:prstGeom>
+          <a:noFill/>
+          <a:ln/>
+        </p:spPr>
+        <p:txBody>
+          <a:bodyPr wrap="square" lIns="0" tIns="0" rIns="0" bIns="0" rtlCol="0" anchor="ctr"/>
+          <a:lstStyle/>
+          <a:p>
+            <a:pPr algn="ctr" indent="0" marL="0">
+              <a:buNone/>
+            </a:pPr>
+            <a:r>
+              <a:rPr lang="en-US" sz="1300" b="1" dirty="0">
+                <a:solidFill>
+                  <a:srgbClr val="FFFFFF"/>
+                </a:solidFill>
+                <a:latin typeface="Arial" pitchFamily="34" charset="0"/>
+                <a:ea typeface="Arial" pitchFamily="34" charset="-122"/>
+                <a:cs typeface="Arial" pitchFamily="34" charset="-120"/>
+              </a:rPr>
+              <a:t>2</a:t>
+            </a:r>
+            <a:endParaRPr lang="en-US" sz="1300" dirty="0"/>
+          </a:p>
+        </p:txBody>
+      </p:sp>
+      <p:sp>
+        <p:nvSpPr>
+          <p:cNvPr id="117" name="Text 15"/>
+          <p:cNvSpPr txBox="1"/>
+          <p:nvPr/>
+        </p:nvSpPr>
+        <p:spPr>
+          <a:xfrm>
+            <a:off x="6080760" y="3264408"/>
+            <a:ext cx="5303520" cy="256032"/>
+          </a:xfrm>
+          <a:prstGeom prst="rect">
+            <a:avLst/>
+          </a:prstGeom>
+          <a:noFill/>
+          <a:ln/>
+        </p:spPr>
+        <p:txBody>
+          <a:bodyPr wrap="square" lIns="0" tIns="0" rIns="0" bIns="0" rtlCol="0" anchor="t"/>
+          <a:lstStyle/>
+          <a:p>
+            <a:pPr indent="0" marL="0">
+              <a:buNone/>
+            </a:pPr>
+            <a:r>
+              <a:rPr lang="en-US" sz="1300" b="1" dirty="0">
+                <a:solidFill>
+                  <a:srgbClr val="051C2C"/>
+                </a:solidFill>
+                <a:latin typeface="Arial" pitchFamily="34" charset="0"/>
+                <a:ea typeface="Arial" pitchFamily="34" charset="-122"/>
+                <a:cs typeface="Arial" pitchFamily="34" charset="-120"/>
+              </a:rPr>
+              <a:t>Hand in</a:t>
+            </a:r>
+            <a:endParaRPr lang="en-US" sz="1300" dirty="0"/>
+          </a:p>
+        </p:txBody>
+      </p:sp>
+      <p:sp>
+        <p:nvSpPr>
+          <p:cNvPr id="118" name="Text 16"/>
+          <p:cNvSpPr txBox="1"/>
+          <p:nvPr/>
+        </p:nvSpPr>
+        <p:spPr>
+          <a:xfrm>
+            <a:off x="6080760" y="3529584"/>
+            <a:ext cx="5303520" cy="384048"/>
+          </a:xfrm>
+          <a:prstGeom prst="rect">
+            <a:avLst/>
+          </a:prstGeom>
+          <a:noFill/>
+          <a:ln/>
+        </p:spPr>
+        <p:txBody>
+          <a:bodyPr wrap="square" lIns="0" tIns="0" rIns="0" bIns="0" rtlCol="0" anchor="t"/>
+          <a:lstStyle/>
+          <a:p>
+            <a:pPr indent="0" marL="0">
+              <a:buNone/>
+            </a:pPr>
+            <a:r>
+              <a:rPr lang="en-US" sz="1200" dirty="0">
+                <a:solidFill>
+                  <a:srgbClr val="1F2933"/>
+                </a:solidFill>
+                <a:latin typeface="Arial" pitchFamily="34" charset="0"/>
+                <a:ea typeface="Arial" pitchFamily="34" charset="-122"/>
+                <a:cs typeface="Arial" pitchFamily="34" charset="-120"/>
+              </a:rPr>
+              <a:t>Offers 3 listings; 2 rejected: quoted text not on the page</a:t>
+            </a:r>
+            <a:endParaRPr lang="en-US" sz="1200" dirty="0"/>
+          </a:p>
+        </p:txBody>
+      </p:sp>
+      <p:sp>
+        <p:nvSpPr>
+          <p:cNvPr id="119" name="Shape 17"/>
+          <p:cNvSpPr/>
+          <p:nvPr/>
+        </p:nvSpPr>
+        <p:spPr>
+          <a:xfrm>
+            <a:off x="5532120" y="3959352"/>
+            <a:ext cx="384048" cy="384048"/>
+          </a:xfrm>
+          <a:prstGeom prst="ellipse">
+            <a:avLst/>
+          </a:prstGeom>
+          <a:solidFill>
+            <a:srgbClr val="2251FF"/>
+          </a:solidFill>
+          <a:ln w="12700">
+            <a:solidFill>
+              <a:srgbClr val="2251FF"/>
+            </a:solidFill>
+            <a:prstDash val="solid"/>
+          </a:ln>
+        </p:spPr>
+      </p:sp>
+      <p:sp>
+        <p:nvSpPr>
+          <p:cNvPr id="120" name="Text 18"/>
+          <p:cNvSpPr txBox="1"/>
+          <p:nvPr/>
+        </p:nvSpPr>
+        <p:spPr>
+          <a:xfrm>
+            <a:off x="5532120" y="3959352"/>
+            <a:ext cx="384048" cy="384048"/>
+          </a:xfrm>
+          <a:prstGeom prst="rect">
+            <a:avLst/>
+          </a:prstGeom>
+          <a:noFill/>
+          <a:ln/>
+        </p:spPr>
+        <p:txBody>
+          <a:bodyPr wrap="square" lIns="0" tIns="0" rIns="0" bIns="0" rtlCol="0" anchor="ctr"/>
+          <a:lstStyle/>
+          <a:p>
+            <a:pPr algn="ctr" indent="0" marL="0">
+              <a:buNone/>
+            </a:pPr>
+            <a:r>
+              <a:rPr lang="en-US" sz="1300" b="1" dirty="0">
+                <a:solidFill>
+                  <a:srgbClr val="FFFFFF"/>
+                </a:solidFill>
+                <a:latin typeface="Arial" pitchFamily="34" charset="0"/>
+                <a:ea typeface="Arial" pitchFamily="34" charset="-122"/>
+                <a:cs typeface="Arial" pitchFamily="34" charset="-120"/>
+              </a:rPr>
+              <a:t>3</a:t>
+            </a:r>
+            <a:endParaRPr lang="en-US" sz="1300" dirty="0"/>
+          </a:p>
+        </p:txBody>
+      </p:sp>
+      <p:sp>
+        <p:nvSpPr>
+          <p:cNvPr id="121" name="Text 19"/>
+          <p:cNvSpPr txBox="1"/>
+          <p:nvPr/>
+        </p:nvSpPr>
+        <p:spPr>
+          <a:xfrm>
+            <a:off x="6080760" y="3941064"/>
+            <a:ext cx="5303520" cy="256032"/>
+          </a:xfrm>
+          <a:prstGeom prst="rect">
+            <a:avLst/>
+          </a:prstGeom>
+          <a:noFill/>
+          <a:ln/>
+        </p:spPr>
+        <p:txBody>
+          <a:bodyPr wrap="square" lIns="0" tIns="0" rIns="0" bIns="0" rtlCol="0" anchor="t"/>
+          <a:lstStyle/>
+          <a:p>
+            <a:pPr indent="0" marL="0">
+              <a:buNone/>
+            </a:pPr>
+            <a:r>
+              <a:rPr lang="en-US" sz="1300" b="1" dirty="0">
+                <a:solidFill>
+                  <a:srgbClr val="051C2C"/>
+                </a:solidFill>
+                <a:latin typeface="Arial" pitchFamily="34" charset="0"/>
+                <a:ea typeface="Arial" pitchFamily="34" charset="-122"/>
+                <a:cs typeface="Arial" pitchFamily="34" charset="-120"/>
+              </a:rPr>
+              <a:t>Adjust</a:t>
+            </a:r>
+            <a:endParaRPr lang="en-US" sz="1300" dirty="0"/>
+          </a:p>
+        </p:txBody>
+      </p:sp>
+      <p:sp>
+        <p:nvSpPr>
+          <p:cNvPr id="122" name="Text 20"/>
+          <p:cNvSpPr txBox="1"/>
+          <p:nvPr/>
+        </p:nvSpPr>
+        <p:spPr>
+          <a:xfrm>
+            <a:off x="6080760" y="4206240"/>
+            <a:ext cx="5303520" cy="384048"/>
+          </a:xfrm>
+          <a:prstGeom prst="rect">
+            <a:avLst/>
+          </a:prstGeom>
+          <a:noFill/>
+          <a:ln/>
+        </p:spPr>
+        <p:txBody>
+          <a:bodyPr wrap="square" lIns="0" tIns="0" rIns="0" bIns="0" rtlCol="0" anchor="t"/>
+          <a:lstStyle/>
+          <a:p>
+            <a:pPr indent="0" marL="0">
+              <a:buNone/>
+            </a:pPr>
+            <a:r>
+              <a:rPr lang="en-US" sz="1200" dirty="0">
+                <a:solidFill>
+                  <a:srgbClr val="1F2933"/>
+                </a:solidFill>
+                <a:latin typeface="Arial" pitchFamily="34" charset="0"/>
+                <a:ea typeface="Arial" pitchFamily="34" charset="-122"/>
+                <a:cs typeface="Arial" pitchFamily="34" charset="-120"/>
+              </a:rPr>
+              <a:t>Searches again using the exact reference number</a:t>
+            </a:r>
+            <a:endParaRPr lang="en-US" sz="1200" dirty="0"/>
+          </a:p>
+        </p:txBody>
+      </p:sp>
+      <p:sp>
+        <p:nvSpPr>
+          <p:cNvPr id="123" name="Shape 21"/>
+          <p:cNvSpPr/>
+          <p:nvPr/>
+        </p:nvSpPr>
+        <p:spPr>
+          <a:xfrm>
+            <a:off x="5532120" y="4636008"/>
+            <a:ext cx="384048" cy="384048"/>
+          </a:xfrm>
+          <a:prstGeom prst="ellipse">
+            <a:avLst/>
+          </a:prstGeom>
+          <a:solidFill>
+            <a:srgbClr val="2251FF"/>
+          </a:solidFill>
+          <a:ln w="12700">
+            <a:solidFill>
+              <a:srgbClr val="2251FF"/>
+            </a:solidFill>
+            <a:prstDash val="solid"/>
+          </a:ln>
+        </p:spPr>
+      </p:sp>
+      <p:sp>
+        <p:nvSpPr>
+          <p:cNvPr id="124" name="Text 22"/>
+          <p:cNvSpPr txBox="1"/>
+          <p:nvPr/>
+        </p:nvSpPr>
+        <p:spPr>
+          <a:xfrm>
+            <a:off x="5532120" y="4636008"/>
+            <a:ext cx="384048" cy="384048"/>
+          </a:xfrm>
+          <a:prstGeom prst="rect">
+            <a:avLst/>
+          </a:prstGeom>
+          <a:noFill/>
+          <a:ln/>
+        </p:spPr>
+        <p:txBody>
+          <a:bodyPr wrap="square" lIns="0" tIns="0" rIns="0" bIns="0" rtlCol="0" anchor="ctr"/>
+          <a:lstStyle/>
+          <a:p>
+            <a:pPr algn="ctr" indent="0" marL="0">
+              <a:buNone/>
+            </a:pPr>
+            <a:r>
+              <a:rPr lang="en-US" sz="1300" b="1" dirty="0">
+                <a:solidFill>
+                  <a:srgbClr val="FFFFFF"/>
+                </a:solidFill>
+                <a:latin typeface="Arial" pitchFamily="34" charset="0"/>
+                <a:ea typeface="Arial" pitchFamily="34" charset="-122"/>
+                <a:cs typeface="Arial" pitchFamily="34" charset="-120"/>
+              </a:rPr>
+              <a:t>4</a:t>
+            </a:r>
+            <a:endParaRPr lang="en-US" sz="1300" dirty="0"/>
+          </a:p>
+        </p:txBody>
+      </p:sp>
+      <p:sp>
+        <p:nvSpPr>
+          <p:cNvPr id="125" name="Text 23"/>
+          <p:cNvSpPr txBox="1"/>
+          <p:nvPr/>
+        </p:nvSpPr>
+        <p:spPr>
+          <a:xfrm>
+            <a:off x="6080760" y="4617720"/>
+            <a:ext cx="5303520" cy="256032"/>
+          </a:xfrm>
+          <a:prstGeom prst="rect">
+            <a:avLst/>
+          </a:prstGeom>
+          <a:noFill/>
+          <a:ln/>
+        </p:spPr>
+        <p:txBody>
+          <a:bodyPr wrap="square" lIns="0" tIns="0" rIns="0" bIns="0" rtlCol="0" anchor="t"/>
+          <a:lstStyle/>
+          <a:p>
+            <a:pPr indent="0" marL="0">
+              <a:buNone/>
+            </a:pPr>
+            <a:r>
+              <a:rPr lang="en-US" sz="1300" b="1" dirty="0">
+                <a:solidFill>
+                  <a:srgbClr val="051C2C"/>
+                </a:solidFill>
+                <a:latin typeface="Arial" pitchFamily="34" charset="0"/>
+                <a:ea typeface="Arial" pitchFamily="34" charset="-122"/>
+                <a:cs typeface="Arial" pitchFamily="34" charset="-120"/>
+              </a:rPr>
+              <a:t>Hand in</a:t>
+            </a:r>
+            <a:endParaRPr lang="en-US" sz="1300" dirty="0"/>
+          </a:p>
+        </p:txBody>
+      </p:sp>
+      <p:sp>
+        <p:nvSpPr>
+          <p:cNvPr id="126" name="Text 24"/>
+          <p:cNvSpPr txBox="1"/>
+          <p:nvPr/>
+        </p:nvSpPr>
+        <p:spPr>
+          <a:xfrm>
+            <a:off x="6080760" y="4882896"/>
+            <a:ext cx="5303520" cy="384048"/>
+          </a:xfrm>
+          <a:prstGeom prst="rect">
+            <a:avLst/>
+          </a:prstGeom>
+          <a:noFill/>
+          <a:ln/>
+        </p:spPr>
+        <p:txBody>
+          <a:bodyPr wrap="square" lIns="0" tIns="0" rIns="0" bIns="0" rtlCol="0" anchor="t"/>
+          <a:lstStyle/>
+          <a:p>
+            <a:pPr indent="0" marL="0">
+              <a:buNone/>
+            </a:pPr>
+            <a:r>
+              <a:rPr lang="en-US" sz="1200" dirty="0">
+                <a:solidFill>
+                  <a:srgbClr val="1F2933"/>
+                </a:solidFill>
+                <a:latin typeface="Arial" pitchFamily="34" charset="0"/>
+                <a:ea typeface="Arial" pitchFamily="34" charset="-122"/>
+                <a:cs typeface="Arial" pitchFamily="34" charset="-120"/>
+              </a:rPr>
+              <a:t>3 listings accepted; the middle price, $6,740, is recorded</a:t>
+            </a:r>
+            <a:endParaRPr lang="en-US" sz="1200" dirty="0"/>
+          </a:p>
+        </p:txBody>
+      </p:sp>
+      <p:sp>
+        <p:nvSpPr>
+          <p:cNvPr id="127" name="Shape 25"/>
+          <p:cNvSpPr/>
+          <p:nvPr/>
+        </p:nvSpPr>
+        <p:spPr>
+          <a:xfrm>
+            <a:off x="5532120" y="5312664"/>
+            <a:ext cx="384048" cy="384048"/>
+          </a:xfrm>
+          <a:prstGeom prst="ellipse">
+            <a:avLst/>
+          </a:prstGeom>
+          <a:solidFill>
+            <a:srgbClr val="2251FF"/>
+          </a:solidFill>
+          <a:ln w="12700">
+            <a:solidFill>
+              <a:srgbClr val="2251FF"/>
+            </a:solidFill>
+            <a:prstDash val="solid"/>
+          </a:ln>
+        </p:spPr>
+      </p:sp>
+      <p:sp>
+        <p:nvSpPr>
+          <p:cNvPr id="128" name="Text 26"/>
+          <p:cNvSpPr txBox="1"/>
+          <p:nvPr/>
+        </p:nvSpPr>
+        <p:spPr>
+          <a:xfrm>
+            <a:off x="5532120" y="5312664"/>
+            <a:ext cx="384048" cy="384048"/>
+          </a:xfrm>
+          <a:prstGeom prst="rect">
+            <a:avLst/>
+          </a:prstGeom>
+          <a:noFill/>
+          <a:ln/>
+        </p:spPr>
+        <p:txBody>
+          <a:bodyPr wrap="square" lIns="0" tIns="0" rIns="0" bIns="0" rtlCol="0" anchor="ctr"/>
+          <a:lstStyle/>
+          <a:p>
+            <a:pPr algn="ctr" indent="0" marL="0">
+              <a:buNone/>
+            </a:pPr>
+            <a:r>
+              <a:rPr lang="en-US" sz="1300" b="1" dirty="0">
+                <a:solidFill>
+                  <a:srgbClr val="FFFFFF"/>
+                </a:solidFill>
+                <a:latin typeface="Arial" pitchFamily="34" charset="0"/>
+                <a:ea typeface="Arial" pitchFamily="34" charset="-122"/>
+                <a:cs typeface="Arial" pitchFamily="34" charset="-120"/>
+              </a:rPr>
+              <a:t>5</a:t>
+            </a:r>
+            <a:endParaRPr lang="en-US" sz="1300" dirty="0"/>
+          </a:p>
+        </p:txBody>
+      </p:sp>
+      <p:sp>
+        <p:nvSpPr>
+          <p:cNvPr id="129" name="Text 27"/>
+          <p:cNvSpPr txBox="1"/>
+          <p:nvPr/>
+        </p:nvSpPr>
+        <p:spPr>
+          <a:xfrm>
+            <a:off x="6080760" y="5294376"/>
+            <a:ext cx="5303520" cy="256032"/>
+          </a:xfrm>
+          <a:prstGeom prst="rect">
+            <a:avLst/>
+          </a:prstGeom>
+          <a:noFill/>
+          <a:ln/>
+        </p:spPr>
+        <p:txBody>
+          <a:bodyPr wrap="square" lIns="0" tIns="0" rIns="0" bIns="0" rtlCol="0" anchor="t"/>
+          <a:lstStyle/>
+          <a:p>
+            <a:pPr indent="0" marL="0">
+              <a:buNone/>
+            </a:pPr>
+            <a:r>
+              <a:rPr lang="en-US" sz="1300" b="1" dirty="0">
+                <a:solidFill>
+                  <a:srgbClr val="051C2C"/>
+                </a:solidFill>
+                <a:latin typeface="Arial" pitchFamily="34" charset="0"/>
+                <a:ea typeface="Arial" pitchFamily="34" charset="-122"/>
+                <a:cs typeface="Arial" pitchFamily="34" charset="-120"/>
+              </a:rPr>
+              <a:t>Remember</a:t>
+            </a:r>
+            <a:endParaRPr lang="en-US" sz="1300" dirty="0"/>
+          </a:p>
+        </p:txBody>
+      </p:sp>
+      <p:sp>
+        <p:nvSpPr>
+          <p:cNvPr id="130" name="Text 28"/>
+          <p:cNvSpPr txBox="1"/>
+          <p:nvPr/>
+        </p:nvSpPr>
+        <p:spPr>
+          <a:xfrm>
+            <a:off x="6080760" y="5559552"/>
+            <a:ext cx="5303520" cy="384048"/>
+          </a:xfrm>
+          <a:prstGeom prst="rect">
+            <a:avLst/>
+          </a:prstGeom>
+          <a:noFill/>
+          <a:ln/>
+        </p:spPr>
+        <p:txBody>
+          <a:bodyPr wrap="square" lIns="0" tIns="0" rIns="0" bIns="0" rtlCol="0" anchor="t"/>
+          <a:lstStyle/>
+          <a:p>
+            <a:pPr indent="0" marL="0">
+              <a:buNone/>
+            </a:pPr>
+            <a:r>
+              <a:rPr lang="en-US" sz="1200" dirty="0">
+                <a:solidFill>
+                  <a:srgbClr val="1F2933"/>
+                </a:solidFill>
+                <a:latin typeface="Arial" pitchFamily="34" charset="0"/>
+                <a:ea typeface="Arial" pitchFamily="34" charset="-122"/>
+                <a:cs typeface="Arial" pitchFamily="34" charset="-120"/>
+              </a:rPr>
+              <a:t>Saves a tip for next time. Result: BUY, 3.7% under target</a:t>
+            </a:r>
+            <a:endParaRPr lang="en-US" sz="1200" dirty="0"/>
+          </a:p>
+        </p:txBody>
+      </p:sp>
+    </p:spTree>
+  </p:cSld>
+  <p:clrMapOvr>
+    <a:masterClrMapping/>
+  </p:clrMapOvr>
+</p:sld>
+</file>
+
+<file path=ppt/slides/slide15.xml><?xml version="1.0" encoding="utf-8"?>
+<p:sld xmlns:a="http://schemas.openxmlformats.org/drawingml/2006/main" xmlns:r="http://schemas.openxmlformats.org/officeDocument/2006/relationships" xmlns:p="http://schemas.openxmlformats.org/presentationml/2006/main">
+  <p:cSld name="Slide 4">
+    <p:bg>
+      <p:bgPr>
+        <a:solidFill>
+          <a:srgbClr val="FFFFFF"/>
+        </a:solidFill>
+      </p:bgPr>
+    </p:bg>
+    <p:spTree>
+      <p:nvGrpSpPr>
+        <p:cNvPr id="1" name=""/>
+        <p:cNvGrpSpPr/>
+        <p:nvPr/>
+      </p:nvGrpSpPr>
+      <p:grpSpPr>
+        <a:xfrm>
+          <a:off x="0" y="0"/>
+          <a:ext cx="0" cy="0"/>
+          <a:chOff x="0" y="0"/>
+          <a:chExt cx="0" cy="0"/>
+        </a:xfrm>
+      </p:grpSpPr>
+      <p:sp>
+        <p:nvSpPr>
+          <p:cNvPr id="2" name="Text 0"/>
+          <p:cNvSpPr txBox="1"/>
+          <p:nvPr/>
+        </p:nvSpPr>
+        <p:spPr>
+          <a:xfrm>
+            <a:off x="548640" y="274320"/>
+            <a:ext cx="7315200" cy="228600"/>
+          </a:xfrm>
+          <a:prstGeom prst="rect">
+            <a:avLst/>
+          </a:prstGeom>
+          <a:noFill/>
+          <a:ln/>
+        </p:spPr>
+        <p:txBody>
+          <a:bodyPr wrap="square" lIns="0" tIns="0" rIns="0" bIns="0" rtlCol="0" anchor="t"/>
+          <a:lstStyle/>
+          <a:p>
+            <a:pPr indent="0" marL="0">
+              <a:buNone/>
+            </a:pPr>
+            <a:r>
+              <a:rPr lang="en-US" sz="1000" b="1" spc="200" kern="0" dirty="0">
+                <a:solidFill>
+                  <a:srgbClr val="2251FF"/>
+                </a:solidFill>
+                <a:latin typeface="Arial" pitchFamily="34" charset="0"/>
+                <a:ea typeface="Arial" pitchFamily="34" charset="-122"/>
+                <a:cs typeface="Arial" pitchFamily="34" charset="-120"/>
+              </a:rPr>
+              <a:t>HOW EACH PART WORKS</a:t>
+            </a:r>
+            <a:endParaRPr lang="en-US" sz="1000" dirty="0"/>
+          </a:p>
+        </p:txBody>
+      </p:sp>
+      <p:sp>
+        <p:nvSpPr>
+          <p:cNvPr id="3" name="Text 1"/>
+          <p:cNvSpPr txBox="1"/>
+          <p:nvPr/>
+        </p:nvSpPr>
+        <p:spPr>
+          <a:xfrm>
+            <a:off x="548640" y="594360"/>
+            <a:ext cx="11064240" cy="914400"/>
+          </a:xfrm>
+          <a:prstGeom prst="rect">
+            <a:avLst/>
+          </a:prstGeom>
+          <a:noFill/>
+          <a:ln/>
+        </p:spPr>
+        <p:txBody>
+          <a:bodyPr wrap="square" lIns="0" tIns="0" rIns="0" bIns="0" rtlCol="0" anchor="t"/>
+          <a:lstStyle/>
+          <a:p>
+            <a:pPr indent="0" marL="0">
+              <a:buNone/>
+            </a:pPr>
+            <a:r>
+              <a:rPr lang="en-US" sz="2600" b="1" dirty="0">
+                <a:solidFill>
+                  <a:srgbClr val="051C2C"/>
+                </a:solidFill>
+                <a:latin typeface="Georgia" pitchFamily="34" charset="0"/>
+                <a:ea typeface="Georgia" pitchFamily="34" charset="-122"/>
+                <a:cs typeface="Georgia" pitchFamily="34" charset="-120"/>
+              </a:rPr>
+              <a:t>Five parts make up WatchAgent: three do the work, and two keep that work honest</a:t>
+            </a:r>
+            <a:endParaRPr lang="en-US" sz="2600" dirty="0"/>
+          </a:p>
+        </p:txBody>
+      </p:sp>
+      <p:sp>
+        <p:nvSpPr>
+          <p:cNvPr id="4" name="Text 2"/>
+          <p:cNvSpPr txBox="1"/>
+          <p:nvPr/>
+        </p:nvSpPr>
+        <p:spPr>
+          <a:xfrm>
+            <a:off x="548640" y="6400800"/>
+            <a:ext cx="10058400" cy="228600"/>
+          </a:xfrm>
+          <a:prstGeom prst="rect">
+            <a:avLst/>
+          </a:prstGeom>
+          <a:noFill/>
+          <a:ln/>
+        </p:spPr>
+        <p:txBody>
+          <a:bodyPr wrap="square" lIns="0" tIns="0" rIns="0" bIns="0" rtlCol="0" anchor="t"/>
+          <a:lstStyle/>
+          <a:p>
+            <a:pPr indent="0" marL="0">
+              <a:buNone/>
+            </a:pPr>
+            <a:r>
+              <a:rPr lang="en-US" sz="900" dirty="0">
+                <a:solidFill>
+                  <a:srgbClr val="6B7280"/>
+                </a:solidFill>
+                <a:latin typeface="Arial" pitchFamily="34" charset="0"/>
+                <a:ea typeface="Arial" pitchFamily="34" charset="-122"/>
+                <a:cs typeface="Arial" pitchFamily="34" charset="-120"/>
+              </a:rPr>
+              <a:t>Source: watchagent/cli.py, agent.py, bot.py, tools.py (commit 49bd438); names match the architecture diagram</a:t>
+            </a:r>
+            <a:endParaRPr lang="en-US" sz="900" dirty="0"/>
+          </a:p>
+        </p:txBody>
+      </p:sp>
+      <p:sp>
+        <p:nvSpPr>
+          <p:cNvPr id="5" name="Text 3"/>
+          <p:cNvSpPr txBox="1"/>
+          <p:nvPr/>
+        </p:nvSpPr>
+        <p:spPr>
+          <a:xfrm>
+            <a:off x="11155680" y="6400800"/>
+            <a:ext cx="484632" cy="228600"/>
+          </a:xfrm>
+          <a:prstGeom prst="rect">
+            <a:avLst/>
+          </a:prstGeom>
+          <a:noFill/>
+          <a:ln/>
+        </p:spPr>
+        <p:txBody>
+          <a:bodyPr wrap="square" lIns="0" tIns="0" rIns="0" bIns="0" rtlCol="0" anchor="t"/>
+          <a:lstStyle/>
+          <a:p>
+            <a:pPr algn="r" indent="0" marL="0">
+              <a:buNone/>
+            </a:pPr>
+            <a:r>
+              <a:rPr lang="en-US" sz="900" dirty="0">
+                <a:solidFill>
+                  <a:srgbClr val="6B7280"/>
+                </a:solidFill>
+                <a:latin typeface="Arial" pitchFamily="34" charset="0"/>
+                <a:ea typeface="Arial" pitchFamily="34" charset="-122"/>
+                <a:cs typeface="Arial" pitchFamily="34" charset="-120"/>
+              </a:rPr>
+              <a:t>9</a:t>
+            </a:r>
+            <a:endParaRPr lang="en-US" sz="900" dirty="0"/>
+          </a:p>
+        </p:txBody>
+      </p:sp>
+      <p:sp>
+        <p:nvSpPr>
+          <p:cNvPr id="102" name="Text 0"/>
+          <p:cNvSpPr txBox="1"/>
+          <p:nvPr/>
+        </p:nvSpPr>
+        <p:spPr>
+          <a:xfrm>
+            <a:off x="548640" y="1691640"/>
+            <a:ext cx="5486400" cy="228600"/>
+          </a:xfrm>
+          <a:prstGeom prst="rect">
+            <a:avLst/>
+          </a:prstGeom>
+          <a:noFill/>
+          <a:ln/>
+        </p:spPr>
+        <p:txBody>
+          <a:bodyPr wrap="square" lIns="0" tIns="0" rIns="0" bIns="0" rtlCol="0" anchor="t"/>
+          <a:lstStyle/>
+          <a:p>
+            <a:pPr indent="0" marL="0">
+              <a:buNone/>
+            </a:pPr>
+            <a:r>
+              <a:rPr lang="en-US" sz="1000" b="1" spc="200" kern="0" dirty="0">
+                <a:solidFill>
+                  <a:srgbClr val="6B7280"/>
+                </a:solidFill>
+                <a:latin typeface="Arial" pitchFamily="34" charset="0"/>
+                <a:ea typeface="Arial" pitchFamily="34" charset="-122"/>
+                <a:cs typeface="Arial" pitchFamily="34" charset="-120"/>
+              </a:rPr>
+              <a:t>DOING THE WORK</a:t>
+            </a:r>
+            <a:endParaRPr lang="en-US" sz="1000" dirty="0"/>
+          </a:p>
+        </p:txBody>
+      </p:sp>
+      <p:sp>
+        <p:nvSpPr>
+          <p:cNvPr id="103" name="Shape 1"/>
+          <p:cNvSpPr/>
+          <p:nvPr/>
+        </p:nvSpPr>
+        <p:spPr>
+          <a:xfrm>
+            <a:off x="548640" y="1965960"/>
+            <a:ext cx="3544824" cy="1874520"/>
+          </a:xfrm>
+          <a:prstGeom prst="rect">
+            <a:avLst/>
+          </a:prstGeom>
+          <a:solidFill>
+            <a:srgbClr val="F2F4F7"/>
+          </a:solidFill>
+          <a:ln w="12700">
+            <a:solidFill>
+              <a:srgbClr val="F2F4F7"/>
+            </a:solidFill>
+            <a:prstDash val="solid"/>
+          </a:ln>
+        </p:spPr>
+      </p:sp>
+      <p:sp>
+        <p:nvSpPr>
+          <p:cNvPr id="104" name="Text 2"/>
+          <p:cNvSpPr txBox="1"/>
+          <p:nvPr/>
+        </p:nvSpPr>
+        <p:spPr>
+          <a:xfrm>
+            <a:off x="777240" y="2148840"/>
+            <a:ext cx="3087624" cy="320040"/>
+          </a:xfrm>
+          <a:prstGeom prst="rect">
+            <a:avLst/>
+          </a:prstGeom>
+          <a:noFill/>
+          <a:ln/>
+        </p:spPr>
+        <p:txBody>
+          <a:bodyPr wrap="square" lIns="0" tIns="0" rIns="0" bIns="0" rtlCol="0" anchor="t"/>
+          <a:lstStyle/>
+          <a:p>
+            <a:pPr indent="0" marL="0">
+              <a:buNone/>
+            </a:pPr>
+            <a:r>
+              <a:rPr lang="en-US" sz="1600" b="1" dirty="0">
+                <a:solidFill>
+                  <a:srgbClr val="051C2C"/>
+                </a:solidFill>
+                <a:latin typeface="Georgia" pitchFamily="34" charset="0"/>
+                <a:ea typeface="Georgia" pitchFamily="34" charset="-122"/>
+                <a:cs typeface="Georgia" pitchFamily="34" charset="-120"/>
+              </a:rPr>
+              <a:t>watchagent check</a:t>
+            </a:r>
+            <a:endParaRPr lang="en-US" sz="1600" dirty="0"/>
+          </a:p>
+        </p:txBody>
+      </p:sp>
+      <p:sp>
+        <p:nvSpPr>
+          <p:cNvPr id="105" name="Text 3"/>
+          <p:cNvSpPr txBox="1"/>
+          <p:nvPr/>
+        </p:nvSpPr>
+        <p:spPr>
+          <a:xfrm>
+            <a:off x="777240" y="2496312"/>
+            <a:ext cx="3087624" cy="228600"/>
+          </a:xfrm>
+          <a:prstGeom prst="rect">
+            <a:avLst/>
+          </a:prstGeom>
+          <a:noFill/>
+          <a:ln/>
+        </p:spPr>
+        <p:txBody>
+          <a:bodyPr wrap="square" lIns="0" tIns="0" rIns="0" bIns="0" rtlCol="0" anchor="t"/>
+          <a:lstStyle/>
+          <a:p>
+            <a:pPr indent="0" marL="0">
+              <a:buNone/>
+            </a:pPr>
+            <a:r>
+              <a:rPr lang="en-US" sz="1100" b="1" dirty="0">
+                <a:solidFill>
+                  <a:srgbClr val="2251FF"/>
+                </a:solidFill>
+                <a:latin typeface="Arial" pitchFamily="34" charset="0"/>
+                <a:ea typeface="Arial" pitchFamily="34" charset="-122"/>
+                <a:cs typeface="Arial" pitchFamily="34" charset="-120"/>
+              </a:rPr>
+              <a:t>The scheduler</a:t>
+            </a:r>
+            <a:endParaRPr lang="en-US" sz="1100" dirty="0"/>
+          </a:p>
+        </p:txBody>
+      </p:sp>
+      <p:sp>
+        <p:nvSpPr>
+          <p:cNvPr id="106" name="Text 4"/>
+          <p:cNvSpPr txBox="1"/>
+          <p:nvPr/>
+        </p:nvSpPr>
+        <p:spPr>
+          <a:xfrm>
+            <a:off x="777240" y="2807208"/>
+            <a:ext cx="3087624" cy="896112"/>
+          </a:xfrm>
+          <a:prstGeom prst="rect">
+            <a:avLst/>
+          </a:prstGeom>
+          <a:noFill/>
+          <a:ln/>
+        </p:spPr>
+        <p:txBody>
+          <a:bodyPr wrap="square" lIns="0" tIns="0" rIns="0" bIns="0" rtlCol="0" anchor="t"/>
+          <a:lstStyle/>
+          <a:p>
+            <a:pPr indent="0" marL="0">
+              <a:buNone/>
+            </a:pPr>
+            <a:r>
+              <a:rPr lang="en-US" sz="1200" dirty="0">
+                <a:solidFill>
+                  <a:srgbClr val="1F2933"/>
+                </a:solidFill>
+                <a:latin typeface="Arial" pitchFamily="34" charset="0"/>
+                <a:ea typeface="Arial" pitchFamily="34" charset="-122"/>
+                <a:cs typeface="Arial" pitchFamily="34" charset="-120"/>
+              </a:rPr>
+              <a:t>Every 6 hours, checks the watches not seen for longest, three at a time, and flags good buys on Telegram.</a:t>
+            </a:r>
+            <a:endParaRPr lang="en-US" sz="1200" dirty="0"/>
+          </a:p>
+        </p:txBody>
+      </p:sp>
+      <p:sp>
+        <p:nvSpPr>
+          <p:cNvPr id="107" name="Shape 5"/>
+          <p:cNvSpPr/>
+          <p:nvPr/>
+        </p:nvSpPr>
+        <p:spPr>
+          <a:xfrm>
+            <a:off x="4322064" y="1965960"/>
+            <a:ext cx="3544824" cy="1874520"/>
+          </a:xfrm>
+          <a:prstGeom prst="rect">
+            <a:avLst/>
+          </a:prstGeom>
+          <a:solidFill>
+            <a:srgbClr val="F2F4F7"/>
+          </a:solidFill>
+          <a:ln w="12700">
+            <a:solidFill>
+              <a:srgbClr val="F2F4F7"/>
+            </a:solidFill>
+            <a:prstDash val="solid"/>
+          </a:ln>
+        </p:spPr>
+      </p:sp>
+      <p:sp>
+        <p:nvSpPr>
+          <p:cNvPr id="108" name="Text 6"/>
+          <p:cNvSpPr txBox="1"/>
+          <p:nvPr/>
+        </p:nvSpPr>
+        <p:spPr>
+          <a:xfrm>
+            <a:off x="4550664" y="2148840"/>
+            <a:ext cx="3087624" cy="320040"/>
+          </a:xfrm>
+          <a:prstGeom prst="rect">
+            <a:avLst/>
+          </a:prstGeom>
+          <a:noFill/>
+          <a:ln/>
+        </p:spPr>
+        <p:txBody>
+          <a:bodyPr wrap="square" lIns="0" tIns="0" rIns="0" bIns="0" rtlCol="0" anchor="t"/>
+          <a:lstStyle/>
+          <a:p>
+            <a:pPr indent="0" marL="0">
+              <a:buNone/>
+            </a:pPr>
+            <a:r>
+              <a:rPr lang="en-US" sz="1600" b="1" dirty="0">
+                <a:solidFill>
+                  <a:srgbClr val="051C2C"/>
+                </a:solidFill>
+                <a:latin typeface="Georgia" pitchFamily="34" charset="0"/>
+                <a:ea typeface="Georgia" pitchFamily="34" charset="-122"/>
+                <a:cs typeface="Georgia" pitchFamily="34" charset="-120"/>
+              </a:rPr>
+              <a:t>Research agent</a:t>
+            </a:r>
+            <a:endParaRPr lang="en-US" sz="1600" dirty="0"/>
+          </a:p>
+        </p:txBody>
+      </p:sp>
+      <p:sp>
+        <p:nvSpPr>
+          <p:cNvPr id="109" name="Text 7"/>
+          <p:cNvSpPr txBox="1"/>
+          <p:nvPr/>
+        </p:nvSpPr>
+        <p:spPr>
+          <a:xfrm>
+            <a:off x="4550664" y="2496312"/>
+            <a:ext cx="3087624" cy="228600"/>
+          </a:xfrm>
+          <a:prstGeom prst="rect">
+            <a:avLst/>
+          </a:prstGeom>
+          <a:noFill/>
+          <a:ln/>
+        </p:spPr>
+        <p:txBody>
+          <a:bodyPr wrap="square" lIns="0" tIns="0" rIns="0" bIns="0" rtlCol="0" anchor="t"/>
+          <a:lstStyle/>
+          <a:p>
+            <a:pPr indent="0" marL="0">
+              <a:buNone/>
+            </a:pPr>
+            <a:r>
+              <a:rPr lang="en-US" sz="1100" b="1" dirty="0">
+                <a:solidFill>
+                  <a:srgbClr val="2251FF"/>
+                </a:solidFill>
+                <a:latin typeface="Arial" pitchFamily="34" charset="0"/>
+                <a:ea typeface="Arial" pitchFamily="34" charset="-122"/>
+                <a:cs typeface="Arial" pitchFamily="34" charset="-120"/>
+              </a:rPr>
+              <a:t>The researcher (AI)</a:t>
+            </a:r>
+            <a:endParaRPr lang="en-US" sz="1100" dirty="0"/>
+          </a:p>
+        </p:txBody>
+      </p:sp>
+      <p:sp>
+        <p:nvSpPr>
+          <p:cNvPr id="110" name="Text 8"/>
+          <p:cNvSpPr txBox="1"/>
+          <p:nvPr/>
+        </p:nvSpPr>
+        <p:spPr>
+          <a:xfrm>
+            <a:off x="4550664" y="2807208"/>
+            <a:ext cx="3087624" cy="896112"/>
+          </a:xfrm>
+          <a:prstGeom prst="rect">
+            <a:avLst/>
+          </a:prstGeom>
+          <a:noFill/>
+          <a:ln/>
+        </p:spPr>
+        <p:txBody>
+          <a:bodyPr wrap="square" lIns="0" tIns="0" rIns="0" bIns="0" rtlCol="0" anchor="t"/>
+          <a:lstStyle/>
+          <a:p>
+            <a:pPr indent="0" marL="0">
+              <a:buNone/>
+            </a:pPr>
+            <a:r>
+              <a:rPr lang="en-US" sz="1200" dirty="0">
+                <a:solidFill>
+                  <a:srgbClr val="1F2933"/>
+                </a:solidFill>
+                <a:latin typeface="Arial" pitchFamily="34" charset="0"/>
+                <a:ea typeface="Arial" pitchFamily="34" charset="-122"/>
+                <a:cs typeface="Arial" pitchFamily="34" charset="-120"/>
+              </a:rPr>
+              <a:t>Searches the web, opens listings and hands in what it finds, trying again until 3 listings of the exact watch are accepted.</a:t>
+            </a:r>
+            <a:endParaRPr lang="en-US" sz="1200" dirty="0"/>
+          </a:p>
+        </p:txBody>
+      </p:sp>
+      <p:sp>
+        <p:nvSpPr>
+          <p:cNvPr id="111" name="Shape 9"/>
+          <p:cNvSpPr/>
+          <p:nvPr/>
+        </p:nvSpPr>
+        <p:spPr>
+          <a:xfrm>
+            <a:off x="8095488" y="1965960"/>
+            <a:ext cx="3544824" cy="1874520"/>
+          </a:xfrm>
+          <a:prstGeom prst="rect">
+            <a:avLst/>
+          </a:prstGeom>
+          <a:solidFill>
+            <a:srgbClr val="F2F4F7"/>
+          </a:solidFill>
+          <a:ln w="12700">
+            <a:solidFill>
+              <a:srgbClr val="F2F4F7"/>
+            </a:solidFill>
+            <a:prstDash val="solid"/>
+          </a:ln>
+        </p:spPr>
+      </p:sp>
+      <p:sp>
+        <p:nvSpPr>
+          <p:cNvPr id="112" name="Text 10"/>
+          <p:cNvSpPr txBox="1"/>
+          <p:nvPr/>
+        </p:nvSpPr>
+        <p:spPr>
+          <a:xfrm>
+            <a:off x="8324088" y="2148840"/>
+            <a:ext cx="3087624" cy="320040"/>
+          </a:xfrm>
+          <a:prstGeom prst="rect">
+            <a:avLst/>
+          </a:prstGeom>
+          <a:noFill/>
+          <a:ln/>
+        </p:spPr>
+        <p:txBody>
+          <a:bodyPr wrap="square" lIns="0" tIns="0" rIns="0" bIns="0" rtlCol="0" anchor="t"/>
+          <a:lstStyle/>
+          <a:p>
+            <a:pPr indent="0" marL="0">
+              <a:buNone/>
+            </a:pPr>
+            <a:r>
+              <a:rPr lang="en-US" sz="1600" b="1" dirty="0">
+                <a:solidFill>
+                  <a:srgbClr val="051C2C"/>
+                </a:solidFill>
+                <a:latin typeface="Georgia" pitchFamily="34" charset="0"/>
+                <a:ea typeface="Georgia" pitchFamily="34" charset="-122"/>
+                <a:cs typeface="Georgia" pitchFamily="34" charset="-120"/>
+              </a:rPr>
+              <a:t>Telegram assistant</a:t>
+            </a:r>
+            <a:endParaRPr lang="en-US" sz="1600" dirty="0"/>
+          </a:p>
+        </p:txBody>
+      </p:sp>
+      <p:sp>
+        <p:nvSpPr>
+          <p:cNvPr id="113" name="Text 11"/>
+          <p:cNvSpPr txBox="1"/>
+          <p:nvPr/>
+        </p:nvSpPr>
+        <p:spPr>
+          <a:xfrm>
+            <a:off x="8324088" y="2496312"/>
+            <a:ext cx="3087624" cy="228600"/>
+          </a:xfrm>
+          <a:prstGeom prst="rect">
+            <a:avLst/>
+          </a:prstGeom>
+          <a:noFill/>
+          <a:ln/>
+        </p:spPr>
+        <p:txBody>
+          <a:bodyPr wrap="square" lIns="0" tIns="0" rIns="0" bIns="0" rtlCol="0" anchor="t"/>
+          <a:lstStyle/>
+          <a:p>
+            <a:pPr indent="0" marL="0">
+              <a:buNone/>
+            </a:pPr>
+            <a:r>
+              <a:rPr lang="en-US" sz="1100" b="1" dirty="0">
+                <a:solidFill>
+                  <a:srgbClr val="2251FF"/>
+                </a:solidFill>
+                <a:latin typeface="Arial" pitchFamily="34" charset="0"/>
+                <a:ea typeface="Arial" pitchFamily="34" charset="-122"/>
+                <a:cs typeface="Arial" pitchFamily="34" charset="-120"/>
+              </a:rPr>
+              <a:t>Your chat window (AI)</a:t>
+            </a:r>
+            <a:endParaRPr lang="en-US" sz="1100" dirty="0"/>
+          </a:p>
+        </p:txBody>
+      </p:sp>
+      <p:sp>
+        <p:nvSpPr>
+          <p:cNvPr id="114" name="Text 12"/>
+          <p:cNvSpPr txBox="1"/>
+          <p:nvPr/>
+        </p:nvSpPr>
+        <p:spPr>
+          <a:xfrm>
+            <a:off x="8324088" y="2807208"/>
+            <a:ext cx="3087624" cy="896112"/>
+          </a:xfrm>
+          <a:prstGeom prst="rect">
+            <a:avLst/>
+          </a:prstGeom>
+          <a:noFill/>
+          <a:ln/>
+        </p:spPr>
+        <p:txBody>
+          <a:bodyPr wrap="square" lIns="0" tIns="0" rIns="0" bIns="0" rtlCol="0" anchor="t"/>
+          <a:lstStyle/>
+          <a:p>
+            <a:pPr indent="0" marL="0">
+              <a:buNone/>
+            </a:pPr>
+            <a:r>
+              <a:rPr lang="en-US" sz="1200" dirty="0">
+                <a:solidFill>
+                  <a:srgbClr val="1F2933"/>
+                </a:solidFill>
+                <a:latin typeface="Arial" pitchFamily="34" charset="0"/>
+                <a:ea typeface="Arial" pitchFamily="34" charset="-122"/>
+                <a:cs typeface="Arial" pitchFamily="34" charset="-120"/>
+              </a:rPr>
+              <a:t>Answers questions in plain chat and can run a fresh check. It can only suggest changes; nothing happens until you tap Confirm.</a:t>
+            </a:r>
+            <a:endParaRPr lang="en-US" sz="1200" dirty="0"/>
+          </a:p>
+        </p:txBody>
+      </p:sp>
+      <p:sp>
+        <p:nvSpPr>
+          <p:cNvPr id="115" name="Text 13"/>
+          <p:cNvSpPr txBox="1"/>
+          <p:nvPr/>
+        </p:nvSpPr>
+        <p:spPr>
+          <a:xfrm>
+            <a:off x="548640" y="4023360"/>
+            <a:ext cx="5486400" cy="228600"/>
+          </a:xfrm>
+          <a:prstGeom prst="rect">
+            <a:avLst/>
+          </a:prstGeom>
+          <a:noFill/>
+          <a:ln/>
+        </p:spPr>
+        <p:txBody>
+          <a:bodyPr wrap="square" lIns="0" tIns="0" rIns="0" bIns="0" rtlCol="0" anchor="t"/>
+          <a:lstStyle/>
+          <a:p>
+            <a:pPr indent="0" marL="0">
+              <a:buNone/>
+            </a:pPr>
+            <a:r>
+              <a:rPr lang="en-US" sz="1000" b="1" spc="200" kern="0" dirty="0">
+                <a:solidFill>
+                  <a:srgbClr val="6B7280"/>
+                </a:solidFill>
+                <a:latin typeface="Arial" pitchFamily="34" charset="0"/>
+                <a:ea typeface="Arial" pitchFamily="34" charset="-122"/>
+                <a:cs typeface="Arial" pitchFamily="34" charset="-120"/>
+              </a:rPr>
+              <a:t>KEEPING IT SAFE</a:t>
+            </a:r>
+            <a:endParaRPr lang="en-US" sz="1000" dirty="0"/>
+          </a:p>
+        </p:txBody>
+      </p:sp>
+      <p:sp>
+        <p:nvSpPr>
+          <p:cNvPr id="116" name="Shape 14"/>
+          <p:cNvSpPr/>
+          <p:nvPr/>
+        </p:nvSpPr>
+        <p:spPr>
+          <a:xfrm>
+            <a:off x="548640" y="4297680"/>
+            <a:ext cx="5431536" cy="1828800"/>
+          </a:xfrm>
+          <a:prstGeom prst="rect">
+            <a:avLst/>
+          </a:prstGeom>
+          <a:solidFill>
+            <a:srgbClr val="051C2C"/>
+          </a:solidFill>
+          <a:ln w="12700">
+            <a:solidFill>
+              <a:srgbClr val="051C2C"/>
+            </a:solidFill>
+            <a:prstDash val="solid"/>
+          </a:ln>
+        </p:spPr>
+      </p:sp>
+      <p:sp>
+        <p:nvSpPr>
+          <p:cNvPr id="117" name="Text 15"/>
+          <p:cNvSpPr txBox="1"/>
+          <p:nvPr/>
+        </p:nvSpPr>
+        <p:spPr>
+          <a:xfrm>
+            <a:off x="777240" y="4480560"/>
+            <a:ext cx="4974336" cy="320040"/>
+          </a:xfrm>
+          <a:prstGeom prst="rect">
+            <a:avLst/>
+          </a:prstGeom>
+          <a:noFill/>
+          <a:ln/>
+        </p:spPr>
+        <p:txBody>
+          <a:bodyPr wrap="square" lIns="0" tIns="0" rIns="0" bIns="0" rtlCol="0" anchor="t"/>
+          <a:lstStyle/>
+          <a:p>
+            <a:pPr indent="0" marL="0">
+              <a:buNone/>
+            </a:pPr>
+            <a:r>
+              <a:rPr lang="en-US" sz="1600" b="1" dirty="0">
+                <a:solidFill>
+                  <a:srgbClr val="FFFFFF"/>
+                </a:solidFill>
+                <a:latin typeface="Georgia" pitchFamily="34" charset="0"/>
+                <a:ea typeface="Georgia" pitchFamily="34" charset="-122"/>
+                <a:cs typeface="Georgia" pitchFamily="34" charset="-120"/>
+              </a:rPr>
+              <a:t>Listing checks</a:t>
+            </a:r>
+            <a:endParaRPr lang="en-US" sz="1600" dirty="0"/>
+          </a:p>
+        </p:txBody>
+      </p:sp>
+      <p:sp>
+        <p:nvSpPr>
+          <p:cNvPr id="118" name="Text 16"/>
+          <p:cNvSpPr txBox="1"/>
+          <p:nvPr/>
+        </p:nvSpPr>
+        <p:spPr>
+          <a:xfrm>
+            <a:off x="777240" y="4828032"/>
+            <a:ext cx="4974336" cy="228600"/>
+          </a:xfrm>
+          <a:prstGeom prst="rect">
+            <a:avLst/>
+          </a:prstGeom>
+          <a:noFill/>
+          <a:ln/>
+        </p:spPr>
+        <p:txBody>
+          <a:bodyPr wrap="square" lIns="0" tIns="0" rIns="0" bIns="0" rtlCol="0" anchor="t"/>
+          <a:lstStyle/>
+          <a:p>
+            <a:pPr indent="0" marL="0">
+              <a:buNone/>
+            </a:pPr>
+            <a:r>
+              <a:rPr lang="en-US" sz="1100" b="1" dirty="0">
+                <a:solidFill>
+                  <a:srgbClr val="8FB0FF"/>
+                </a:solidFill>
+                <a:latin typeface="Arial" pitchFamily="34" charset="0"/>
+                <a:ea typeface="Arial" pitchFamily="34" charset="-122"/>
+                <a:cs typeface="Arial" pitchFamily="34" charset="-120"/>
+              </a:rPr>
+              <a:t>The fact-checker (plain code, no AI)</a:t>
+            </a:r>
+            <a:endParaRPr lang="en-US" sz="1100" dirty="0"/>
+          </a:p>
+        </p:txBody>
+      </p:sp>
+      <p:sp>
+        <p:nvSpPr>
+          <p:cNvPr id="119" name="Text 17"/>
+          <p:cNvSpPr txBox="1"/>
+          <p:nvPr/>
+        </p:nvSpPr>
+        <p:spPr>
+          <a:xfrm>
+            <a:off x="777240" y="5138928"/>
+            <a:ext cx="4974336" cy="850392"/>
+          </a:xfrm>
+          <a:prstGeom prst="rect">
+            <a:avLst/>
+          </a:prstGeom>
+          <a:noFill/>
+          <a:ln/>
+        </p:spPr>
+        <p:txBody>
+          <a:bodyPr wrap="square" lIns="0" tIns="0" rIns="0" bIns="0" rtlCol="0" anchor="t"/>
+          <a:lstStyle/>
+          <a:p>
+            <a:pPr indent="0" marL="0">
+              <a:buNone/>
+            </a:pPr>
+            <a:r>
+              <a:rPr lang="en-US" sz="1200" dirty="0">
+                <a:solidFill>
+                  <a:srgbClr val="DDE6FA"/>
+                </a:solidFill>
+                <a:latin typeface="Arial" pitchFamily="34" charset="0"/>
+                <a:ea typeface="Arial" pitchFamily="34" charset="-122"/>
+                <a:cs typeface="Arial" pitchFamily="34" charset="-120"/>
+              </a:rPr>
+              <a:t>Accepts a listing only if its price is really on the page, for the exact reference, and not far off the others. The middle of three or more prices is recorded, and BUY / WAIT / OVERPRICED is simple arithmetic.</a:t>
+            </a:r>
+            <a:endParaRPr lang="en-US" sz="1200" dirty="0"/>
+          </a:p>
+        </p:txBody>
+      </p:sp>
+      <p:sp>
+        <p:nvSpPr>
+          <p:cNvPr id="120" name="Shape 18"/>
+          <p:cNvSpPr/>
+          <p:nvPr/>
+        </p:nvSpPr>
+        <p:spPr>
+          <a:xfrm>
+            <a:off x="6208776" y="4297680"/>
+            <a:ext cx="5431536" cy="1828800"/>
+          </a:xfrm>
+          <a:prstGeom prst="rect">
+            <a:avLst/>
+          </a:prstGeom>
+          <a:solidFill>
+            <a:srgbClr val="051C2C"/>
+          </a:solidFill>
+          <a:ln w="12700">
+            <a:solidFill>
+              <a:srgbClr val="051C2C"/>
+            </a:solidFill>
+            <a:prstDash val="solid"/>
+          </a:ln>
+        </p:spPr>
+      </p:sp>
+      <p:sp>
+        <p:nvSpPr>
+          <p:cNvPr id="121" name="Text 19"/>
+          <p:cNvSpPr txBox="1"/>
+          <p:nvPr/>
+        </p:nvSpPr>
+        <p:spPr>
+          <a:xfrm>
+            <a:off x="6437376" y="4480560"/>
+            <a:ext cx="4974336" cy="320040"/>
+          </a:xfrm>
+          <a:prstGeom prst="rect">
+            <a:avLst/>
+          </a:prstGeom>
+          <a:noFill/>
+          <a:ln/>
+        </p:spPr>
+        <p:txBody>
+          <a:bodyPr wrap="square" lIns="0" tIns="0" rIns="0" bIns="0" rtlCol="0" anchor="t"/>
+          <a:lstStyle/>
+          <a:p>
+            <a:pPr indent="0" marL="0">
+              <a:buNone/>
+            </a:pPr>
+            <a:r>
+              <a:rPr lang="en-US" sz="1600" b="1" dirty="0">
+                <a:solidFill>
+                  <a:srgbClr val="FFFFFF"/>
+                </a:solidFill>
+                <a:latin typeface="Georgia" pitchFamily="34" charset="0"/>
+                <a:ea typeface="Georgia" pitchFamily="34" charset="-122"/>
+                <a:cs typeface="Georgia" pitchFamily="34" charset="-120"/>
+              </a:rPr>
+              <a:t>Model middleware</a:t>
+            </a:r>
+            <a:endParaRPr lang="en-US" sz="1600" dirty="0"/>
+          </a:p>
+        </p:txBody>
+      </p:sp>
+      <p:sp>
+        <p:nvSpPr>
+          <p:cNvPr id="122" name="Text 20"/>
+          <p:cNvSpPr txBox="1"/>
+          <p:nvPr/>
+        </p:nvSpPr>
+        <p:spPr>
+          <a:xfrm>
+            <a:off x="6437376" y="4828032"/>
+            <a:ext cx="4974336" cy="228600"/>
+          </a:xfrm>
+          <a:prstGeom prst="rect">
+            <a:avLst/>
+          </a:prstGeom>
+          <a:noFill/>
+          <a:ln/>
+        </p:spPr>
+        <p:txBody>
+          <a:bodyPr wrap="square" lIns="0" tIns="0" rIns="0" bIns="0" rtlCol="0" anchor="t"/>
+          <a:lstStyle/>
+          <a:p>
+            <a:pPr indent="0" marL="0">
+              <a:buNone/>
+            </a:pPr>
+            <a:r>
+              <a:rPr lang="en-US" sz="1100" b="1" dirty="0">
+                <a:solidFill>
+                  <a:srgbClr val="8FB0FF"/>
+                </a:solidFill>
+                <a:latin typeface="Arial" pitchFamily="34" charset="0"/>
+                <a:ea typeface="Arial" pitchFamily="34" charset="-122"/>
+                <a:cs typeface="Arial" pitchFamily="34" charset="-120"/>
+              </a:rPr>
+              <a:t>The safety net around every AI call</a:t>
+            </a:r>
+            <a:endParaRPr lang="en-US" sz="1100" dirty="0"/>
+          </a:p>
+        </p:txBody>
+      </p:sp>
+      <p:sp>
+        <p:nvSpPr>
+          <p:cNvPr id="123" name="Text 21"/>
+          <p:cNvSpPr txBox="1"/>
+          <p:nvPr/>
+        </p:nvSpPr>
+        <p:spPr>
+          <a:xfrm>
+            <a:off x="6437376" y="5138928"/>
+            <a:ext cx="4974336" cy="850392"/>
+          </a:xfrm>
+          <a:prstGeom prst="rect">
+            <a:avLst/>
+          </a:prstGeom>
+          <a:noFill/>
+          <a:ln/>
+        </p:spPr>
+        <p:txBody>
+          <a:bodyPr wrap="square" lIns="0" tIns="0" rIns="0" bIns="0" rtlCol="0" anchor="t"/>
+          <a:lstStyle/>
+          <a:p>
+            <a:pPr indent="0" marL="0">
+              <a:buNone/>
+            </a:pPr>
+            <a:r>
+              <a:rPr lang="en-US" sz="1200" dirty="0">
+                <a:solidFill>
+                  <a:srgbClr val="DDE6FA"/>
+                </a:solidFill>
+                <a:latin typeface="Arial" pitchFamily="34" charset="0"/>
+                <a:ea typeface="Arial" pitchFamily="34" charset="-122"/>
+                <a:cs typeface="Arial" pitchFamily="34" charset="-120"/>
+              </a:rPr>
+              <a:t>Makes the AI research before it answers, retries when the AI service is busy, switches to a backup model, caps the steps one check can take, and keeps a daily limit so the assistant always has requests left.</a:t>
+            </a:r>
+            <a:endParaRPr lang="en-US" sz="1200" dirty="0"/>
           </a:p>
         </p:txBody>
       </p:sp>
@@ -3310,7 +8291,7 @@
                 <a:ea typeface="Arial" pitchFamily="34" charset="-122"/>
                 <a:cs typeface="Arial" pitchFamily="34" charset="-120"/>
               </a:rPr>
-              <a:t>Source: WatchAgent repository, watches.db (15-21 Sep 2026)</a:t>
+              <a:t>Source: WatchAgent repository, watches.db (15-24 Sep 2026)</a:t>
             </a:r>
             <a:endParaRPr lang="en-US" sz="900" dirty="0"/>
           </a:p>
@@ -3633,7 +8614,7 @@
                 <a:ea typeface="Arial" pitchFamily="34" charset="-122"/>
                 <a:cs typeface="Arial" pitchFamily="34" charset="-120"/>
               </a:rPr>
-              <a:t>WatchAgent tracks 10 luxury watches, runs unattended every 6 hours on GitHub Actions, and alerts via Telegram.</a:t>
+              <a:t>WatchAgent tracks 10 luxury watches, runs unattended every 6 hours on GitHub Actions, and alerts and chats via Telegram.</a:t>
             </a:r>
             <a:endParaRPr lang="en-US" sz="1400" dirty="0"/>
           </a:p>
@@ -3775,7 +8756,7 @@
                 <a:ea typeface="Arial" pitchFamily="34" charset="-122"/>
                 <a:cs typeface="Arial" pitchFamily="34" charset="-120"/>
               </a:rPr>
-              <a:t>Price grounding, multi-source consensus and structured output turn a free-form LLM into a dependable analyst.</a:t>
+              <a:t>Code-checked listings, a median of 3+ matches and a code-computed verdict turn a free-form LLM into a dependable analyst.</a:t>
             </a:r>
             <a:endParaRPr lang="en-US" sz="1400" dirty="0"/>
           </a:p>
@@ -5209,7 +10190,7 @@
                 <a:ea typeface="Georgia" pitchFamily="34" charset="-122"/>
                 <a:cs typeface="Georgia" pitchFamily="34" charset="-120"/>
               </a:rPr>
-              <a:t>WatchAgent hands the LLM a goal and five tools, and lets it decide how to get a grounded price</a:t>
+              <a:t>WatchAgent hands the LLM a goal and four tools, and lets it decide how to find a trustworthy price</a:t>
             </a:r>
             <a:endParaRPr lang="en-US" sz="2600" dirty="0"/>
           </a:p>
@@ -5248,7 +10229,7 @@
                 <a:ea typeface="Arial" pitchFamily="34" charset="-122"/>
                 <a:cs typeface="Arial" pitchFamily="34" charset="-120"/>
               </a:rPr>
-              <a:t>Source: watchagent/agent.py, tools.py, .github/workflows/watchagent-check.yml</a:t>
+              <a:t>Source: watchagent/agent.py, tools.py, verdict.py, .github/workflows/watchagent-check.yml</a:t>
             </a:r>
             <a:endParaRPr lang="en-US" sz="900" dirty="0"/>
           </a:p>
@@ -5287,7 +10268,7 @@
                 <a:ea typeface="Arial" pitchFamily="34" charset="-122"/>
                 <a:cs typeface="Arial" pitchFamily="34" charset="-120"/>
               </a:rPr>
-              <a:t>4</a:t>
+              <a:t>7</a:t>
             </a:r>
             <a:endParaRPr lang="en-US" sz="900" dirty="0"/>
           </a:p>
@@ -5390,7 +10371,7 @@
                 <a:ea typeface="Arial" pitchFamily="34" charset="-122"/>
                 <a:cs typeface="Arial" pitchFamily="34" charset="-120"/>
               </a:rPr>
-              <a:t>GitHub Actions cron, every 6 hours</a:t>
+              <a:t>GitHub Actions every 6 hours, or a Telegram request</a:t>
             </a:r>
             <a:endParaRPr lang="en-US" sz="1100" dirty="0"/>
           </a:p>
@@ -5518,7 +10499,7 @@
                 <a:ea typeface="Arial" pitchFamily="34" charset="-122"/>
                 <a:cs typeface="Arial" pitchFamily="34" charset="-120"/>
               </a:rPr>
-              <a:t>LangChain create_agent with a Gemini model</a:t>
+              <a:t>LangChain create_agent with Gemini, plus a backup model</a:t>
             </a:r>
             <a:endParaRPr lang="en-US" sz="1100" dirty="0"/>
           </a:p>
@@ -5646,7 +10627,7 @@
                 <a:ea typeface="Arial" pitchFamily="34" charset="-122"/>
                 <a:cs typeface="Arial" pitchFamily="34" charset="-120"/>
               </a:rPr>
-              <a:t>Search Chrono24, WatchCharts and the web; record; read history</a:t>
+              <a:t>Search the web, open a listing, submit listings, save a note</a:t>
             </a:r>
             <a:endParaRPr lang="en-US" sz="1100" dirty="0"/>
           </a:p>
@@ -5774,7 +10755,7 @@
                 <a:ea typeface="Arial" pitchFamily="34" charset="-122"/>
                 <a:cs typeface="Arial" pitchFamily="34" charset="-120"/>
               </a:rPr>
-              <a:t>Price grounding and 2-source consensus</a:t>
+              <a:t>Listing checks in code, a median of 3+ listings, a request budget</a:t>
             </a:r>
             <a:endParaRPr lang="en-US" sz="1100" dirty="0"/>
           </a:p>
@@ -5902,7 +10883,7 @@
                 <a:ea typeface="Arial" pitchFamily="34" charset="-122"/>
                 <a:cs typeface="Arial" pitchFamily="34" charset="-120"/>
               </a:rPr>
-              <a:t>SQLite price history, committed back to the repo</a:t>
+              <a:t>SQLite prices, checks and research notes, committed to the repo</a:t>
             </a:r>
             <a:endParaRPr lang="en-US" sz="1100" dirty="0"/>
           </a:p>
@@ -6030,7 +11011,7 @@
                 <a:ea typeface="Arial" pitchFamily="34" charset="-122"/>
                 <a:cs typeface="Arial" pitchFamily="34" charset="-120"/>
               </a:rPr>
-              <a:t>BUY / WAIT / OVERPRICED verdict and Telegram alert</a:t>
+              <a:t>Verdict computed in code; BUY alert on Telegram</a:t>
             </a:r>
             <a:endParaRPr lang="en-US" sz="1100" dirty="0"/>
           </a:p>
@@ -6158,7 +11139,7 @@
                 <a:ea typeface="Arial" pitchFamily="34" charset="-122"/>
                 <a:cs typeface="Arial" pitchFamily="34" charset="-120"/>
               </a:rPr>
-              <a:t>Which listing states this exact watch's price</a:t>
+              <a:t>Which listings to open and hand in</a:t>
             </a:r>
             <a:endParaRPr lang="en-US" sz="1300" dirty="0"/>
           </a:p>
@@ -6179,7 +11160,7 @@
                 <a:ea typeface="Arial" pitchFamily="34" charset="-122"/>
                 <a:cs typeface="Arial" pitchFamily="34" charset="-120"/>
               </a:rPr>
-              <a:t>Whether to confirm across sources or fall back to one</a:t>
+              <a:t>How to search again when listings are rejected</a:t>
             </a:r>
             <a:endParaRPr lang="en-US" sz="1300" dirty="0"/>
           </a:p>
@@ -6200,7 +11181,7 @@
                 <a:ea typeface="Arial" pitchFamily="34" charset="-122"/>
                 <a:cs typeface="Arial" pitchFamily="34" charset="-120"/>
               </a:rPr>
-              <a:t>How price, target and trend add up to a verdict</a:t>
+              <a:t>What to remember for the next check</a:t>
             </a:r>
             <a:endParaRPr lang="en-US" sz="1300" dirty="0"/>
           </a:p>
@@ -6307,7 +11288,7 @@
                 <a:ea typeface="Arial" pitchFamily="34" charset="-122"/>
                 <a:cs typeface="Arial" pitchFamily="34" charset="-120"/>
               </a:rPr>
-              <a:t>A recorded price must appear in the cited snippet</a:t>
+              <a:t>A price must be written on the page it came from</a:t>
             </a:r>
             <a:endParaRPr lang="en-US" sz="1300" dirty="0"/>
           </a:p>
@@ -6328,7 +11309,7 @@
                 <a:ea typeface="Arial" pitchFamily="34" charset="-122"/>
                 <a:cs typeface="Arial" pitchFamily="34" charset="-120"/>
               </a:rPr>
-              <a:t>Confirmation needs 2+ sources within 5%</a:t>
+              <a:t>3+ listings of the exact reference; outliers dropped</a:t>
             </a:r>
             <a:endParaRPr lang="en-US" sz="1300" dirty="0"/>
           </a:p>
@@ -6349,7 +11330,7 @@
                 <a:ea typeface="Arial" pitchFamily="34" charset="-122"/>
                 <a:cs typeface="Arial" pitchFamily="34" charset="-120"/>
               </a:rPr>
-              <a:t>The verdict must be BUY, WAIT or OVERPRICED</a:t>
+              <a:t>The verdict (BUY, WAIT or OVERPRICED) is arithmetic</a:t>
             </a:r>
             <a:endParaRPr lang="en-US" sz="1300" dirty="0"/>
           </a:p>
@@ -6370,7 +11351,7 @@
                 <a:ea typeface="Arial" pitchFamily="34" charset="-122"/>
                 <a:cs typeface="Arial" pitchFamily="34" charset="-120"/>
               </a:rPr>
-              <a:t>No repeat alert for the same watch within 12 hours</a:t>
+              <a:t>No repeat alert within 48 hours unless the price drops 3%</a:t>
             </a:r>
             <a:endParaRPr lang="en-US" sz="1300" dirty="0"/>
           </a:p>
@@ -6519,7 +11500,7 @@
                 <a:ea typeface="Arial" pitchFamily="34" charset="-122"/>
                 <a:cs typeface="Arial" pitchFamily="34" charset="-120"/>
               </a:rPr>
-              <a:t>Source: watchagent/tools.py, agent.py, cli.py</a:t>
+              <a:t>Source: watchagent/tools.py, agent.py, verdict.py, cli.py</a:t>
             </a:r>
             <a:endParaRPr lang="en-US" sz="900" dirty="0"/>
           </a:p>
@@ -6558,7 +11539,7 @@
                 <a:ea typeface="Arial" pitchFamily="34" charset="-122"/>
                 <a:cs typeface="Arial" pitchFamily="34" charset="-120"/>
               </a:rPr>
-              <a:t>5</a:t>
+              <a:t>10</a:t>
             </a:r>
             <a:endParaRPr lang="en-US" sz="900" dirty="0"/>
           </a:p>
@@ -6725,7 +11706,7 @@
                 <a:ea typeface="Arial" pitchFamily="34" charset="-122"/>
                 <a:cs typeface="Arial" pitchFamily="34" charset="-120"/>
               </a:rPr>
-              <a:t>A price is rejected unless it actually appears in the search snippet the agent cites.</a:t>
+              <a:t>A listing counts only if its price is written on the page it came from, for the exact watch.</a:t>
             </a:r>
             <a:endParaRPr lang="en-US" sz="1300" dirty="0"/>
           </a:p>
@@ -6764,7 +11745,7 @@
                 <a:ea typeface="Courier New" pitchFamily="34" charset="-122"/>
                 <a:cs typeface="Courier New" pitchFamily="34" charset="-120"/>
               </a:rPr>
-              <a:t>_price_is_grounded</a:t>
+              <a:t>_listing_error</a:t>
             </a:r>
             <a:endParaRPr lang="en-US" sz="900" dirty="0"/>
           </a:p>
@@ -6892,7 +11873,7 @@
                 <a:ea typeface="Arial" pitchFamily="34" charset="-122"/>
                 <a:cs typeface="Arial" pitchFamily="34" charset="-120"/>
               </a:rPr>
-              <a:t>Multi-source consensus</a:t>
+              <a:t>Multi-listing consensus</a:t>
             </a:r>
             <a:endParaRPr lang="en-US" sz="1500" dirty="0"/>
           </a:p>
@@ -6931,7 +11912,7 @@
                 <a:ea typeface="Arial" pitchFamily="34" charset="-122"/>
                 <a:cs typeface="Arial" pitchFamily="34" charset="-120"/>
               </a:rPr>
-              <a:t>Two or more sources must agree within 5%; the median of the agreeing prices is recorded.</a:t>
+              <a:t>At least 3 matching listings must agree; outliers are dropped and the middle price is recorded.</a:t>
             </a:r>
             <a:endParaRPr lang="en-US" sz="1300" dirty="0"/>
           </a:p>
@@ -6970,7 +11951,7 @@
                 <a:ea typeface="Courier New" pitchFamily="34" charset="-122"/>
                 <a:cs typeface="Courier New" pitchFamily="34" charset="-120"/>
               </a:rPr>
-              <a:t>record_price_confirmed</a:t>
+              <a:t>submit_listings</a:t>
             </a:r>
             <a:endParaRPr lang="en-US" sz="900" dirty="0"/>
           </a:p>
@@ -7098,7 +12079,7 @@
                 <a:ea typeface="Arial" pitchFamily="34" charset="-122"/>
                 <a:cs typeface="Arial" pitchFamily="34" charset="-120"/>
               </a:rPr>
-              <a:t>Structured output</a:t>
+              <a:t>Code-computed verdict</a:t>
             </a:r>
             <a:endParaRPr lang="en-US" sz="1500" dirty="0"/>
           </a:p>
@@ -7137,7 +12118,7 @@
                 <a:ea typeface="Arial" pitchFamily="34" charset="-122"/>
                 <a:cs typeface="Arial" pitchFamily="34" charset="-120"/>
               </a:rPr>
-              <a:t>The final answer is a typed verdict (BUY, WAIT or OVERPRICED), not free text.</a:t>
+              <a:t>BUY, WAIT or OVERPRICED is computed from price, target and trend, not written by the model.</a:t>
             </a:r>
             <a:endParaRPr lang="en-US" sz="1300" dirty="0"/>
           </a:p>
@@ -7176,7 +12157,7 @@
                 <a:ea typeface="Courier New" pitchFamily="34" charset="-122"/>
                 <a:cs typeface="Courier New" pitchFamily="34" charset="-120"/>
               </a:rPr>
-              <a:t>WatchVerdict (Pydantic)</a:t>
+              <a:t>compute_verdict</a:t>
             </a:r>
             <a:endParaRPr lang="en-US" sz="900" dirty="0"/>
           </a:p>
@@ -7343,7 +12324,7 @@
                 <a:ea typeface="Arial" pitchFamily="34" charset="-122"/>
                 <a:cs typeface="Arial" pitchFamily="34" charset="-120"/>
               </a:rPr>
-              <a:t>Rate-limit errors retry with exponential backoff; a recursion limit of 30 stops runaway loops.</a:t>
+              <a:t>Research comes first; retries, a backup model and a daily request budget bound every run.</a:t>
             </a:r>
             <a:endParaRPr lang="en-US" sz="1300" dirty="0"/>
           </a:p>
@@ -7382,7 +12363,7 @@
                 <a:ea typeface="Courier New" pitchFamily="34" charset="-122"/>
                 <a:cs typeface="Courier New" pitchFamily="34" charset="-120"/>
               </a:rPr>
-              <a:t>check_watch</a:t>
+              <a:t>request_budget</a:t>
             </a:r>
             <a:endParaRPr lang="en-US" sz="900" dirty="0"/>
           </a:p>
@@ -7549,7 +12530,7 @@
                 <a:ea typeface="Arial" pitchFamily="34" charset="-122"/>
                 <a:cs typeface="Arial" pitchFamily="34" charset="-120"/>
               </a:rPr>
-              <a:t>Only BUY verdicts alert, and never twice for the same watch within 12 hours.</a:t>
+              <a:t>Only BUYs backed by 3+ listings alert, and not again within 48 hours unless the price drops 3%.</a:t>
             </a:r>
             <a:endParaRPr lang="en-US" sz="1300" dirty="0"/>
           </a:p>
@@ -7588,7 +12569,7 @@
                 <a:ea typeface="Courier New" pitchFamily="34" charset="-122"/>
                 <a:cs typeface="Courier New" pitchFamily="34" charset="-120"/>
               </a:rPr>
-              <a:t>_maybe_notify</a:t>
+              <a:t>should_alert</a:t>
             </a:r>
             <a:endParaRPr lang="en-US" sz="900" dirty="0"/>
           </a:p>
@@ -7840,7 +12821,7 @@
                 <a:ea typeface="Arial" pitchFamily="34" charset="-122"/>
                 <a:cs typeface="Arial" pitchFamily="34" charset="-120"/>
               </a:rPr>
-              <a:t>6</a:t>
+              <a:t>11</a:t>
             </a:r>
             <a:endParaRPr lang="en-US" sz="900" dirty="0"/>
           </a:p>
@@ -8459,7 +13440,7 @@
                 <a:ea typeface="Arial" pitchFamily="34" charset="-122"/>
                 <a:cs typeface="Arial" pitchFamily="34" charset="-120"/>
               </a:rPr>
-              <a:t>7</a:t>
+              <a:t>12</a:t>
             </a:r>
             <a:endParaRPr lang="en-US" sz="900" dirty="0"/>
           </a:p>
@@ -9563,7 +14544,7 @@
                 <a:ea typeface="Arial" pitchFamily="34" charset="-122"/>
                 <a:cs typeface="Arial" pitchFamily="34" charset="-120"/>
               </a:rPr>
-              <a:t>8</a:t>
+              <a:t>13</a:t>
             </a:r>
             <a:endParaRPr lang="en-US" sz="900" dirty="0"/>
           </a:p>
@@ -10879,7 +15860,7 @@
                 <a:ea typeface="Arial" pitchFamily="34" charset="-122"/>
                 <a:cs typeface="Arial" pitchFamily="34" charset="-120"/>
               </a:rPr>
-              <a:t>9</a:t>
+              <a:t>14</a:t>
             </a:r>
             <a:endParaRPr lang="en-US" sz="900" dirty="0"/>
           </a:p>

--- a/docs/WatchAgent_Agentic_AI_Brownbag.pptx
+++ b/docs/WatchAgent_Agentic_AI_Brownbag.pptx
@@ -16,6 +16,7 @@
     <p:sldId id="270" r:id="rId21"/>
     <p:sldId id="260" r:id="rId6"/>
     <p:sldId id="261" r:id="rId7"/>
+    <p:sldId id="271" r:id="rId22"/>
     <p:sldId id="262" r:id="rId8"/>
     <p:sldId id="263" r:id="rId9"/>
     <p:sldId id="264" r:id="rId10"/>
@@ -1457,6 +1458,94 @@
             <a:r>
               <a:rPr lang="en-US" dirty="0"/>
               <a:t>These are the five boxes from the diagram, in plain terms. Three do the work. watchagent check is the scheduler: every six hours it picks the watches that have gone longest without a check, researches three at a time, and sends a Telegram alert when one is a good buy. The research agent is the AI researcher: it searches, opens listings, and keeps handing in what it finds until three listings of the exact watch are accepted. The Telegram assistant is your chat window: it answers questions and can run a fresh check, but it can only suggest changes, and nothing happens until you tap Confirm. Two keep that work honest. The listing checks are plain code, no AI: a price counts only if it is really on the page, for the exact reference, and not far off the others; the middle price is recorded and the verdict is simple arithmetic. The model middleware wraps every AI call: it makes the AI research before answering, retries when the service is busy, switches to a backup model, caps the steps, and keeps a daily limit so the assistant always has requests left.</a:t>
+            </a:r>
+            <a:endParaRPr lang="en-US" dirty="0"/>
+          </a:p>
+        </p:txBody>
+      </p:sp>
+      <p:sp>
+        <p:nvSpPr>
+          <p:cNvPr id="4" name="Slide Number Placeholder 3"/>
+          <p:cNvSpPr>
+            <a:spLocks noGrp="1"/>
+          </p:cNvSpPr>
+          <p:nvPr>
+            <p:ph type="sldNum" sz="quarter" idx="10"/>
+          </p:nvPr>
+        </p:nvSpPr>
+        <p:spPr/>
+        <p:txBody>
+          <a:bodyPr/>
+          <a:lstStyle/>
+          <a:p>
+            <a:fld id="{F7021451-1387-4CA6-816F-3879F97B5CBC}" type="slidenum">
+              <a:rPr lang="en-US"/>
+              <a:t>4</a:t>
+            </a:fld>
+            <a:endParaRPr lang="en-US"/>
+          </a:p>
+        </p:txBody>
+      </p:sp>
+    </p:spTree>
+    <p:extLst>
+      <p:ext uri="{BB962C8B-B14F-4D97-AF65-F5344CB8AC3E}">
+        <p14:creationId xmlns:p14="http://schemas.microsoft.com/office/powerpoint/2010/main" val="1024086991"/>
+      </p:ext>
+    </p:extLst>
+  </p:cSld>
+  <p:clrMapOvr>
+    <a:masterClrMapping/>
+  </p:clrMapOvr>
+</p:notes>
+</file>
+
+<file path=ppt/notesSlides/notesSlide16.xml><?xml version="1.0" encoding="utf-8"?>
+<p:notes xmlns:a="http://schemas.openxmlformats.org/drawingml/2006/main" xmlns:r="http://schemas.openxmlformats.org/officeDocument/2006/relationships" xmlns:p="http://schemas.openxmlformats.org/presentationml/2006/main">
+  <p:cSld>
+    <p:spTree>
+      <p:nvGrpSpPr>
+        <p:cNvPr id="1" name=""/>
+        <p:cNvGrpSpPr/>
+        <p:nvPr/>
+      </p:nvGrpSpPr>
+      <p:grpSpPr>
+        <a:xfrm>
+          <a:off x="0" y="0"/>
+          <a:ext cx="0" cy="0"/>
+          <a:chOff x="0" y="0"/>
+          <a:chExt cx="0" cy="0"/>
+        </a:xfrm>
+      </p:grpSpPr>
+      <p:sp>
+        <p:nvSpPr>
+          <p:cNvPr id="2" name="Slide Image Placeholder 1"/>
+          <p:cNvSpPr>
+            <a:spLocks noGrp="1" noRot="1" noChangeAspect="1"/>
+          </p:cNvSpPr>
+          <p:nvPr>
+            <p:ph type="sldImg"/>
+          </p:nvPr>
+        </p:nvSpPr>
+        <p:spPr/>
+      </p:sp>
+      <p:sp>
+        <p:nvSpPr>
+          <p:cNvPr id="3" name="Notes Placeholder 2"/>
+          <p:cNvSpPr>
+            <a:spLocks noGrp="1"/>
+          </p:cNvSpPr>
+          <p:nvPr>
+            <p:ph type="body" idx="1"/>
+          </p:nvPr>
+        </p:nvSpPr>
+        <p:spPr/>
+        <p:txBody>
+          <a:bodyPr/>
+          <a:lstStyle/>
+          <a:p>
+            <a:r>
+              <a:rPr lang="en-US" dirty="0"/>
+              <a:t>An honest status update. WatchAgent runs on Google's free Gemini tier. This week the main model, flash-lite, was overloaded most of the time, so calls took 40 to 60 seconds and often failed. When that happens the agent switches to a backup model, gemini-3.5-flash, but its free tier allows only 20 requests a day, and one watch check needs five to eight. In the last two scheduled runs, 10 of 20 checks failed on that limit and 4 more found no usable listing. What you notice: most prices go stale, BUY alerts can't fire for watches that weren't checked, and because failures are not sent to Telegram, silence looks the same as nothing worth buying. We also tried free models on OpenRouter; they were either rate-limited or didn't use tools properly. The options are on the right: pay for capacity, swap the backup for a model with its own free quota, check less, and send a Telegram summary after every run so failures are visible.</a:t>
             </a:r>
             <a:endParaRPr lang="en-US" dirty="0"/>
           </a:p>
@@ -2871,7 +2960,7 @@
                 <a:ea typeface="Arial" pitchFamily="34" charset="-122"/>
                 <a:cs typeface="Arial" pitchFamily="34" charset="-120"/>
               </a:rPr>
-              <a:t>15</a:t>
+              <a:t>16</a:t>
             </a:r>
             <a:endParaRPr lang="en-US" sz="900" dirty="0"/>
           </a:p>
@@ -8156,6 +8245,1196 @@
 </p:sld>
 </file>
 
+<file path=ppt/slides/slide16.xml><?xml version="1.0" encoding="utf-8"?>
+<p:sld xmlns:a="http://schemas.openxmlformats.org/drawingml/2006/main" xmlns:r="http://schemas.openxmlformats.org/officeDocument/2006/relationships" xmlns:p="http://schemas.openxmlformats.org/presentationml/2006/main">
+  <p:cSld name="Slide 4">
+    <p:bg>
+      <p:bgPr>
+        <a:solidFill>
+          <a:srgbClr val="FFFFFF"/>
+        </a:solidFill>
+      </p:bgPr>
+    </p:bg>
+    <p:spTree>
+      <p:nvGrpSpPr>
+        <p:cNvPr id="1" name=""/>
+        <p:cNvGrpSpPr/>
+        <p:nvPr/>
+      </p:nvGrpSpPr>
+      <p:grpSpPr>
+        <a:xfrm>
+          <a:off x="0" y="0"/>
+          <a:ext cx="0" cy="0"/>
+          <a:chOff x="0" y="0"/>
+          <a:chExt cx="0" cy="0"/>
+        </a:xfrm>
+      </p:grpSpPr>
+      <p:sp>
+        <p:nvSpPr>
+          <p:cNvPr id="2" name="Text 0"/>
+          <p:cNvSpPr txBox="1"/>
+          <p:nvPr/>
+        </p:nvSpPr>
+        <p:spPr>
+          <a:xfrm>
+            <a:off x="548640" y="274320"/>
+            <a:ext cx="7315200" cy="228600"/>
+          </a:xfrm>
+          <a:prstGeom prst="rect">
+            <a:avLst/>
+          </a:prstGeom>
+          <a:noFill/>
+          <a:ln/>
+        </p:spPr>
+        <p:txBody>
+          <a:bodyPr wrap="square" lIns="0" tIns="0" rIns="0" bIns="0" rtlCol="0" anchor="t"/>
+          <a:lstStyle/>
+          <a:p>
+            <a:pPr indent="0" marL="0">
+              <a:buNone/>
+            </a:pPr>
+            <a:r>
+              <a:rPr lang="en-US" sz="1000" b="1" spc="200" kern="0" dirty="0">
+                <a:solidFill>
+                  <a:srgbClr val="2251FF"/>
+                </a:solidFill>
+                <a:latin typeface="Arial" pitchFamily="34" charset="0"/>
+                <a:ea typeface="Arial" pitchFamily="34" charset="-122"/>
+                <a:cs typeface="Arial" pitchFamily="34" charset="-120"/>
+              </a:rPr>
+              <a:t>CURRENT CHALLENGE: THE AI PROVIDER</a:t>
+            </a:r>
+            <a:endParaRPr lang="en-US" sz="1000" dirty="0"/>
+          </a:p>
+        </p:txBody>
+      </p:sp>
+      <p:sp>
+        <p:nvSpPr>
+          <p:cNvPr id="3" name="Text 1"/>
+          <p:cNvSpPr txBox="1"/>
+          <p:nvPr/>
+        </p:nvSpPr>
+        <p:spPr>
+          <a:xfrm>
+            <a:off x="548640" y="594360"/>
+            <a:ext cx="11064240" cy="914400"/>
+          </a:xfrm>
+          <a:prstGeom prst="rect">
+            <a:avLst/>
+          </a:prstGeom>
+          <a:noFill/>
+          <a:ln/>
+        </p:spPr>
+        <p:txBody>
+          <a:bodyPr wrap="square" lIns="0" tIns="0" rIns="0" bIns="0" rtlCol="0" anchor="t"/>
+          <a:lstStyle/>
+          <a:p>
+            <a:pPr indent="0" marL="0">
+              <a:buNone/>
+            </a:pPr>
+            <a:r>
+              <a:rPr lang="en-US" sz="2600" b="1" dirty="0">
+                <a:solidFill>
+                  <a:srgbClr val="051C2C"/>
+                </a:solidFill>
+                <a:latin typeface="Georgia" pitchFamily="34" charset="0"/>
+                <a:ea typeface="Georgia" pitchFamily="34" charset="-122"/>
+                <a:cs typeface="Georgia" pitchFamily="34" charset="-120"/>
+              </a:rPr>
+              <a:t>Gemini’s free tier is now the bottleneck: when the main model is busy, checks fall back to a model capped at 20 requests a day</a:t>
+            </a:r>
+            <a:endParaRPr lang="en-US" sz="2600" dirty="0"/>
+          </a:p>
+        </p:txBody>
+      </p:sp>
+      <p:sp>
+        <p:nvSpPr>
+          <p:cNvPr id="4" name="Text 2"/>
+          <p:cNvSpPr txBox="1"/>
+          <p:nvPr/>
+        </p:nvSpPr>
+        <p:spPr>
+          <a:xfrm>
+            <a:off x="548640" y="6400800"/>
+            <a:ext cx="10058400" cy="228600"/>
+          </a:xfrm>
+          <a:prstGeom prst="rect">
+            <a:avLst/>
+          </a:prstGeom>
+          <a:noFill/>
+          <a:ln/>
+        </p:spPr>
+        <p:txBody>
+          <a:bodyPr wrap="square" lIns="0" tIns="0" rIns="0" bIns="0" rtlCol="0" anchor="t"/>
+          <a:lstStyle/>
+          <a:p>
+            <a:pPr indent="0" marL="0">
+              <a:buNone/>
+            </a:pPr>
+            <a:r>
+              <a:rPr lang="en-US" sz="900" dirty="0">
+                <a:solidFill>
+                  <a:srgbClr val="6B7280"/>
+                </a:solidFill>
+                <a:latin typeface="Arial" pitchFamily="34" charset="0"/>
+                <a:ea typeface="Arial" pitchFamily="34" charset="-122"/>
+                <a:cs typeface="Arial" pitchFamily="34" charset="-120"/>
+              </a:rPr>
+              <a:t>Source: GitHub Actions logs, WatchAgent Check runs 22–23 Sep 2026; Google quota GenerateRequestsPerDayPerProjectPerModel-FreeTier (limit 20)</a:t>
+            </a:r>
+            <a:endParaRPr lang="en-US" sz="900" dirty="0"/>
+          </a:p>
+        </p:txBody>
+      </p:sp>
+      <p:sp>
+        <p:nvSpPr>
+          <p:cNvPr id="5" name="Text 3"/>
+          <p:cNvSpPr txBox="1"/>
+          <p:nvPr/>
+        </p:nvSpPr>
+        <p:spPr>
+          <a:xfrm>
+            <a:off x="11155680" y="6400800"/>
+            <a:ext cx="484632" cy="228600"/>
+          </a:xfrm>
+          <a:prstGeom prst="rect">
+            <a:avLst/>
+          </a:prstGeom>
+          <a:noFill/>
+          <a:ln/>
+        </p:spPr>
+        <p:txBody>
+          <a:bodyPr wrap="square" lIns="0" tIns="0" rIns="0" bIns="0" rtlCol="0" anchor="t"/>
+          <a:lstStyle/>
+          <a:p>
+            <a:pPr algn="r" indent="0" marL="0">
+              <a:buNone/>
+            </a:pPr>
+            <a:r>
+              <a:rPr lang="en-US" sz="900" dirty="0">
+                <a:solidFill>
+                  <a:srgbClr val="6B7280"/>
+                </a:solidFill>
+                <a:latin typeface="Arial" pitchFamily="34" charset="0"/>
+                <a:ea typeface="Arial" pitchFamily="34" charset="-122"/>
+                <a:cs typeface="Arial" pitchFamily="34" charset="-120"/>
+              </a:rPr>
+              <a:t>12</a:t>
+            </a:r>
+            <a:endParaRPr lang="en-US" sz="900" dirty="0"/>
+          </a:p>
+        </p:txBody>
+      </p:sp>
+      <p:sp>
+        <p:nvSpPr>
+          <p:cNvPr id="102" name="Shape 0"/>
+          <p:cNvSpPr/>
+          <p:nvPr/>
+        </p:nvSpPr>
+        <p:spPr>
+          <a:xfrm>
+            <a:off x="548640" y="1691640"/>
+            <a:ext cx="3544824" cy="1783080"/>
+          </a:xfrm>
+          <a:prstGeom prst="rect">
+            <a:avLst/>
+          </a:prstGeom>
+          <a:solidFill>
+            <a:srgbClr val="F2F4F7"/>
+          </a:solidFill>
+          <a:ln w="12700">
+            <a:solidFill>
+              <a:srgbClr val="F2F4F7"/>
+            </a:solidFill>
+            <a:prstDash val="solid"/>
+          </a:ln>
+        </p:spPr>
+      </p:sp>
+      <p:sp>
+        <p:nvSpPr>
+          <p:cNvPr id="103" name="Text 1"/>
+          <p:cNvSpPr txBox="1"/>
+          <p:nvPr/>
+        </p:nvSpPr>
+        <p:spPr>
+          <a:xfrm>
+            <a:off x="777240" y="1828800"/>
+            <a:ext cx="3087624" cy="548640"/>
+          </a:xfrm>
+          <a:prstGeom prst="rect">
+            <a:avLst/>
+          </a:prstGeom>
+          <a:noFill/>
+          <a:ln/>
+        </p:spPr>
+        <p:txBody>
+          <a:bodyPr wrap="square" lIns="0" tIns="0" rIns="0" bIns="0" rtlCol="0" anchor="t"/>
+          <a:lstStyle/>
+          <a:p>
+            <a:pPr indent="0" marL="0">
+              <a:buNone/>
+            </a:pPr>
+            <a:r>
+              <a:rPr lang="en-US" sz="3200" b="1" dirty="0">
+                <a:solidFill>
+                  <a:srgbClr val="2251FF"/>
+                </a:solidFill>
+                <a:latin typeface="Georgia" pitchFamily="34" charset="0"/>
+                <a:ea typeface="Georgia" pitchFamily="34" charset="-122"/>
+                <a:cs typeface="Georgia" pitchFamily="34" charset="-120"/>
+              </a:rPr>
+              <a:t>10 of 20</a:t>
+            </a:r>
+            <a:endParaRPr lang="en-US" sz="3200" dirty="0"/>
+          </a:p>
+        </p:txBody>
+      </p:sp>
+      <p:sp>
+        <p:nvSpPr>
+          <p:cNvPr id="104" name="Text 2"/>
+          <p:cNvSpPr txBox="1"/>
+          <p:nvPr/>
+        </p:nvSpPr>
+        <p:spPr>
+          <a:xfrm>
+            <a:off x="777240" y="2395728"/>
+            <a:ext cx="3087624" cy="256032"/>
+          </a:xfrm>
+          <a:prstGeom prst="rect">
+            <a:avLst/>
+          </a:prstGeom>
+          <a:noFill/>
+          <a:ln/>
+        </p:spPr>
+        <p:txBody>
+          <a:bodyPr wrap="square" lIns="0" tIns="0" rIns="0" bIns="0" rtlCol="0" anchor="t"/>
+          <a:lstStyle/>
+          <a:p>
+            <a:pPr indent="0" marL="0">
+              <a:buNone/>
+            </a:pPr>
+            <a:r>
+              <a:rPr lang="en-US" sz="1200" b="1" dirty="0">
+                <a:solidFill>
+                  <a:srgbClr val="051C2C"/>
+                </a:solidFill>
+                <a:latin typeface="Arial" pitchFamily="34" charset="0"/>
+                <a:ea typeface="Arial" pitchFamily="34" charset="-122"/>
+                <a:cs typeface="Arial" pitchFamily="34" charset="-120"/>
+              </a:rPr>
+              <a:t>checks failed on quota</a:t>
+            </a:r>
+            <a:endParaRPr lang="en-US" sz="1200" dirty="0"/>
+          </a:p>
+        </p:txBody>
+      </p:sp>
+      <p:sp>
+        <p:nvSpPr>
+          <p:cNvPr id="105" name="Text 3"/>
+          <p:cNvSpPr txBox="1"/>
+          <p:nvPr/>
+        </p:nvSpPr>
+        <p:spPr>
+          <a:xfrm>
+            <a:off x="777240" y="2697480"/>
+            <a:ext cx="3087624" cy="731520"/>
+          </a:xfrm>
+          <a:prstGeom prst="rect">
+            <a:avLst/>
+          </a:prstGeom>
+          <a:noFill/>
+          <a:ln/>
+        </p:spPr>
+        <p:txBody>
+          <a:bodyPr wrap="square" lIns="0" tIns="0" rIns="0" bIns="0" rtlCol="0" anchor="t"/>
+          <a:lstStyle/>
+          <a:p>
+            <a:pPr indent="0" marL="0">
+              <a:buNone/>
+            </a:pPr>
+            <a:r>
+              <a:rPr lang="en-US" sz="1100" dirty="0">
+                <a:solidFill>
+                  <a:srgbClr val="1F2933"/>
+                </a:solidFill>
+                <a:latin typeface="Arial" pitchFamily="34" charset="0"/>
+                <a:ea typeface="Arial" pitchFamily="34" charset="-122"/>
+                <a:cs typeface="Arial" pitchFamily="34" charset="-120"/>
+              </a:rPr>
+              <a:t>In the last two scheduled runs the backup model hit its daily limit; 4 more checks found no usable listing.</a:t>
+            </a:r>
+            <a:endParaRPr lang="en-US" sz="1100" dirty="0"/>
+          </a:p>
+        </p:txBody>
+      </p:sp>
+      <p:sp>
+        <p:nvSpPr>
+          <p:cNvPr id="106" name="Shape 4"/>
+          <p:cNvSpPr/>
+          <p:nvPr/>
+        </p:nvSpPr>
+        <p:spPr>
+          <a:xfrm>
+            <a:off x="4322064" y="1691640"/>
+            <a:ext cx="3544824" cy="1783080"/>
+          </a:xfrm>
+          <a:prstGeom prst="rect">
+            <a:avLst/>
+          </a:prstGeom>
+          <a:solidFill>
+            <a:srgbClr val="F2F4F7"/>
+          </a:solidFill>
+          <a:ln w="12700">
+            <a:solidFill>
+              <a:srgbClr val="F2F4F7"/>
+            </a:solidFill>
+            <a:prstDash val="solid"/>
+          </a:ln>
+        </p:spPr>
+      </p:sp>
+      <p:sp>
+        <p:nvSpPr>
+          <p:cNvPr id="107" name="Text 5"/>
+          <p:cNvSpPr txBox="1"/>
+          <p:nvPr/>
+        </p:nvSpPr>
+        <p:spPr>
+          <a:xfrm>
+            <a:off x="4550664" y="1828800"/>
+            <a:ext cx="3087624" cy="548640"/>
+          </a:xfrm>
+          <a:prstGeom prst="rect">
+            <a:avLst/>
+          </a:prstGeom>
+          <a:noFill/>
+          <a:ln/>
+        </p:spPr>
+        <p:txBody>
+          <a:bodyPr wrap="square" lIns="0" tIns="0" rIns="0" bIns="0" rtlCol="0" anchor="t"/>
+          <a:lstStyle/>
+          <a:p>
+            <a:pPr indent="0" marL="0">
+              <a:buNone/>
+            </a:pPr>
+            <a:r>
+              <a:rPr lang="en-US" sz="3200" b="1" dirty="0">
+                <a:solidFill>
+                  <a:srgbClr val="2251FF"/>
+                </a:solidFill>
+                <a:latin typeface="Georgia" pitchFamily="34" charset="0"/>
+                <a:ea typeface="Georgia" pitchFamily="34" charset="-122"/>
+                <a:cs typeface="Georgia" pitchFamily="34" charset="-120"/>
+              </a:rPr>
+              <a:t>20 a day</a:t>
+            </a:r>
+            <a:endParaRPr lang="en-US" sz="3200" dirty="0"/>
+          </a:p>
+        </p:txBody>
+      </p:sp>
+      <p:sp>
+        <p:nvSpPr>
+          <p:cNvPr id="108" name="Text 6"/>
+          <p:cNvSpPr txBox="1"/>
+          <p:nvPr/>
+        </p:nvSpPr>
+        <p:spPr>
+          <a:xfrm>
+            <a:off x="4550664" y="2395728"/>
+            <a:ext cx="3087624" cy="256032"/>
+          </a:xfrm>
+          <a:prstGeom prst="rect">
+            <a:avLst/>
+          </a:prstGeom>
+          <a:noFill/>
+          <a:ln/>
+        </p:spPr>
+        <p:txBody>
+          <a:bodyPr wrap="square" lIns="0" tIns="0" rIns="0" bIns="0" rtlCol="0" anchor="t"/>
+          <a:lstStyle/>
+          <a:p>
+            <a:pPr indent="0" marL="0">
+              <a:buNone/>
+            </a:pPr>
+            <a:r>
+              <a:rPr lang="en-US" sz="1200" b="1" dirty="0">
+                <a:solidFill>
+                  <a:srgbClr val="051C2C"/>
+                </a:solidFill>
+                <a:latin typeface="Arial" pitchFamily="34" charset="0"/>
+                <a:ea typeface="Arial" pitchFamily="34" charset="-122"/>
+                <a:cs typeface="Arial" pitchFamily="34" charset="-120"/>
+              </a:rPr>
+              <a:t>free limit on the backup model</a:t>
+            </a:r>
+            <a:endParaRPr lang="en-US" sz="1200" dirty="0"/>
+          </a:p>
+        </p:txBody>
+      </p:sp>
+      <p:sp>
+        <p:nvSpPr>
+          <p:cNvPr id="109" name="Text 7"/>
+          <p:cNvSpPr txBox="1"/>
+          <p:nvPr/>
+        </p:nvSpPr>
+        <p:spPr>
+          <a:xfrm>
+            <a:off x="4550664" y="2697480"/>
+            <a:ext cx="3087624" cy="731520"/>
+          </a:xfrm>
+          <a:prstGeom prst="rect">
+            <a:avLst/>
+          </a:prstGeom>
+          <a:noFill/>
+          <a:ln/>
+        </p:spPr>
+        <p:txBody>
+          <a:bodyPr wrap="square" lIns="0" tIns="0" rIns="0" bIns="0" rtlCol="0" anchor="t"/>
+          <a:lstStyle/>
+          <a:p>
+            <a:pPr indent="0" marL="0">
+              <a:buNone/>
+            </a:pPr>
+            <a:r>
+              <a:rPr lang="en-US" sz="1100" dirty="0">
+                <a:solidFill>
+                  <a:srgbClr val="1F2933"/>
+                </a:solidFill>
+                <a:latin typeface="Arial" pitchFamily="34" charset="0"/>
+                <a:ea typeface="Arial" pitchFamily="34" charset="-122"/>
+                <a:cs typeface="Arial" pitchFamily="34" charset="-120"/>
+              </a:rPr>
+              <a:t>gemini-3.5-flash allows 20 requests a day for free, and one watch check needs 5 to 8.</a:t>
+            </a:r>
+            <a:endParaRPr lang="en-US" sz="1100" dirty="0"/>
+          </a:p>
+        </p:txBody>
+      </p:sp>
+      <p:sp>
+        <p:nvSpPr>
+          <p:cNvPr id="110" name="Shape 8"/>
+          <p:cNvSpPr/>
+          <p:nvPr/>
+        </p:nvSpPr>
+        <p:spPr>
+          <a:xfrm>
+            <a:off x="8095488" y="1691640"/>
+            <a:ext cx="3544824" cy="1783080"/>
+          </a:xfrm>
+          <a:prstGeom prst="rect">
+            <a:avLst/>
+          </a:prstGeom>
+          <a:solidFill>
+            <a:srgbClr val="F2F4F7"/>
+          </a:solidFill>
+          <a:ln w="12700">
+            <a:solidFill>
+              <a:srgbClr val="F2F4F7"/>
+            </a:solidFill>
+            <a:prstDash val="solid"/>
+          </a:ln>
+        </p:spPr>
+      </p:sp>
+      <p:sp>
+        <p:nvSpPr>
+          <p:cNvPr id="111" name="Text 9"/>
+          <p:cNvSpPr txBox="1"/>
+          <p:nvPr/>
+        </p:nvSpPr>
+        <p:spPr>
+          <a:xfrm>
+            <a:off x="8324088" y="1828800"/>
+            <a:ext cx="3087624" cy="548640"/>
+          </a:xfrm>
+          <a:prstGeom prst="rect">
+            <a:avLst/>
+          </a:prstGeom>
+          <a:noFill/>
+          <a:ln/>
+        </p:spPr>
+        <p:txBody>
+          <a:bodyPr wrap="square" lIns="0" tIns="0" rIns="0" bIns="0" rtlCol="0" anchor="t"/>
+          <a:lstStyle/>
+          <a:p>
+            <a:pPr indent="0" marL="0">
+              <a:buNone/>
+            </a:pPr>
+            <a:r>
+              <a:rPr lang="en-US" sz="3200" b="1" dirty="0">
+                <a:solidFill>
+                  <a:srgbClr val="2251FF"/>
+                </a:solidFill>
+                <a:latin typeface="Georgia" pitchFamily="34" charset="0"/>
+                <a:ea typeface="Georgia" pitchFamily="34" charset="-122"/>
+                <a:cs typeface="Georgia" pitchFamily="34" charset="-120"/>
+              </a:rPr>
+              <a:t>40–60 s</a:t>
+            </a:r>
+            <a:endParaRPr lang="en-US" sz="3200" dirty="0"/>
+          </a:p>
+        </p:txBody>
+      </p:sp>
+      <p:sp>
+        <p:nvSpPr>
+          <p:cNvPr id="112" name="Text 10"/>
+          <p:cNvSpPr txBox="1"/>
+          <p:nvPr/>
+        </p:nvSpPr>
+        <p:spPr>
+          <a:xfrm>
+            <a:off x="8324088" y="2395728"/>
+            <a:ext cx="3087624" cy="256032"/>
+          </a:xfrm>
+          <a:prstGeom prst="rect">
+            <a:avLst/>
+          </a:prstGeom>
+          <a:noFill/>
+          <a:ln/>
+        </p:spPr>
+        <p:txBody>
+          <a:bodyPr wrap="square" lIns="0" tIns="0" rIns="0" bIns="0" rtlCol="0" anchor="t"/>
+          <a:lstStyle/>
+          <a:p>
+            <a:pPr indent="0" marL="0">
+              <a:buNone/>
+            </a:pPr>
+            <a:r>
+              <a:rPr lang="en-US" sz="1200" b="1" dirty="0">
+                <a:solidFill>
+                  <a:srgbClr val="051C2C"/>
+                </a:solidFill>
+                <a:latin typeface="Arial" pitchFamily="34" charset="0"/>
+                <a:ea typeface="Arial" pitchFamily="34" charset="-122"/>
+                <a:cs typeface="Arial" pitchFamily="34" charset="-120"/>
+              </a:rPr>
+              <a:t>per AI call when busy</a:t>
+            </a:r>
+            <a:endParaRPr lang="en-US" sz="1200" dirty="0"/>
+          </a:p>
+        </p:txBody>
+      </p:sp>
+      <p:sp>
+        <p:nvSpPr>
+          <p:cNvPr id="113" name="Text 11"/>
+          <p:cNvSpPr txBox="1"/>
+          <p:nvPr/>
+        </p:nvSpPr>
+        <p:spPr>
+          <a:xfrm>
+            <a:off x="8324088" y="2697480"/>
+            <a:ext cx="3087624" cy="731520"/>
+          </a:xfrm>
+          <a:prstGeom prst="rect">
+            <a:avLst/>
+          </a:prstGeom>
+          <a:noFill/>
+          <a:ln/>
+        </p:spPr>
+        <p:txBody>
+          <a:bodyPr wrap="square" lIns="0" tIns="0" rIns="0" bIns="0" rtlCol="0" anchor="t"/>
+          <a:lstStyle/>
+          <a:p>
+            <a:pPr indent="0" marL="0">
+              <a:buNone/>
+            </a:pPr>
+            <a:r>
+              <a:rPr lang="en-US" sz="1100" dirty="0">
+                <a:solidFill>
+                  <a:srgbClr val="1F2933"/>
+                </a:solidFill>
+                <a:latin typeface="Arial" pitchFamily="34" charset="0"/>
+                <a:ea typeface="Arial" pitchFamily="34" charset="-122"/>
+                <a:cs typeface="Arial" pitchFamily="34" charset="-120"/>
+              </a:rPr>
+              <a:t>The main model (flash-lite) was overloaded most of the week, so one watch took about 4 minutes.</a:t>
+            </a:r>
+            <a:endParaRPr lang="en-US" sz="1100" dirty="0"/>
+          </a:p>
+        </p:txBody>
+      </p:sp>
+      <p:sp>
+        <p:nvSpPr>
+          <p:cNvPr id="114" name="Shape 12"/>
+          <p:cNvSpPr/>
+          <p:nvPr/>
+        </p:nvSpPr>
+        <p:spPr>
+          <a:xfrm>
+            <a:off x="548640" y="3703320"/>
+            <a:ext cx="5431536" cy="2423160"/>
+          </a:xfrm>
+          <a:prstGeom prst="rect">
+            <a:avLst/>
+          </a:prstGeom>
+          <a:solidFill>
+            <a:srgbClr val="F2F4F7"/>
+          </a:solidFill>
+          <a:ln w="12700">
+            <a:solidFill>
+              <a:srgbClr val="F2F4F7"/>
+            </a:solidFill>
+            <a:prstDash val="solid"/>
+          </a:ln>
+        </p:spPr>
+      </p:sp>
+      <p:sp>
+        <p:nvSpPr>
+          <p:cNvPr id="115" name="Text 13"/>
+          <p:cNvSpPr txBox="1"/>
+          <p:nvPr/>
+        </p:nvSpPr>
+        <p:spPr>
+          <a:xfrm>
+            <a:off x="777240" y="3886200"/>
+            <a:ext cx="4974336" cy="320040"/>
+          </a:xfrm>
+          <a:prstGeom prst="rect">
+            <a:avLst/>
+          </a:prstGeom>
+          <a:noFill/>
+          <a:ln/>
+        </p:spPr>
+        <p:txBody>
+          <a:bodyPr wrap="square" lIns="0" tIns="0" rIns="0" bIns="0" rtlCol="0" anchor="t"/>
+          <a:lstStyle/>
+          <a:p>
+            <a:pPr indent="0" marL="0">
+              <a:buNone/>
+            </a:pPr>
+            <a:r>
+              <a:rPr lang="en-US" sz="1600" b="1" dirty="0">
+                <a:solidFill>
+                  <a:srgbClr val="051C2C"/>
+                </a:solidFill>
+                <a:latin typeface="Georgia" pitchFamily="34" charset="0"/>
+                <a:ea typeface="Georgia" pitchFamily="34" charset="-122"/>
+                <a:cs typeface="Georgia" pitchFamily="34" charset="-120"/>
+              </a:rPr>
+              <a:t>What you notice</a:t>
+            </a:r>
+            <a:endParaRPr lang="en-US" sz="1600" dirty="0"/>
+          </a:p>
+        </p:txBody>
+      </p:sp>
+      <p:sp>
+        <p:nvSpPr>
+          <p:cNvPr id="116" name="Shape 14"/>
+          <p:cNvSpPr/>
+          <p:nvPr/>
+        </p:nvSpPr>
+        <p:spPr>
+          <a:xfrm>
+            <a:off x="777240" y="4416552"/>
+            <a:ext cx="82296" cy="82296"/>
+          </a:xfrm>
+          <a:prstGeom prst="ellipse">
+            <a:avLst/>
+          </a:prstGeom>
+          <a:solidFill>
+            <a:srgbClr val="2251FF"/>
+          </a:solidFill>
+          <a:ln w="12700">
+            <a:solidFill>
+              <a:srgbClr val="2251FF"/>
+            </a:solidFill>
+            <a:prstDash val="solid"/>
+          </a:ln>
+        </p:spPr>
+      </p:sp>
+      <p:sp>
+        <p:nvSpPr>
+          <p:cNvPr id="117" name="Text 15"/>
+          <p:cNvSpPr txBox="1"/>
+          <p:nvPr/>
+        </p:nvSpPr>
+        <p:spPr>
+          <a:xfrm>
+            <a:off x="987552" y="4343400"/>
+            <a:ext cx="4764024" cy="502920"/>
+          </a:xfrm>
+          <a:prstGeom prst="rect">
+            <a:avLst/>
+          </a:prstGeom>
+          <a:noFill/>
+          <a:ln/>
+        </p:spPr>
+        <p:txBody>
+          <a:bodyPr wrap="square" lIns="0" tIns="0" rIns="0" bIns="0" rtlCol="0" anchor="t"/>
+          <a:lstStyle/>
+          <a:p>
+            <a:pPr indent="0" marL="0">
+              <a:buNone/>
+            </a:pPr>
+            <a:r>
+              <a:rPr lang="en-US" sz="1200" dirty="0">
+                <a:solidFill>
+                  <a:srgbClr val="1F2933"/>
+                </a:solidFill>
+                <a:latin typeface="Arial" pitchFamily="34" charset="0"/>
+                <a:ea typeface="Arial" pitchFamily="34" charset="-122"/>
+                <a:cs typeface="Arial" pitchFamily="34" charset="-120"/>
+              </a:rPr>
+              <a:t>Prices for most watches go stale</a:t>
+            </a:r>
+            <a:endParaRPr lang="en-US" sz="1200" dirty="0"/>
+          </a:p>
+        </p:txBody>
+      </p:sp>
+      <p:sp>
+        <p:nvSpPr>
+          <p:cNvPr id="118" name="Shape 16"/>
+          <p:cNvSpPr/>
+          <p:nvPr/>
+        </p:nvSpPr>
+        <p:spPr>
+          <a:xfrm>
+            <a:off x="777240" y="4965192"/>
+            <a:ext cx="82296" cy="82296"/>
+          </a:xfrm>
+          <a:prstGeom prst="ellipse">
+            <a:avLst/>
+          </a:prstGeom>
+          <a:solidFill>
+            <a:srgbClr val="2251FF"/>
+          </a:solidFill>
+          <a:ln w="12700">
+            <a:solidFill>
+              <a:srgbClr val="2251FF"/>
+            </a:solidFill>
+            <a:prstDash val="solid"/>
+          </a:ln>
+        </p:spPr>
+      </p:sp>
+      <p:sp>
+        <p:nvSpPr>
+          <p:cNvPr id="119" name="Text 17"/>
+          <p:cNvSpPr txBox="1"/>
+          <p:nvPr/>
+        </p:nvSpPr>
+        <p:spPr>
+          <a:xfrm>
+            <a:off x="987552" y="4892040"/>
+            <a:ext cx="4764024" cy="502920"/>
+          </a:xfrm>
+          <a:prstGeom prst="rect">
+            <a:avLst/>
+          </a:prstGeom>
+          <a:noFill/>
+          <a:ln/>
+        </p:spPr>
+        <p:txBody>
+          <a:bodyPr wrap="square" lIns="0" tIns="0" rIns="0" bIns="0" rtlCol="0" anchor="t"/>
+          <a:lstStyle/>
+          <a:p>
+            <a:pPr indent="0" marL="0">
+              <a:buNone/>
+            </a:pPr>
+            <a:r>
+              <a:rPr lang="en-US" sz="1200" dirty="0">
+                <a:solidFill>
+                  <a:srgbClr val="1F2933"/>
+                </a:solidFill>
+                <a:latin typeface="Arial" pitchFamily="34" charset="0"/>
+                <a:ea typeface="Arial" pitchFamily="34" charset="-122"/>
+                <a:cs typeface="Arial" pitchFamily="34" charset="-120"/>
+              </a:rPr>
+              <a:t>No BUY alert, even when one might be due</a:t>
+            </a:r>
+            <a:endParaRPr lang="en-US" sz="1200" dirty="0"/>
+          </a:p>
+        </p:txBody>
+      </p:sp>
+      <p:sp>
+        <p:nvSpPr>
+          <p:cNvPr id="120" name="Shape 18"/>
+          <p:cNvSpPr/>
+          <p:nvPr/>
+        </p:nvSpPr>
+        <p:spPr>
+          <a:xfrm>
+            <a:off x="777240" y="5513832"/>
+            <a:ext cx="82296" cy="82296"/>
+          </a:xfrm>
+          <a:prstGeom prst="ellipse">
+            <a:avLst/>
+          </a:prstGeom>
+          <a:solidFill>
+            <a:srgbClr val="2251FF"/>
+          </a:solidFill>
+          <a:ln w="12700">
+            <a:solidFill>
+              <a:srgbClr val="2251FF"/>
+            </a:solidFill>
+            <a:prstDash val="solid"/>
+          </a:ln>
+        </p:spPr>
+      </p:sp>
+      <p:sp>
+        <p:nvSpPr>
+          <p:cNvPr id="121" name="Text 19"/>
+          <p:cNvSpPr txBox="1"/>
+          <p:nvPr/>
+        </p:nvSpPr>
+        <p:spPr>
+          <a:xfrm>
+            <a:off x="987552" y="5440680"/>
+            <a:ext cx="4764024" cy="502920"/>
+          </a:xfrm>
+          <a:prstGeom prst="rect">
+            <a:avLst/>
+          </a:prstGeom>
+          <a:noFill/>
+          <a:ln/>
+        </p:spPr>
+        <p:txBody>
+          <a:bodyPr wrap="square" lIns="0" tIns="0" rIns="0" bIns="0" rtlCol="0" anchor="t"/>
+          <a:lstStyle/>
+          <a:p>
+            <a:pPr indent="0" marL="0">
+              <a:buNone/>
+            </a:pPr>
+            <a:r>
+              <a:rPr lang="en-US" sz="1200" dirty="0">
+                <a:solidFill>
+                  <a:srgbClr val="1F2933"/>
+                </a:solidFill>
+                <a:latin typeface="Arial" pitchFamily="34" charset="0"/>
+                <a:ea typeface="Arial" pitchFamily="34" charset="-122"/>
+                <a:cs typeface="Arial" pitchFamily="34" charset="-120"/>
+              </a:rPr>
+              <a:t>Failures never reach Telegram, so silence looks the same as “nothing worth buying”</a:t>
+            </a:r>
+            <a:endParaRPr lang="en-US" sz="1200" dirty="0"/>
+          </a:p>
+        </p:txBody>
+      </p:sp>
+      <p:sp>
+        <p:nvSpPr>
+          <p:cNvPr id="122" name="Shape 20"/>
+          <p:cNvSpPr/>
+          <p:nvPr/>
+        </p:nvSpPr>
+        <p:spPr>
+          <a:xfrm>
+            <a:off x="6208776" y="3703320"/>
+            <a:ext cx="5431536" cy="2423160"/>
+          </a:xfrm>
+          <a:prstGeom prst="rect">
+            <a:avLst/>
+          </a:prstGeom>
+          <a:solidFill>
+            <a:srgbClr val="051C2C"/>
+          </a:solidFill>
+          <a:ln w="12700">
+            <a:solidFill>
+              <a:srgbClr val="051C2C"/>
+            </a:solidFill>
+            <a:prstDash val="solid"/>
+          </a:ln>
+        </p:spPr>
+      </p:sp>
+      <p:sp>
+        <p:nvSpPr>
+          <p:cNvPr id="123" name="Text 21"/>
+          <p:cNvSpPr txBox="1"/>
+          <p:nvPr/>
+        </p:nvSpPr>
+        <p:spPr>
+          <a:xfrm>
+            <a:off x="6437376" y="3886200"/>
+            <a:ext cx="4974336" cy="320040"/>
+          </a:xfrm>
+          <a:prstGeom prst="rect">
+            <a:avLst/>
+          </a:prstGeom>
+          <a:noFill/>
+          <a:ln/>
+        </p:spPr>
+        <p:txBody>
+          <a:bodyPr wrap="square" lIns="0" tIns="0" rIns="0" bIns="0" rtlCol="0" anchor="t"/>
+          <a:lstStyle/>
+          <a:p>
+            <a:pPr indent="0" marL="0">
+              <a:buNone/>
+            </a:pPr>
+            <a:r>
+              <a:rPr lang="en-US" sz="1600" b="1" dirty="0">
+                <a:solidFill>
+                  <a:srgbClr val="FFFFFF"/>
+                </a:solidFill>
+                <a:latin typeface="Georgia" pitchFamily="34" charset="0"/>
+                <a:ea typeface="Georgia" pitchFamily="34" charset="-122"/>
+                <a:cs typeface="Georgia" pitchFamily="34" charset="-120"/>
+              </a:rPr>
+              <a:t>Options</a:t>
+            </a:r>
+            <a:endParaRPr lang="en-US" sz="1600" dirty="0"/>
+          </a:p>
+        </p:txBody>
+      </p:sp>
+      <p:sp>
+        <p:nvSpPr>
+          <p:cNvPr id="124" name="Shape 22"/>
+          <p:cNvSpPr/>
+          <p:nvPr/>
+        </p:nvSpPr>
+        <p:spPr>
+          <a:xfrm>
+            <a:off x="6437376" y="4416552"/>
+            <a:ext cx="82296" cy="82296"/>
+          </a:xfrm>
+          <a:prstGeom prst="ellipse">
+            <a:avLst/>
+          </a:prstGeom>
+          <a:solidFill>
+            <a:srgbClr val="8FB0FF"/>
+          </a:solidFill>
+          <a:ln w="12700">
+            <a:solidFill>
+              <a:srgbClr val="8FB0FF"/>
+            </a:solidFill>
+            <a:prstDash val="solid"/>
+          </a:ln>
+        </p:spPr>
+      </p:sp>
+      <p:sp>
+        <p:nvSpPr>
+          <p:cNvPr id="125" name="Text 23"/>
+          <p:cNvSpPr txBox="1"/>
+          <p:nvPr/>
+        </p:nvSpPr>
+        <p:spPr>
+          <a:xfrm>
+            <a:off x="6647688" y="4343400"/>
+            <a:ext cx="4764024" cy="411480"/>
+          </a:xfrm>
+          <a:prstGeom prst="rect">
+            <a:avLst/>
+          </a:prstGeom>
+          <a:noFill/>
+          <a:ln/>
+        </p:spPr>
+        <p:txBody>
+          <a:bodyPr wrap="square" lIns="0" tIns="0" rIns="0" bIns="0" rtlCol="0" anchor="t"/>
+          <a:lstStyle/>
+          <a:p>
+            <a:pPr indent="0" marL="0">
+              <a:buNone/>
+            </a:pPr>
+            <a:r>
+              <a:rPr lang="en-US" sz="1200" dirty="0">
+                <a:solidFill>
+                  <a:srgbClr val="DDE6FA"/>
+                </a:solidFill>
+                <a:latin typeface="Arial" pitchFamily="34" charset="0"/>
+                <a:ea typeface="Arial" pitchFamily="34" charset="-122"/>
+                <a:cs typeface="Arial" pitchFamily="34" charset="-120"/>
+              </a:rPr>
+              <a:t>Pay for capacity: Gemini’s paid tier or Claude Haiku (~$12/month)</a:t>
+            </a:r>
+            <a:endParaRPr lang="en-US" sz="1200" dirty="0"/>
+          </a:p>
+        </p:txBody>
+      </p:sp>
+      <p:sp>
+        <p:nvSpPr>
+          <p:cNvPr id="126" name="Shape 24"/>
+          <p:cNvSpPr/>
+          <p:nvPr/>
+        </p:nvSpPr>
+        <p:spPr>
+          <a:xfrm>
+            <a:off x="6437376" y="4873752"/>
+            <a:ext cx="82296" cy="82296"/>
+          </a:xfrm>
+          <a:prstGeom prst="ellipse">
+            <a:avLst/>
+          </a:prstGeom>
+          <a:solidFill>
+            <a:srgbClr val="8FB0FF"/>
+          </a:solidFill>
+          <a:ln w="12700">
+            <a:solidFill>
+              <a:srgbClr val="8FB0FF"/>
+            </a:solidFill>
+            <a:prstDash val="solid"/>
+          </a:ln>
+        </p:spPr>
+      </p:sp>
+      <p:sp>
+        <p:nvSpPr>
+          <p:cNvPr id="127" name="Text 25"/>
+          <p:cNvSpPr txBox="1"/>
+          <p:nvPr/>
+        </p:nvSpPr>
+        <p:spPr>
+          <a:xfrm>
+            <a:off x="6647688" y="4800600"/>
+            <a:ext cx="4764024" cy="411480"/>
+          </a:xfrm>
+          <a:prstGeom prst="rect">
+            <a:avLst/>
+          </a:prstGeom>
+          <a:noFill/>
+          <a:ln/>
+        </p:spPr>
+        <p:txBody>
+          <a:bodyPr wrap="square" lIns="0" tIns="0" rIns="0" bIns="0" rtlCol="0" anchor="t"/>
+          <a:lstStyle/>
+          <a:p>
+            <a:pPr indent="0" marL="0">
+              <a:buNone/>
+            </a:pPr>
+            <a:r>
+              <a:rPr lang="en-US" sz="1200" dirty="0">
+                <a:solidFill>
+                  <a:srgbClr val="DDE6FA"/>
+                </a:solidFill>
+                <a:latin typeface="Arial" pitchFamily="34" charset="0"/>
+                <a:ea typeface="Arial" pitchFamily="34" charset="-122"/>
+                <a:cs typeface="Arial" pitchFamily="34" charset="-120"/>
+              </a:rPr>
+              <a:t>Swap the backup for a model with its own free quota</a:t>
+            </a:r>
+            <a:endParaRPr lang="en-US" sz="1200" dirty="0"/>
+          </a:p>
+        </p:txBody>
+      </p:sp>
+      <p:sp>
+        <p:nvSpPr>
+          <p:cNvPr id="128" name="Shape 26"/>
+          <p:cNvSpPr/>
+          <p:nvPr/>
+        </p:nvSpPr>
+        <p:spPr>
+          <a:xfrm>
+            <a:off x="6437376" y="5330952"/>
+            <a:ext cx="82296" cy="82296"/>
+          </a:xfrm>
+          <a:prstGeom prst="ellipse">
+            <a:avLst/>
+          </a:prstGeom>
+          <a:solidFill>
+            <a:srgbClr val="8FB0FF"/>
+          </a:solidFill>
+          <a:ln w="12700">
+            <a:solidFill>
+              <a:srgbClr val="8FB0FF"/>
+            </a:solidFill>
+            <a:prstDash val="solid"/>
+          </a:ln>
+        </p:spPr>
+      </p:sp>
+      <p:sp>
+        <p:nvSpPr>
+          <p:cNvPr id="129" name="Text 27"/>
+          <p:cNvSpPr txBox="1"/>
+          <p:nvPr/>
+        </p:nvSpPr>
+        <p:spPr>
+          <a:xfrm>
+            <a:off x="6647688" y="5257800"/>
+            <a:ext cx="4764024" cy="411480"/>
+          </a:xfrm>
+          <a:prstGeom prst="rect">
+            <a:avLst/>
+          </a:prstGeom>
+          <a:noFill/>
+          <a:ln/>
+        </p:spPr>
+        <p:txBody>
+          <a:bodyPr wrap="square" lIns="0" tIns="0" rIns="0" bIns="0" rtlCol="0" anchor="t"/>
+          <a:lstStyle/>
+          <a:p>
+            <a:pPr indent="0" marL="0">
+              <a:buNone/>
+            </a:pPr>
+            <a:r>
+              <a:rPr lang="en-US" sz="1200" dirty="0">
+                <a:solidFill>
+                  <a:srgbClr val="DDE6FA"/>
+                </a:solidFill>
+                <a:latin typeface="Arial" pitchFamily="34" charset="0"/>
+                <a:ea typeface="Arial" pitchFamily="34" charset="-122"/>
+                <a:cs typeface="Arial" pitchFamily="34" charset="-120"/>
+              </a:rPr>
+              <a:t>Check fewer watches, or less often</a:t>
+            </a:r>
+            <a:endParaRPr lang="en-US" sz="1200" dirty="0"/>
+          </a:p>
+        </p:txBody>
+      </p:sp>
+      <p:sp>
+        <p:nvSpPr>
+          <p:cNvPr id="130" name="Shape 28"/>
+          <p:cNvSpPr/>
+          <p:nvPr/>
+        </p:nvSpPr>
+        <p:spPr>
+          <a:xfrm>
+            <a:off x="6437376" y="5788152"/>
+            <a:ext cx="82296" cy="82296"/>
+          </a:xfrm>
+          <a:prstGeom prst="ellipse">
+            <a:avLst/>
+          </a:prstGeom>
+          <a:solidFill>
+            <a:srgbClr val="8FB0FF"/>
+          </a:solidFill>
+          <a:ln w="12700">
+            <a:solidFill>
+              <a:srgbClr val="8FB0FF"/>
+            </a:solidFill>
+            <a:prstDash val="solid"/>
+          </a:ln>
+        </p:spPr>
+      </p:sp>
+      <p:sp>
+        <p:nvSpPr>
+          <p:cNvPr id="131" name="Text 29"/>
+          <p:cNvSpPr txBox="1"/>
+          <p:nvPr/>
+        </p:nvSpPr>
+        <p:spPr>
+          <a:xfrm>
+            <a:off x="6647688" y="5715000"/>
+            <a:ext cx="4764024" cy="411480"/>
+          </a:xfrm>
+          <a:prstGeom prst="rect">
+            <a:avLst/>
+          </a:prstGeom>
+          <a:noFill/>
+          <a:ln/>
+        </p:spPr>
+        <p:txBody>
+          <a:bodyPr wrap="square" lIns="0" tIns="0" rIns="0" bIns="0" rtlCol="0" anchor="t"/>
+          <a:lstStyle/>
+          <a:p>
+            <a:pPr indent="0" marL="0">
+              <a:buNone/>
+            </a:pPr>
+            <a:r>
+              <a:rPr lang="en-US" sz="1200" dirty="0">
+                <a:solidFill>
+                  <a:srgbClr val="DDE6FA"/>
+                </a:solidFill>
+                <a:latin typeface="Arial" pitchFamily="34" charset="0"/>
+                <a:ea typeface="Arial" pitchFamily="34" charset="-122"/>
+                <a:cs typeface="Arial" pitchFamily="34" charset="-120"/>
+              </a:rPr>
+              <a:t>Send a short Telegram summary after every run, failures included</a:t>
+            </a:r>
+            <a:endParaRPr lang="en-US" sz="1200" dirty="0"/>
+          </a:p>
+        </p:txBody>
+      </p:sp>
+    </p:spTree>
+  </p:cSld>
+  <p:clrMapOvr>
+    <a:masterClrMapping/>
+  </p:clrMapOvr>
+</p:sld>
+</file>
+
 <file path=ppt/slides/slide2.xml><?xml version="1.0" encoding="utf-8"?>
 <p:sld xmlns:a="http://schemas.openxmlformats.org/drawingml/2006/main" xmlns:r="http://schemas.openxmlformats.org/officeDocument/2006/relationships" xmlns:p="http://schemas.openxmlformats.org/presentationml/2006/main">
   <p:cSld name="Slide 2">
@@ -13440,7 +14719,7 @@
                 <a:ea typeface="Arial" pitchFamily="34" charset="-122"/>
                 <a:cs typeface="Arial" pitchFamily="34" charset="-120"/>
               </a:rPr>
-              <a:t>12</a:t>
+              <a:t>13</a:t>
             </a:r>
             <a:endParaRPr lang="en-US" sz="900" dirty="0"/>
           </a:p>
@@ -14544,7 +15823,7 @@
                 <a:ea typeface="Arial" pitchFamily="34" charset="-122"/>
                 <a:cs typeface="Arial" pitchFamily="34" charset="-120"/>
               </a:rPr>
-              <a:t>13</a:t>
+              <a:t>14</a:t>
             </a:r>
             <a:endParaRPr lang="en-US" sz="900" dirty="0"/>
           </a:p>
@@ -15860,7 +17139,7 @@
                 <a:ea typeface="Arial" pitchFamily="34" charset="-122"/>
                 <a:cs typeface="Arial" pitchFamily="34" charset="-120"/>
               </a:rPr>
-              <a:t>14</a:t>
+              <a:t>15</a:t>
             </a:r>
             <a:endParaRPr lang="en-US" sz="900" dirty="0"/>
           </a:p>

--- a/docs/WatchAgent_Agentic_AI_Brownbag.pptx
+++ b/docs/WatchAgent_Agentic_AI_Brownbag.pptx
@@ -1457,7 +1457,7 @@
           <a:p>
             <a:r>
               <a:rPr lang="en-US" dirty="0"/>
-              <a:t>These are the five boxes from the diagram, in plain terms. Three do the work. watchagent check is the scheduler: every six hours it picks the watches that have gone longest without a check, researches three at a time, and sends a Telegram alert when one is a good buy. The research agent is the AI researcher: it searches, opens listings, and keeps handing in what it finds until three listings of the exact watch are accepted. The Telegram assistant is your chat window: it answers questions and can run a fresh check, but it can only suggest changes, and nothing happens until you tap Confirm. Two keep that work honest. The listing checks are plain code, no AI: a price counts only if it is really on the page, for the exact reference, and not far off the others; the middle price is recorded and the verdict is simple arithmetic. The model middleware wraps every AI call: it makes the AI research before answering, retries when the service is busy, switches to a backup model, caps the steps, and keeps a daily limit so the assistant always has requests left.</a:t>
+              <a:t>These are the five boxes from the diagram, in plain terms. Three do the work. watchagent check is the scheduler: every six hours it picks the watches that have gone longest without a check, researches three at a time, and sends a Telegram alert when one is a good buy. The research agent is the AI researcher: it searches, opens listings, and keeps handing in what it finds until three listings of the exact watch are accepted. The Telegram assistant is your chat window: it answers questions and can run a fresh check, but it can only suggest changes, and nothing happens until you tap Confirm. Two keep that work honest. The listing checks are plain code, no AI: a price counts only if it is really on the page, for the exact reference, and not far off the others; the middle price is recorded and the verdict is simple arithmetic. The model middleware wraps every AI call: it makes the AI research before answering, retries when the service is busy, switches to a backup model, caps the steps, and keeps a daily limit so the assistant always has requests left. Underneath all of this is cli.py, the control panel: the command line that starts everything. The check command runs a round and sends the alerts and the summary, the bot command answers Telegram, and add and list manage the watchlist. GitHub Actions simply runs these commands on a schedule.</a:t>
             </a:r>
             <a:endParaRPr lang="en-US" dirty="0"/>
           </a:p>
@@ -7404,7 +7404,7 @@
                 <a:ea typeface="Arial" pitchFamily="34" charset="-122"/>
                 <a:cs typeface="Arial" pitchFamily="34" charset="-120"/>
               </a:rPr>
-              <a:t>Source: watchagent/cli.py, agent.py, bot.py, tools.py (commit 49bd438); names match the architecture diagram</a:t>
+              <a:t>Source: watchagent/cli.py, agent.py, bot.py, tools.py (commit b649964); names match the architecture diagram</a:t>
             </a:r>
             <a:endParaRPr lang="en-US" sz="900" dirty="0"/>
           </a:p>
@@ -7496,8 +7496,8 @@
         </p:nvSpPr>
         <p:spPr>
           <a:xfrm>
-            <a:off x="548640" y="1965960"/>
-            <a:ext cx="3544824" cy="1874520"/>
+            <a:off x="548640" y="1938528"/>
+            <a:ext cx="3544824" cy="1572768"/>
           </a:xfrm>
           <a:prstGeom prst="rect">
             <a:avLst/>
@@ -7521,7 +7521,7 @@
         </p:nvSpPr>
         <p:spPr>
           <a:xfrm>
-            <a:off x="777240" y="2148840"/>
+            <a:off x="777240" y="2084832"/>
             <a:ext cx="3087624" cy="320040"/>
           </a:xfrm>
           <a:prstGeom prst="rect">
@@ -7560,7 +7560,7 @@
         </p:nvSpPr>
         <p:spPr>
           <a:xfrm>
-            <a:off x="777240" y="2496312"/>
+            <a:off x="777240" y="2414016"/>
             <a:ext cx="3087624" cy="228600"/>
           </a:xfrm>
           <a:prstGeom prst="rect">
@@ -7599,8 +7599,8 @@
         </p:nvSpPr>
         <p:spPr>
           <a:xfrm>
-            <a:off x="777240" y="2807208"/>
-            <a:ext cx="3087624" cy="896112"/>
+            <a:off x="777240" y="2688336"/>
+            <a:ext cx="3087624" cy="731520"/>
           </a:xfrm>
           <a:prstGeom prst="rect">
             <a:avLst/>
@@ -7638,8 +7638,8 @@
         </p:nvSpPr>
         <p:spPr>
           <a:xfrm>
-            <a:off x="4322064" y="1965960"/>
-            <a:ext cx="3544824" cy="1874520"/>
+            <a:off x="4322064" y="1938528"/>
+            <a:ext cx="3544824" cy="1572768"/>
           </a:xfrm>
           <a:prstGeom prst="rect">
             <a:avLst/>
@@ -7663,7 +7663,7 @@
         </p:nvSpPr>
         <p:spPr>
           <a:xfrm>
-            <a:off x="4550664" y="2148840"/>
+            <a:off x="4550664" y="2084832"/>
             <a:ext cx="3087624" cy="320040"/>
           </a:xfrm>
           <a:prstGeom prst="rect">
@@ -7702,7 +7702,7 @@
         </p:nvSpPr>
         <p:spPr>
           <a:xfrm>
-            <a:off x="4550664" y="2496312"/>
+            <a:off x="4550664" y="2414016"/>
             <a:ext cx="3087624" cy="228600"/>
           </a:xfrm>
           <a:prstGeom prst="rect">
@@ -7741,8 +7741,8 @@
         </p:nvSpPr>
         <p:spPr>
           <a:xfrm>
-            <a:off x="4550664" y="2807208"/>
-            <a:ext cx="3087624" cy="896112"/>
+            <a:off x="4550664" y="2688336"/>
+            <a:ext cx="3087624" cy="731520"/>
           </a:xfrm>
           <a:prstGeom prst="rect">
             <a:avLst/>
@@ -7780,8 +7780,8 @@
         </p:nvSpPr>
         <p:spPr>
           <a:xfrm>
-            <a:off x="8095488" y="1965960"/>
-            <a:ext cx="3544824" cy="1874520"/>
+            <a:off x="8095488" y="1938528"/>
+            <a:ext cx="3544824" cy="1572768"/>
           </a:xfrm>
           <a:prstGeom prst="rect">
             <a:avLst/>
@@ -7805,7 +7805,7 @@
         </p:nvSpPr>
         <p:spPr>
           <a:xfrm>
-            <a:off x="8324088" y="2148840"/>
+            <a:off x="8324088" y="2084832"/>
             <a:ext cx="3087624" cy="320040"/>
           </a:xfrm>
           <a:prstGeom prst="rect">
@@ -7844,7 +7844,7 @@
         </p:nvSpPr>
         <p:spPr>
           <a:xfrm>
-            <a:off x="8324088" y="2496312"/>
+            <a:off x="8324088" y="2414016"/>
             <a:ext cx="3087624" cy="228600"/>
           </a:xfrm>
           <a:prstGeom prst="rect">
@@ -7883,8 +7883,8 @@
         </p:nvSpPr>
         <p:spPr>
           <a:xfrm>
-            <a:off x="8324088" y="2807208"/>
-            <a:ext cx="3087624" cy="896112"/>
+            <a:off x="8324088" y="2688336"/>
+            <a:ext cx="3087624" cy="731520"/>
           </a:xfrm>
           <a:prstGeom prst="rect">
             <a:avLst/>
@@ -7922,7 +7922,7 @@
         </p:nvSpPr>
         <p:spPr>
           <a:xfrm>
-            <a:off x="548640" y="4023360"/>
+            <a:off x="548640" y="3657600"/>
             <a:ext cx="5486400" cy="228600"/>
           </a:xfrm>
           <a:prstGeom prst="rect">
@@ -7961,8 +7961,8 @@
         </p:nvSpPr>
         <p:spPr>
           <a:xfrm>
-            <a:off x="548640" y="4297680"/>
-            <a:ext cx="5431536" cy="1828800"/>
+            <a:off x="548640" y="3904488"/>
+            <a:ext cx="5431536" cy="1417320"/>
           </a:xfrm>
           <a:prstGeom prst="rect">
             <a:avLst/>
@@ -7986,7 +7986,7 @@
         </p:nvSpPr>
         <p:spPr>
           <a:xfrm>
-            <a:off x="777240" y="4480560"/>
+            <a:off x="777240" y="4050792"/>
             <a:ext cx="4974336" cy="320040"/>
           </a:xfrm>
           <a:prstGeom prst="rect">
@@ -8025,7 +8025,7 @@
         </p:nvSpPr>
         <p:spPr>
           <a:xfrm>
-            <a:off x="777240" y="4828032"/>
+            <a:off x="777240" y="4379976"/>
             <a:ext cx="4974336" cy="228600"/>
           </a:xfrm>
           <a:prstGeom prst="rect">
@@ -8064,8 +8064,8 @@
         </p:nvSpPr>
         <p:spPr>
           <a:xfrm>
-            <a:off x="777240" y="5138928"/>
-            <a:ext cx="4974336" cy="850392"/>
+            <a:off x="777240" y="4654296"/>
+            <a:ext cx="4974336" cy="576072"/>
           </a:xfrm>
           <a:prstGeom prst="rect">
             <a:avLst/>
@@ -8103,8 +8103,8 @@
         </p:nvSpPr>
         <p:spPr>
           <a:xfrm>
-            <a:off x="6208776" y="4297680"/>
-            <a:ext cx="5431536" cy="1828800"/>
+            <a:off x="6208776" y="3904488"/>
+            <a:ext cx="5431536" cy="1417320"/>
           </a:xfrm>
           <a:prstGeom prst="rect">
             <a:avLst/>
@@ -8128,7 +8128,7 @@
         </p:nvSpPr>
         <p:spPr>
           <a:xfrm>
-            <a:off x="6437376" y="4480560"/>
+            <a:off x="6437376" y="4050792"/>
             <a:ext cx="4974336" cy="320040"/>
           </a:xfrm>
           <a:prstGeom prst="rect">
@@ -8167,7 +8167,7 @@
         </p:nvSpPr>
         <p:spPr>
           <a:xfrm>
-            <a:off x="6437376" y="4828032"/>
+            <a:off x="6437376" y="4379976"/>
             <a:ext cx="4974336" cy="228600"/>
           </a:xfrm>
           <a:prstGeom prst="rect">
@@ -8206,8 +8206,8 @@
         </p:nvSpPr>
         <p:spPr>
           <a:xfrm>
-            <a:off x="6437376" y="5138928"/>
-            <a:ext cx="4974336" cy="850392"/>
+            <a:off x="6437376" y="4654296"/>
+            <a:ext cx="4974336" cy="576072"/>
           </a:xfrm>
           <a:prstGeom prst="rect">
             <a:avLst/>
@@ -8232,6 +8232,148 @@
                 <a:cs typeface="Arial" pitchFamily="34" charset="-120"/>
               </a:rPr>
               <a:t>Makes the AI research before it answers, retries when the AI service is busy, switches to a backup model, caps the steps one check can take, and keeps a daily limit so the assistant always has requests left.</a:t>
+            </a:r>
+            <a:endParaRPr lang="en-US" sz="1200" dirty="0"/>
+          </a:p>
+        </p:txBody>
+      </p:sp>
+      <p:sp>
+        <p:nvSpPr>
+          <p:cNvPr id="124" name="Shape 22"/>
+          <p:cNvSpPr/>
+          <p:nvPr/>
+        </p:nvSpPr>
+        <p:spPr>
+          <a:xfrm>
+            <a:off x="548640" y="5458968"/>
+            <a:ext cx="11091672" cy="713232"/>
+          </a:xfrm>
+          <a:prstGeom prst="rect">
+            <a:avLst/>
+          </a:prstGeom>
+          <a:solidFill>
+            <a:srgbClr val="DDE6FA"/>
+          </a:solidFill>
+          <a:ln w="12700">
+            <a:solidFill>
+              <a:srgbClr val="DDE6FA"/>
+            </a:solidFill>
+            <a:prstDash val="solid"/>
+          </a:ln>
+        </p:spPr>
+      </p:sp>
+      <p:sp>
+        <p:nvSpPr>
+          <p:cNvPr id="125" name="Text 23"/>
+          <p:cNvSpPr txBox="1"/>
+          <p:nvPr/>
+        </p:nvSpPr>
+        <p:spPr>
+          <a:xfrm>
+            <a:off x="777240" y="5559552"/>
+            <a:ext cx="2103120" cy="274320"/>
+          </a:xfrm>
+          <a:prstGeom prst="rect">
+            <a:avLst/>
+          </a:prstGeom>
+          <a:noFill/>
+          <a:ln/>
+        </p:spPr>
+        <p:txBody>
+          <a:bodyPr wrap="square" lIns="0" tIns="0" rIns="0" bIns="0" rtlCol="0" anchor="t"/>
+          <a:lstStyle/>
+          <a:p>
+            <a:pPr indent="0" marL="0">
+              <a:buNone/>
+            </a:pPr>
+            <a:r>
+              <a:rPr lang="en-US" sz="1600" b="1" dirty="0">
+                <a:solidFill>
+                  <a:srgbClr val="051C2C"/>
+                </a:solidFill>
+                <a:latin typeface="Georgia" pitchFamily="34" charset="0"/>
+                <a:ea typeface="Georgia" pitchFamily="34" charset="-122"/>
+                <a:cs typeface="Georgia" pitchFamily="34" charset="-120"/>
+              </a:rPr>
+              <a:t>cli.py</a:t>
+            </a:r>
+            <a:endParaRPr lang="en-US" sz="1600" dirty="0"/>
+          </a:p>
+        </p:txBody>
+      </p:sp>
+      <p:sp>
+        <p:nvSpPr>
+          <p:cNvPr id="126" name="Text 24"/>
+          <p:cNvSpPr txBox="1"/>
+          <p:nvPr/>
+        </p:nvSpPr>
+        <p:spPr>
+          <a:xfrm>
+            <a:off x="777240" y="5870448"/>
+            <a:ext cx="2103120" cy="228600"/>
+          </a:xfrm>
+          <a:prstGeom prst="rect">
+            <a:avLst/>
+          </a:prstGeom>
+          <a:noFill/>
+          <a:ln/>
+        </p:spPr>
+        <p:txBody>
+          <a:bodyPr wrap="square" lIns="0" tIns="0" rIns="0" bIns="0" rtlCol="0" anchor="t"/>
+          <a:lstStyle/>
+          <a:p>
+            <a:pPr indent="0" marL="0">
+              <a:buNone/>
+            </a:pPr>
+            <a:r>
+              <a:rPr lang="en-US" sz="1100" b="1" dirty="0">
+                <a:solidFill>
+                  <a:srgbClr val="2251FF"/>
+                </a:solidFill>
+                <a:latin typeface="Arial" pitchFamily="34" charset="0"/>
+                <a:ea typeface="Arial" pitchFamily="34" charset="-122"/>
+                <a:cs typeface="Arial" pitchFamily="34" charset="-120"/>
+              </a:rPr>
+              <a:t>The control panel</a:t>
+            </a:r>
+            <a:endParaRPr lang="en-US" sz="1100" dirty="0"/>
+          </a:p>
+        </p:txBody>
+      </p:sp>
+      <p:sp>
+        <p:nvSpPr>
+          <p:cNvPr id="127" name="Text 25"/>
+          <p:cNvSpPr txBox="1"/>
+          <p:nvPr/>
+        </p:nvSpPr>
+        <p:spPr>
+          <a:xfrm>
+            <a:off x="2971800" y="5577840"/>
+            <a:ext cx="8458200" cy="502920"/>
+          </a:xfrm>
+          <a:prstGeom prst="rect">
+            <a:avLst/>
+          </a:prstGeom>
+          <a:noFill/>
+          <a:ln/>
+        </p:spPr>
+        <p:txBody>
+          <a:bodyPr wrap="square" lIns="0" tIns="0" rIns="0" bIns="0" rtlCol="0" anchor="ctr"/>
+          <a:lstStyle/>
+          <a:p>
+            <a:pPr indent="0" marL="0">
+              <a:buNone/>
+            </a:pPr>
+            <a:r>
+              <a:rPr lang="en-US" sz="1200" dirty="0">
+                <a:solidFill>
+                  <a:srgbClr val="1F2933"/>
+                </a:solidFill>
+                <a:latin typeface="Arial" pitchFamily="34" charset="0"/>
+                <a:ea typeface="Arial" pitchFamily="34" charset="-122"/>
+                <a:cs typeface="Arial" pitchFamily="34" charset="-120"/>
+              </a:rPr>
+              <a:t>The command line behind everything: “check” runs a round and sends the alerts and summary, “bot” answers Telegram, and “add” / “list” manage the watchlist. GitHub Actions simply runs these commands on a schedule.</a:t>
             </a:r>
             <a:endParaRPr lang="en-US" sz="1200" dirty="0"/>
           </a:p>
